--- a/Session_1_Aufbau_und_EVA/S1_Folien.pptx
+++ b/Session_1_Aufbau_und_EVA/S1_Folien.pptx
@@ -1782,11 +1782,11 @@
             <a:r>
               <a:rPr lang="en-US" sz="1000" dirty="0">
                 <a:solidFill>
-                  <a:srgbClr val="5B6B73"/>
-                </a:solidFill>
-                <a:latin typeface="Calibri" pitchFamily="34" charset="0"/>
-                <a:ea typeface="Calibri" pitchFamily="34" charset="-122"/>
-                <a:cs typeface="Calibri" pitchFamily="34" charset="-120"/>
+                  <a:srgbClr val="706F6F"/>
+                </a:solidFill>
+                <a:latin typeface="Lucida Sans" pitchFamily="34" charset="0"/>
+                <a:ea typeface="Lucida Sans" pitchFamily="34" charset="-122"/>
+                <a:cs typeface="Lucida Sans" pitchFamily="34" charset="-120"/>
               </a:rPr>
               <a:t>Der mBot2 im Fachunterricht · Sitzung 1 · CC BY 4.0</a:t>
             </a:r>
@@ -1794,18 +1794,42 @@
           </a:p>
         </p:txBody>
       </p:sp>
-      <p:sp>
-        <p:nvSpPr>
-          <p:cNvPr id="3" name="Text 1"/>
+      <p:pic>
+        <p:nvPicPr>
+          <p:cNvPr id="3" name="Image 0" descr="/Users/h_tegelbeckers/Library/CloudStorage/Nextcloud-cloud.ovgu.de-HannesTegelbeckers/PROF_INGPED_TECHED/Admin/Personal/Lehre/Tegelbeckers Hannes/06_Lehrinhalte/Didaktikwerkstatt/DW-T 2026/Agent_Improved/assets/ovgu_fhw_logo.png">    </p:cNvPr>
+          <p:cNvPicPr>
+            <a:picLocks noChangeAspect="1"/>
+          </p:cNvPicPr>
+          <p:nvPr/>
+        </p:nvPicPr>
+        <p:blipFill>
+          <a:blip r:embed="rId1"/>
+          <a:stretch>
+            <a:fillRect/>
+          </a:stretch>
+        </p:blipFill>
+        <p:spPr>
+          <a:xfrm>
+            <a:off x="9174175" y="274320"/>
+            <a:ext cx="2468880" cy="564756"/>
+          </a:xfrm>
+          <a:prstGeom prst="rect">
+            <a:avLst/>
+          </a:prstGeom>
+        </p:spPr>
+      </p:pic>
+      <p:sp>
+        <p:nvSpPr>
+          <p:cNvPr id="4" name="Text 1"/>
           <p:cNvSpPr/>
           <p:nvPr>
-            <p:ph idx="101" type="title" hasCustomPrompt="1"/>
+            <p:ph idx="102" type="title" hasCustomPrompt="1"/>
           </p:nvPr>
         </p:nvSpPr>
         <p:spPr>
           <a:xfrm>
-            <a:off x="548640" y="320040"/>
-            <a:ext cx="11094415" cy="777240"/>
+            <a:off x="548640" y="274320"/>
+            <a:ext cx="8351215" cy="896112"/>
           </a:xfrm>
           <a:prstGeom prst="rect">
             <a:avLst/>
@@ -1816,23 +1840,23 @@
         <p:txBody>
           <a:bodyPr wrap="square" rtlCol="0"/>
           <a:lstStyle>
-            <a:lvl1pPr indent="0" marL="0">
-              <a:buNone/>
-              <a:defRPr lang="en-US" sz="3200" b="1" dirty="0">
-                <a:solidFill>
-                  <a:srgbClr val="0B3C49"/>
-                </a:solidFill>
-                <a:latin typeface="Cambria" pitchFamily="34" charset="0"/>
-                <a:ea typeface="Cambria" pitchFamily="34" charset="-122"/>
-                <a:cs typeface="Cambria" pitchFamily="34" charset="-120"/>
+            <a:lvl1pPr algn="l" indent="0" marL="0">
+              <a:buNone/>
+              <a:defRPr lang="en-US" sz="2600" b="1" dirty="0">
+                <a:solidFill>
+                  <a:srgbClr val="7A003F"/>
+                </a:solidFill>
+                <a:latin typeface="Lucida Sans" pitchFamily="34" charset="0"/>
+                <a:ea typeface="Lucida Sans" pitchFamily="34" charset="-122"/>
+                <a:cs typeface="Lucida Sans" pitchFamily="34" charset="-120"/>
               </a:defRPr>
             </a:lvl1pPr>
           </a:lstStyle>
           <a:p>
-            <a:pPr indent="0" marL="0">
-              <a:buNone/>
-            </a:pPr>
-            <a:endParaRPr lang="en-US" sz="3200" dirty="0"/>
+            <a:pPr algn="l" indent="0" marL="0">
+              <a:buNone/>
+            </a:pPr>
+            <a:endParaRPr lang="en-US" sz="2600" dirty="0"/>
           </a:p>
         </p:txBody>
       </p:sp>
@@ -1866,11 +1890,11 @@
             <a:lvl1pPr>
               <a:defRPr sz="1000">
                 <a:solidFill>
-                  <a:srgbClr val="5B6B73"/>
-                </a:solidFill>
-                <a:latin typeface="Calibri"/>
-                <a:ea typeface="Calibri"/>
-                <a:cs typeface="Calibri"/>
+                  <a:srgbClr val="706F6F"/>
+                </a:solidFill>
+                <a:latin typeface="Lucida Sans"/>
+                <a:ea typeface="Lucida Sans"/>
+                <a:cs typeface="Lucida Sans"/>
               </a:defRPr>
             </a:lvl1pPr>
           </a:lstStyle>
@@ -1894,11 +1918,11 @@
 
 <file path=ppt/slideLayouts/slideLayout3.xml><?xml version="1.0" encoding="utf-8"?>
 <p:sldLayout xmlns:a="http://schemas.openxmlformats.org/drawingml/2006/main" xmlns:r="http://schemas.openxmlformats.org/officeDocument/2006/relationships" xmlns:p="http://schemas.openxmlformats.org/presentationml/2006/main" preserve="1">
-  <p:cSld name="DUNKEL">
+  <p:cSld name="TITEL">
     <p:bg>
       <p:bgPr>
         <a:solidFill>
-          <a:srgbClr val="0B3C49"/>
+          <a:srgbClr val="FFFFFF"/>
         </a:solidFill>
       </p:bgPr>
     </p:bg>
@@ -1916,9 +1940,33 @@
           <a:chExt cx="0" cy="0"/>
         </a:xfrm>
       </p:grpSpPr>
-      <p:sp>
-        <p:nvSpPr>
-          <p:cNvPr id="2" name="Text 0"/>
+      <p:pic>
+        <p:nvPicPr>
+          <p:cNvPr id="2" name="Image 0" descr="/Users/h_tegelbeckers/Library/CloudStorage/Nextcloud-cloud.ovgu.de-HannesTegelbeckers/PROF_INGPED_TECHED/Admin/Personal/Lehre/Tegelbeckers Hannes/06_Lehrinhalte/Didaktikwerkstatt/DW-T 2026/Agent_Improved/assets/ovgu_fhw_logo.png">    </p:cNvPr>
+          <p:cNvPicPr>
+            <a:picLocks noChangeAspect="1"/>
+          </p:cNvPicPr>
+          <p:nvPr/>
+        </p:nvPicPr>
+        <p:blipFill>
+          <a:blip r:embed="rId1"/>
+          <a:stretch>
+            <a:fillRect/>
+          </a:stretch>
+        </p:blipFill>
+        <p:spPr>
+          <a:xfrm>
+            <a:off x="548640" y="457200"/>
+            <a:ext cx="5486400" cy="1255014"/>
+          </a:xfrm>
+          <a:prstGeom prst="rect">
+            <a:avLst/>
+          </a:prstGeom>
+        </p:spPr>
+      </p:pic>
+      <p:sp>
+        <p:nvSpPr>
+          <p:cNvPr id="3" name="Text 0"/>
           <p:cNvSpPr txBox="1"/>
           <p:nvPr/>
         </p:nvSpPr>
@@ -1943,11 +1991,11 @@
             <a:r>
               <a:rPr lang="en-US" sz="1000" dirty="0">
                 <a:solidFill>
-                  <a:srgbClr val="9FC3C0"/>
-                </a:solidFill>
-                <a:latin typeface="Calibri" pitchFamily="34" charset="0"/>
-                <a:ea typeface="Calibri" pitchFamily="34" charset="-122"/>
-                <a:cs typeface="Calibri" pitchFamily="34" charset="-120"/>
+                  <a:srgbClr val="706F6F"/>
+                </a:solidFill>
+                <a:latin typeface="Lucida Sans" pitchFamily="34" charset="0"/>
+                <a:ea typeface="Lucida Sans" pitchFamily="34" charset="-122"/>
+                <a:cs typeface="Lucida Sans" pitchFamily="34" charset="-120"/>
               </a:rPr>
               <a:t>Der mBot2 im Fachunterricht · Sitzung 1 · CC BY 4.0</a:t>
             </a:r>
@@ -2010,11 +2058,11 @@
             <a:lvl1pPr>
               <a:defRPr sz="1000">
                 <a:solidFill>
-                  <a:srgbClr val="5B6B73"/>
-                </a:solidFill>
-                <a:latin typeface="Calibri"/>
-                <a:ea typeface="Calibri"/>
-                <a:cs typeface="Calibri"/>
+                  <a:srgbClr val="706F6F"/>
+                </a:solidFill>
+                <a:latin typeface="Lucida Sans"/>
+                <a:ea typeface="Lucida Sans"/>
+                <a:cs typeface="Lucida Sans"/>
               </a:defRPr>
             </a:lvl1pPr>
           </a:lstStyle>
@@ -2315,8 +2363,8 @@
         </p:nvSpPr>
         <p:spPr>
           <a:xfrm>
-            <a:off x="548640" y="1188720"/>
-            <a:ext cx="9144000" cy="457200"/>
+            <a:off x="548640" y="2148840"/>
+            <a:ext cx="9144000" cy="411480"/>
           </a:xfrm>
           <a:prstGeom prst="rect">
             <a:avLst/>
@@ -2332,17 +2380,17 @@
               <a:buNone/>
             </a:pPr>
             <a:r>
-              <a:rPr lang="en-US" sz="1600" b="1" spc="200" kern="0" dirty="0">
-                <a:solidFill>
-                  <a:srgbClr val="F6B27A"/>
-                </a:solidFill>
-                <a:latin typeface="Calibri" pitchFamily="34" charset="0"/>
-                <a:ea typeface="Calibri" pitchFamily="34" charset="-122"/>
-                <a:cs typeface="Calibri" pitchFamily="34" charset="-120"/>
+              <a:rPr lang="en-US" sz="1400" b="1" spc="200" kern="0" dirty="0">
+                <a:solidFill>
+                  <a:srgbClr val="706F6F"/>
+                </a:solidFill>
+                <a:latin typeface="Lucida Sans" pitchFamily="34" charset="0"/>
+                <a:ea typeface="Lucida Sans" pitchFamily="34" charset="-122"/>
+                <a:cs typeface="Lucida Sans" pitchFamily="34" charset="-120"/>
               </a:rPr>
               <a:t>FORTBILDUNGSREIHE · DER mBOT2 IM FACHUNTERRICHT</a:t>
             </a:r>
-            <a:endParaRPr lang="en-US" sz="1600" dirty="0"/>
+            <a:endParaRPr lang="en-US" sz="1400" dirty="0"/>
           </a:p>
         </p:txBody>
       </p:sp>
@@ -2354,8 +2402,8 @@
         </p:nvSpPr>
         <p:spPr>
           <a:xfrm>
-            <a:off x="548640" y="1737360"/>
-            <a:ext cx="10515600" cy="1371600"/>
+            <a:off x="548640" y="2606040"/>
+            <a:ext cx="9509760" cy="1188720"/>
           </a:xfrm>
           <a:prstGeom prst="rect">
             <a:avLst/>
@@ -2371,17 +2419,17 @@
               <a:buNone/>
             </a:pPr>
             <a:r>
-              <a:rPr lang="en-US" sz="4400" b="1" dirty="0">
-                <a:solidFill>
-                  <a:srgbClr val="FFFFFF"/>
-                </a:solidFill>
-                <a:latin typeface="Cambria" pitchFamily="34" charset="0"/>
-                <a:ea typeface="Cambria" pitchFamily="34" charset="-122"/>
-                <a:cs typeface="Cambria" pitchFamily="34" charset="-120"/>
+              <a:rPr lang="en-US" sz="4000" b="1" dirty="0">
+                <a:solidFill>
+                  <a:srgbClr val="7A003F"/>
+                </a:solidFill>
+                <a:latin typeface="Lucida Sans" pitchFamily="34" charset="0"/>
+                <a:ea typeface="Lucida Sans" pitchFamily="34" charset="-122"/>
+                <a:cs typeface="Lucida Sans" pitchFamily="34" charset="-120"/>
               </a:rPr>
               <a:t>Den mBot2 kennenlernen</a:t>
             </a:r>
-            <a:endParaRPr lang="en-US" sz="4400" dirty="0"/>
+            <a:endParaRPr lang="en-US" sz="4000" dirty="0"/>
           </a:p>
         </p:txBody>
       </p:sp>
@@ -2393,8 +2441,8 @@
         </p:nvSpPr>
         <p:spPr>
           <a:xfrm>
-            <a:off x="548640" y="3200400"/>
-            <a:ext cx="10515600" cy="731520"/>
+            <a:off x="548640" y="3840480"/>
+            <a:ext cx="9509760" cy="640080"/>
           </a:xfrm>
           <a:prstGeom prst="rect">
             <a:avLst/>
@@ -2410,17 +2458,17 @@
               <a:buNone/>
             </a:pPr>
             <a:r>
-              <a:rPr lang="en-US" sz="2200" dirty="0">
-                <a:solidFill>
-                  <a:srgbClr val="CFE5E3"/>
-                </a:solidFill>
-                <a:latin typeface="Calibri" pitchFamily="34" charset="0"/>
-                <a:ea typeface="Calibri" pitchFamily="34" charset="-122"/>
-                <a:cs typeface="Calibri" pitchFamily="34" charset="-120"/>
+              <a:rPr lang="en-US" sz="2000" dirty="0">
+                <a:solidFill>
+                  <a:srgbClr val="1D1D1B"/>
+                </a:solidFill>
+                <a:latin typeface="Lucida Sans" pitchFamily="34" charset="0"/>
+                <a:ea typeface="Lucida Sans" pitchFamily="34" charset="-122"/>
+                <a:cs typeface="Lucida Sans" pitchFamily="34" charset="-120"/>
               </a:rPr>
               <a:t>Aufbau, EVA-Prinzip und erstes Programm</a:t>
             </a:r>
-            <a:endParaRPr lang="en-US" sz="2200" dirty="0"/>
+            <a:endParaRPr lang="en-US" sz="2000" dirty="0"/>
           </a:p>
         </p:txBody>
       </p:sp>
@@ -2432,8 +2480,8 @@
         </p:nvSpPr>
         <p:spPr>
           <a:xfrm>
-            <a:off x="548640" y="4389120"/>
-            <a:ext cx="2514600" cy="548640"/>
+            <a:off x="548640" y="4800600"/>
+            <a:ext cx="2697480" cy="548640"/>
           </a:xfrm>
           <a:prstGeom prst="roundRect">
             <a:avLst>
@@ -2441,11 +2489,11 @@
             </a:avLst>
           </a:prstGeom>
           <a:solidFill>
-            <a:srgbClr val="174F5E"/>
+            <a:srgbClr val="FDF0E3"/>
           </a:solidFill>
           <a:ln w="12700">
             <a:solidFill>
-              <a:srgbClr val="2C6E7C"/>
+              <a:srgbClr val="EF7D00"/>
             </a:solidFill>
             <a:prstDash val="solid"/>
           </a:ln>
@@ -2459,8 +2507,8 @@
         </p:nvSpPr>
         <p:spPr>
           <a:xfrm>
-            <a:off x="548640" y="4389120"/>
-            <a:ext cx="2514600" cy="548640"/>
+            <a:off x="548640" y="4800600"/>
+            <a:ext cx="2697480" cy="548640"/>
           </a:xfrm>
           <a:prstGeom prst="rect">
             <a:avLst/>
@@ -2478,11 +2526,11 @@
             <a:r>
               <a:rPr lang="en-US" sz="1400" dirty="0">
                 <a:solidFill>
-                  <a:srgbClr val="FFFFFF"/>
-                </a:solidFill>
-                <a:latin typeface="Calibri" pitchFamily="34" charset="0"/>
-                <a:ea typeface="Calibri" pitchFamily="34" charset="-122"/>
-                <a:cs typeface="Calibri" pitchFamily="34" charset="-120"/>
+                  <a:srgbClr val="1D1D1B"/>
+                </a:solidFill>
+                <a:latin typeface="Lucida Sans" pitchFamily="34" charset="0"/>
+                <a:ea typeface="Lucida Sans" pitchFamily="34" charset="-122"/>
+                <a:cs typeface="Lucida Sans" pitchFamily="34" charset="-120"/>
               </a:rPr>
               <a:t>Sitzung 1 von 3</a:t>
             </a:r>
@@ -2498,8 +2546,8 @@
         </p:nvSpPr>
         <p:spPr>
           <a:xfrm>
-            <a:off x="3246120" y="4389120"/>
-            <a:ext cx="2514600" cy="548640"/>
+            <a:off x="3429000" y="4800600"/>
+            <a:ext cx="2697480" cy="548640"/>
           </a:xfrm>
           <a:prstGeom prst="roundRect">
             <a:avLst>
@@ -2507,11 +2555,11 @@
             </a:avLst>
           </a:prstGeom>
           <a:solidFill>
-            <a:srgbClr val="174F5E"/>
+            <a:srgbClr val="FDF0E3"/>
           </a:solidFill>
           <a:ln w="12700">
             <a:solidFill>
-              <a:srgbClr val="2C6E7C"/>
+              <a:srgbClr val="EF7D00"/>
             </a:solidFill>
             <a:prstDash val="solid"/>
           </a:ln>
@@ -2525,8 +2573,8 @@
         </p:nvSpPr>
         <p:spPr>
           <a:xfrm>
-            <a:off x="3246120" y="4389120"/>
-            <a:ext cx="2514600" cy="548640"/>
+            <a:off x="3429000" y="4800600"/>
+            <a:ext cx="2697480" cy="548640"/>
           </a:xfrm>
           <a:prstGeom prst="rect">
             <a:avLst/>
@@ -2544,11 +2592,11 @@
             <a:r>
               <a:rPr lang="en-US" sz="1400" dirty="0">
                 <a:solidFill>
-                  <a:srgbClr val="FFFFFF"/>
-                </a:solidFill>
-                <a:latin typeface="Calibri" pitchFamily="34" charset="0"/>
-                <a:ea typeface="Calibri" pitchFamily="34" charset="-122"/>
-                <a:cs typeface="Calibri" pitchFamily="34" charset="-120"/>
+                  <a:srgbClr val="1D1D1B"/>
+                </a:solidFill>
+                <a:latin typeface="Lucida Sans" pitchFamily="34" charset="0"/>
+                <a:ea typeface="Lucida Sans" pitchFamily="34" charset="-122"/>
+                <a:cs typeface="Lucida Sans" pitchFamily="34" charset="-120"/>
               </a:rPr>
               <a:t>90 Minuten</a:t>
             </a:r>
@@ -2564,8 +2612,8 @@
         </p:nvSpPr>
         <p:spPr>
           <a:xfrm>
-            <a:off x="5943600" y="4389120"/>
-            <a:ext cx="2514600" cy="548640"/>
+            <a:off x="6309360" y="4800600"/>
+            <a:ext cx="2697480" cy="548640"/>
           </a:xfrm>
           <a:prstGeom prst="roundRect">
             <a:avLst>
@@ -2573,11 +2621,11 @@
             </a:avLst>
           </a:prstGeom>
           <a:solidFill>
-            <a:srgbClr val="174F5E"/>
+            <a:srgbClr val="FDF0E3"/>
           </a:solidFill>
           <a:ln w="12700">
             <a:solidFill>
-              <a:srgbClr val="2C6E7C"/>
+              <a:srgbClr val="EF7D00"/>
             </a:solidFill>
             <a:prstDash val="solid"/>
           </a:ln>
@@ -2591,8 +2639,8 @@
         </p:nvSpPr>
         <p:spPr>
           <a:xfrm>
-            <a:off x="5943600" y="4389120"/>
-            <a:ext cx="2514600" cy="548640"/>
+            <a:off x="6309360" y="4800600"/>
+            <a:ext cx="2697480" cy="548640"/>
           </a:xfrm>
           <a:prstGeom prst="rect">
             <a:avLst/>
@@ -2610,11 +2658,11 @@
             <a:r>
               <a:rPr lang="en-US" sz="1400" dirty="0">
                 <a:solidFill>
-                  <a:srgbClr val="FFFFFF"/>
-                </a:solidFill>
-                <a:latin typeface="Calibri" pitchFamily="34" charset="0"/>
-                <a:ea typeface="Calibri" pitchFamily="34" charset="-122"/>
-                <a:cs typeface="Calibri" pitchFamily="34" charset="-120"/>
+                  <a:srgbClr val="1D1D1B"/>
+                </a:solidFill>
+                <a:latin typeface="Lucida Sans" pitchFamily="34" charset="0"/>
+                <a:ea typeface="Lucida Sans" pitchFamily="34" charset="-122"/>
+                <a:cs typeface="Lucida Sans" pitchFamily="34" charset="-120"/>
               </a:rPr>
               <a:t>Open Roberta Lab</a:t>
             </a:r>
@@ -2630,18 +2678,18 @@
         </p:nvSpPr>
         <p:spPr>
           <a:xfrm>
-            <a:off x="10180015" y="1188720"/>
-            <a:ext cx="1463040" cy="1463040"/>
+            <a:off x="10088575" y="2286000"/>
+            <a:ext cx="1554480" cy="1554480"/>
           </a:xfrm>
           <a:prstGeom prst="ellipse">
             <a:avLst/>
           </a:prstGeom>
           <a:solidFill>
-            <a:srgbClr val="E8772E"/>
+            <a:srgbClr val="EF7D00"/>
           </a:solidFill>
           <a:ln w="12700">
             <a:solidFill>
-              <a:srgbClr val="E8772E"/>
+              <a:srgbClr val="EF7D00"/>
             </a:solidFill>
             <a:prstDash val="solid"/>
           </a:ln>
@@ -2655,8 +2703,8 @@
         </p:nvSpPr>
         <p:spPr>
           <a:xfrm>
-            <a:off x="10180015" y="1188720"/>
-            <a:ext cx="1463040" cy="1463040"/>
+            <a:off x="10088575" y="2286000"/>
+            <a:ext cx="1554480" cy="1554480"/>
           </a:xfrm>
           <a:prstGeom prst="rect">
             <a:avLst/>
@@ -2674,11 +2722,11 @@
             <a:r>
               <a:rPr lang="en-US" sz="5400" b="1" dirty="0">
                 <a:solidFill>
-                  <a:srgbClr val="FFFFFF"/>
-                </a:solidFill>
-                <a:latin typeface="Calibri" pitchFamily="34" charset="0"/>
-                <a:ea typeface="Calibri" pitchFamily="34" charset="-122"/>
-                <a:cs typeface="Calibri" pitchFamily="34" charset="-120"/>
+                  <a:srgbClr val="1D1D1B"/>
+                </a:solidFill>
+                <a:latin typeface="Lucida Sans" pitchFamily="34" charset="0"/>
+                <a:ea typeface="Lucida Sans" pitchFamily="34" charset="-122"/>
+                <a:cs typeface="Lucida Sans" pitchFamily="34" charset="-120"/>
               </a:rPr>
               <a:t>1</a:t>
             </a:r>
@@ -2716,13 +2764,13 @@
           <p:cNvPr id="2" name="Text 1"/>
           <p:cNvSpPr/>
           <p:nvPr>
-            <p:ph idx="101" type="title" hasCustomPrompt="1"/>
+            <p:ph idx="102" type="title" hasCustomPrompt="1"/>
           </p:nvPr>
         </p:nvSpPr>
         <p:spPr>
           <a:xfrm>
-            <a:off x="548640" y="320040"/>
-            <a:ext cx="11094415" cy="777240"/>
+            <a:off x="548640" y="274320"/>
+            <a:ext cx="8351215" cy="896112"/>
           </a:xfrm>
           <a:prstGeom prst="rect">
             <a:avLst/>
@@ -2734,21 +2782,21 @@
           <a:bodyPr wrap="square" lIns="0" tIns="0" rIns="0" bIns="0" rtlCol="0" anchor="ctr"/>
           <a:lstStyle/>
           <a:p>
-            <a:pPr indent="0" marL="0">
-              <a:buNone/>
-            </a:pPr>
-            <a:r>
-              <a:rPr lang="en-US" sz="3200" b="1" dirty="0">
-                <a:solidFill>
-                  <a:srgbClr val="0B3C49"/>
-                </a:solidFill>
-                <a:latin typeface="Cambria" pitchFamily="34" charset="0"/>
-                <a:ea typeface="Cambria" pitchFamily="34" charset="-122"/>
-                <a:cs typeface="Cambria" pitchFamily="34" charset="-120"/>
+            <a:pPr algn="l" indent="0" marL="0">
+              <a:buNone/>
+            </a:pPr>
+            <a:r>
+              <a:rPr lang="en-US" sz="2600" b="1" dirty="0">
+                <a:solidFill>
+                  <a:srgbClr val="7A003F"/>
+                </a:solidFill>
+                <a:latin typeface="Lucida Sans" pitchFamily="34" charset="0"/>
+                <a:ea typeface="Lucida Sans" pitchFamily="34" charset="-122"/>
+                <a:cs typeface="Lucida Sans" pitchFamily="34" charset="-120"/>
               </a:rPr>
               <a:t>Merksatz</a:t>
             </a:r>
-            <a:endParaRPr lang="en-US" sz="3200" dirty="0"/>
+            <a:endParaRPr lang="en-US" sz="2600" dirty="0"/>
           </a:p>
         </p:txBody>
       </p:sp>
@@ -2769,11 +2817,11 @@
             </a:avLst>
           </a:prstGeom>
           <a:solidFill>
-            <a:srgbClr val="FCEBDD"/>
+            <a:srgbClr val="FDF0E3"/>
           </a:solidFill>
           <a:ln w="12700">
             <a:solidFill>
-              <a:srgbClr val="FCEBDD"/>
+              <a:srgbClr val="FDF0E3"/>
             </a:solidFill>
             <a:prstDash val="solid"/>
           </a:ln>
@@ -2806,11 +2854,11 @@
             <a:r>
               <a:rPr lang="en-US" sz="2800" b="1" dirty="0">
                 <a:solidFill>
-                  <a:srgbClr val="0B3C49"/>
-                </a:solidFill>
-                <a:latin typeface="Cambria" pitchFamily="34" charset="0"/>
-                <a:ea typeface="Cambria" pitchFamily="34" charset="-122"/>
-                <a:cs typeface="Cambria" pitchFamily="34" charset="-120"/>
+                  <a:srgbClr val="7A003F"/>
+                </a:solidFill>
+                <a:latin typeface="Lucida Sans" pitchFamily="34" charset="0"/>
+                <a:ea typeface="Lucida Sans" pitchFamily="34" charset="-122"/>
+                <a:cs typeface="Lucida Sans" pitchFamily="34" charset="-120"/>
               </a:rPr>
               <a:t>Beim mBot2 ist der Startblock eine Endlosschleife. Alles darin läuft immer wieder.</a:t>
             </a:r>
@@ -2835,11 +2883,11 @@
             </a:avLst>
           </a:prstGeom>
           <a:solidFill>
-            <a:srgbClr val="16323B"/>
+            <a:srgbClr val="3C3C3B"/>
           </a:solidFill>
           <a:ln w="12700">
             <a:solidFill>
-              <a:srgbClr val="16323B"/>
+              <a:srgbClr val="3C3C3B"/>
             </a:solidFill>
             <a:prstDash val="solid"/>
           </a:ln>
@@ -2872,7 +2920,7 @@
             <a:r>
               <a:rPr lang="en-US" sz="1700" dirty="0">
                 <a:solidFill>
-                  <a:srgbClr val="E6F2F1"/>
+                  <a:srgbClr val="FFFFFF"/>
                 </a:solidFill>
                 <a:latin typeface="Courier New" pitchFamily="34" charset="0"/>
                 <a:ea typeface="Courier New" pitchFamily="34" charset="-122"/>
@@ -2889,7 +2937,7 @@
             <a:r>
               <a:rPr lang="en-US" sz="1700" dirty="0">
                 <a:solidFill>
-                  <a:srgbClr val="E6F2F1"/>
+                  <a:srgbClr val="FFFFFF"/>
                 </a:solidFill>
                 <a:latin typeface="Courier New" pitchFamily="34" charset="0"/>
                 <a:ea typeface="Courier New" pitchFamily="34" charset="-122"/>
@@ -2906,7 +2954,7 @@
             <a:r>
               <a:rPr lang="en-US" sz="1700" dirty="0">
                 <a:solidFill>
-                  <a:srgbClr val="E6F2F1"/>
+                  <a:srgbClr val="FFFFFF"/>
                 </a:solidFill>
                 <a:latin typeface="Courier New" pitchFamily="34" charset="0"/>
                 <a:ea typeface="Courier New" pitchFamily="34" charset="-122"/>
@@ -2923,7 +2971,7 @@
             <a:r>
               <a:rPr lang="en-US" sz="1700" dirty="0">
                 <a:solidFill>
-                  <a:srgbClr val="E6F2F1"/>
+                  <a:srgbClr val="FFFFFF"/>
                 </a:solidFill>
                 <a:latin typeface="Courier New" pitchFamily="34" charset="0"/>
                 <a:ea typeface="Courier New" pitchFamily="34" charset="-122"/>
@@ -2966,11 +3014,11 @@
             <a:r>
               <a:rPr lang="en-US" sz="1700" dirty="0">
                 <a:solidFill>
-                  <a:srgbClr val="1F2A30"/>
-                </a:solidFill>
-                <a:latin typeface="Calibri" pitchFamily="34" charset="0"/>
-                <a:ea typeface="Calibri" pitchFamily="34" charset="-122"/>
-                <a:cs typeface="Calibri" pitchFamily="34" charset="-120"/>
+                  <a:srgbClr val="1D1D1B"/>
+                </a:solidFill>
+                <a:latin typeface="Lucida Sans" pitchFamily="34" charset="0"/>
+                <a:ea typeface="Lucida Sans" pitchFamily="34" charset="-122"/>
+                <a:cs typeface="Lucida Sans" pitchFamily="34" charset="-120"/>
               </a:rPr>
               <a:t>Die Schleife lässt sich nicht entfernen.</a:t>
             </a:r>
@@ -2987,11 +3035,11 @@
             <a:r>
               <a:rPr lang="en-US" sz="1700" dirty="0">
                 <a:solidFill>
-                  <a:srgbClr val="1F2A30"/>
-                </a:solidFill>
-                <a:latin typeface="Calibri" pitchFamily="34" charset="0"/>
-                <a:ea typeface="Calibri" pitchFamily="34" charset="-122"/>
-                <a:cs typeface="Calibri" pitchFamily="34" charset="-120"/>
+                  <a:srgbClr val="1D1D1B"/>
+                </a:solidFill>
+                <a:latin typeface="Lucida Sans" pitchFamily="34" charset="0"/>
+                <a:ea typeface="Lucida Sans" pitchFamily="34" charset="-122"/>
+                <a:cs typeface="Lucida Sans" pitchFamily="34" charset="-120"/>
               </a:rPr>
               <a:t>„Warte bis Taste A gedrückt?“ als erster Block: Jeder Durchlauf startet erst auf Knopfdruck.</a:t>
             </a:r>
@@ -3008,11 +3056,11 @@
             <a:r>
               <a:rPr lang="en-US" sz="1700" dirty="0">
                 <a:solidFill>
-                  <a:srgbClr val="1F2A30"/>
-                </a:solidFill>
-                <a:latin typeface="Calibri" pitchFamily="34" charset="0"/>
-                <a:ea typeface="Calibri" pitchFamily="34" charset="-122"/>
-                <a:cs typeface="Calibri" pitchFamily="34" charset="-120"/>
+                  <a:srgbClr val="1D1D1B"/>
+                </a:solidFill>
+                <a:latin typeface="Lucida Sans" pitchFamily="34" charset="0"/>
+                <a:ea typeface="Lucida Sans" pitchFamily="34" charset="-122"/>
+                <a:cs typeface="Lucida Sans" pitchFamily="34" charset="-120"/>
               </a:rPr>
               <a:t>Auch eine gute Sicherheitsregel für die Klasse.</a:t>
             </a:r>
@@ -3050,11 +3098,11 @@
             <a:lvl1pPr>
               <a:defRPr sz="1000">
                 <a:solidFill>
-                  <a:srgbClr val="5B6B73"/>
-                </a:solidFill>
-                <a:latin typeface="Calibri"/>
-                <a:ea typeface="Calibri"/>
-                <a:cs typeface="Calibri"/>
+                  <a:srgbClr val="706F6F"/>
+                </a:solidFill>
+                <a:latin typeface="Lucida Sans"/>
+                <a:ea typeface="Lucida Sans"/>
+                <a:cs typeface="Lucida Sans"/>
               </a:defRPr>
             </a:lvl1pPr>
           </a:lstStyle>
@@ -3098,13 +3146,13 @@
           <p:cNvPr id="2" name="Text 1"/>
           <p:cNvSpPr/>
           <p:nvPr>
-            <p:ph idx="101" type="title" hasCustomPrompt="1"/>
+            <p:ph idx="102" type="title" hasCustomPrompt="1"/>
           </p:nvPr>
         </p:nvSpPr>
         <p:spPr>
           <a:xfrm>
-            <a:off x="548640" y="320040"/>
-            <a:ext cx="11094415" cy="777240"/>
+            <a:off x="548640" y="274320"/>
+            <a:ext cx="8351215" cy="896112"/>
           </a:xfrm>
           <a:prstGeom prst="rect">
             <a:avLst/>
@@ -3116,21 +3164,21 @@
           <a:bodyPr wrap="square" lIns="0" tIns="0" rIns="0" bIns="0" rtlCol="0" anchor="ctr"/>
           <a:lstStyle/>
           <a:p>
-            <a:pPr indent="0" marL="0">
-              <a:buNone/>
-            </a:pPr>
-            <a:r>
-              <a:rPr lang="en-US" sz="3200" b="1" dirty="0">
-                <a:solidFill>
-                  <a:srgbClr val="0B3C49"/>
-                </a:solidFill>
-                <a:latin typeface="Cambria" pitchFamily="34" charset="0"/>
-                <a:ea typeface="Cambria" pitchFamily="34" charset="-122"/>
-                <a:cs typeface="Cambria" pitchFamily="34" charset="-120"/>
+            <a:pPr algn="l" indent="0" marL="0">
+              <a:buNone/>
+            </a:pPr>
+            <a:r>
+              <a:rPr lang="en-US" sz="2600" b="1" dirty="0">
+                <a:solidFill>
+                  <a:srgbClr val="7A003F"/>
+                </a:solidFill>
+                <a:latin typeface="Lucida Sans" pitchFamily="34" charset="0"/>
+                <a:ea typeface="Lucida Sans" pitchFamily="34" charset="-122"/>
+                <a:cs typeface="Lucida Sans" pitchFamily="34" charset="-120"/>
               </a:rPr>
               <a:t>Erstes Programm: erst vorhersagen, dann testen</a:t>
             </a:r>
-            <a:endParaRPr lang="en-US" sz="3200" dirty="0"/>
+            <a:endParaRPr lang="en-US" sz="2600" dirty="0"/>
           </a:p>
         </p:txBody>
       </p:sp>
@@ -3151,11 +3199,11 @@
             </a:avLst>
           </a:prstGeom>
           <a:solidFill>
-            <a:srgbClr val="16323B"/>
+            <a:srgbClr val="3C3C3B"/>
           </a:solidFill>
           <a:ln w="12700">
             <a:solidFill>
-              <a:srgbClr val="16323B"/>
+              <a:srgbClr val="3C3C3B"/>
             </a:solidFill>
             <a:prstDash val="solid"/>
           </a:ln>
@@ -3188,7 +3236,7 @@
             <a:r>
               <a:rPr lang="en-US" sz="1700" dirty="0">
                 <a:solidFill>
-                  <a:srgbClr val="E6F2F1"/>
+                  <a:srgbClr val="FFFFFF"/>
                 </a:solidFill>
                 <a:latin typeface="Courier New" pitchFamily="34" charset="0"/>
                 <a:ea typeface="Courier New" pitchFamily="34" charset="-122"/>
@@ -3205,7 +3253,7 @@
             <a:r>
               <a:rPr lang="en-US" sz="1700" dirty="0">
                 <a:solidFill>
-                  <a:srgbClr val="E6F2F1"/>
+                  <a:srgbClr val="FFFFFF"/>
                 </a:solidFill>
                 <a:latin typeface="Courier New" pitchFamily="34" charset="0"/>
                 <a:ea typeface="Courier New" pitchFamily="34" charset="-122"/>
@@ -3222,7 +3270,7 @@
             <a:r>
               <a:rPr lang="en-US" sz="1700" dirty="0">
                 <a:solidFill>
-                  <a:srgbClr val="E6F2F1"/>
+                  <a:srgbClr val="FFFFFF"/>
                 </a:solidFill>
                 <a:latin typeface="Courier New" pitchFamily="34" charset="0"/>
                 <a:ea typeface="Courier New" pitchFamily="34" charset="-122"/>
@@ -3239,7 +3287,7 @@
             <a:r>
               <a:rPr lang="en-US" sz="1700" dirty="0">
                 <a:solidFill>
-                  <a:srgbClr val="E6F2F1"/>
+                  <a:srgbClr val="FFFFFF"/>
                 </a:solidFill>
                 <a:latin typeface="Courier New" pitchFamily="34" charset="0"/>
                 <a:ea typeface="Courier New" pitchFamily="34" charset="-122"/>
@@ -3256,7 +3304,7 @@
             <a:r>
               <a:rPr lang="en-US" sz="1700" dirty="0">
                 <a:solidFill>
-                  <a:srgbClr val="E6F2F1"/>
+                  <a:srgbClr val="FFFFFF"/>
                 </a:solidFill>
                 <a:latin typeface="Courier New" pitchFamily="34" charset="0"/>
                 <a:ea typeface="Courier New" pitchFamily="34" charset="-122"/>
@@ -3273,7 +3321,7 @@
             <a:r>
               <a:rPr lang="en-US" sz="1700" dirty="0">
                 <a:solidFill>
-                  <a:srgbClr val="E6F2F1"/>
+                  <a:srgbClr val="FFFFFF"/>
                 </a:solidFill>
                 <a:latin typeface="Courier New" pitchFamily="34" charset="0"/>
                 <a:ea typeface="Courier New" pitchFamily="34" charset="-122"/>
@@ -3290,7 +3338,7 @@
             <a:r>
               <a:rPr lang="en-US" sz="1700" dirty="0">
                 <a:solidFill>
-                  <a:srgbClr val="E6F2F1"/>
+                  <a:srgbClr val="FFFFFF"/>
                 </a:solidFill>
                 <a:latin typeface="Courier New" pitchFamily="34" charset="0"/>
                 <a:ea typeface="Courier New" pitchFamily="34" charset="-122"/>
@@ -3307,7 +3355,7 @@
             <a:r>
               <a:rPr lang="en-US" sz="1700" dirty="0">
                 <a:solidFill>
-                  <a:srgbClr val="E6F2F1"/>
+                  <a:srgbClr val="FFFFFF"/>
                 </a:solidFill>
                 <a:latin typeface="Courier New" pitchFamily="34" charset="0"/>
                 <a:ea typeface="Courier New" pitchFamily="34" charset="-122"/>
@@ -3324,7 +3372,7 @@
             <a:r>
               <a:rPr lang="en-US" sz="1700" dirty="0">
                 <a:solidFill>
-                  <a:srgbClr val="E6F2F1"/>
+                  <a:srgbClr val="FFFFFF"/>
                 </a:solidFill>
                 <a:latin typeface="Courier New" pitchFamily="34" charset="0"/>
                 <a:ea typeface="Courier New" pitchFamily="34" charset="-122"/>
@@ -3353,11 +3401,11 @@
             </a:avLst>
           </a:prstGeom>
           <a:solidFill>
-            <a:srgbClr val="E6F2F1"/>
+            <a:srgbClr val="F2F2F2"/>
           </a:solidFill>
           <a:ln w="12700">
             <a:solidFill>
-              <a:srgbClr val="E6F2F1"/>
+              <a:srgbClr val="F2F2F2"/>
             </a:solidFill>
             <a:prstDash val="solid"/>
           </a:ln>
@@ -3390,11 +3438,11 @@
             <a:r>
               <a:rPr lang="en-US" sz="1800" b="1" dirty="0">
                 <a:solidFill>
-                  <a:srgbClr val="0B3C49"/>
-                </a:solidFill>
-                <a:latin typeface="Calibri" pitchFamily="34" charset="0"/>
-                <a:ea typeface="Calibri" pitchFamily="34" charset="-122"/>
-                <a:cs typeface="Calibri" pitchFamily="34" charset="-120"/>
+                  <a:srgbClr val="7A003F"/>
+                </a:solidFill>
+                <a:latin typeface="Lucida Sans" pitchFamily="34" charset="0"/>
+                <a:ea typeface="Lucida Sans" pitchFamily="34" charset="-122"/>
+                <a:cs typeface="Lucida Sans" pitchFamily="34" charset="-120"/>
               </a:rPr>
               <a:t>Vorhersage (Tandem, 1 Min.)</a:t>
             </a:r>
@@ -3429,11 +3477,11 @@
             <a:r>
               <a:rPr lang="en-US" sz="1700" dirty="0">
                 <a:solidFill>
-                  <a:srgbClr val="1F2A30"/>
-                </a:solidFill>
-                <a:latin typeface="Calibri" pitchFamily="34" charset="0"/>
-                <a:ea typeface="Calibri" pitchFamily="34" charset="-122"/>
-                <a:cs typeface="Calibri" pitchFamily="34" charset="-120"/>
+                  <a:srgbClr val="1D1D1B"/>
+                </a:solidFill>
+                <a:latin typeface="Lucida Sans" pitchFamily="34" charset="0"/>
+                <a:ea typeface="Lucida Sans" pitchFamily="34" charset="-122"/>
+                <a:cs typeface="Lucida Sans" pitchFamily="34" charset="-120"/>
               </a:rPr>
               <a:t>Wo steht der mBot2 am Ende? In welche Richtung schaut er? Skizzieren Sie Start und Ende.</a:t>
             </a:r>
@@ -3458,11 +3506,11 @@
             </a:avLst>
           </a:prstGeom>
           <a:solidFill>
-            <a:srgbClr val="FCEBDD"/>
+            <a:srgbClr val="FDF0E3"/>
           </a:solidFill>
           <a:ln w="12700">
             <a:solidFill>
-              <a:srgbClr val="FCEBDD"/>
+              <a:srgbClr val="FDF0E3"/>
             </a:solidFill>
             <a:prstDash val="solid"/>
           </a:ln>
@@ -3495,11 +3543,11 @@
             <a:r>
               <a:rPr lang="en-US" sz="1800" b="1" dirty="0">
                 <a:solidFill>
-                  <a:srgbClr val="0B3C49"/>
-                </a:solidFill>
-                <a:latin typeface="Calibri" pitchFamily="34" charset="0"/>
-                <a:ea typeface="Calibri" pitchFamily="34" charset="-122"/>
-                <a:cs typeface="Calibri" pitchFamily="34" charset="-120"/>
+                  <a:srgbClr val="7A003F"/>
+                </a:solidFill>
+                <a:latin typeface="Lucida Sans" pitchFamily="34" charset="0"/>
+                <a:ea typeface="Lucida Sans" pitchFamily="34" charset="-122"/>
+                <a:cs typeface="Lucida Sans" pitchFamily="34" charset="-120"/>
               </a:rPr>
               <a:t>Dann testen</a:t>
             </a:r>
@@ -3534,11 +3582,11 @@
             <a:r>
               <a:rPr lang="en-US" sz="1700" dirty="0">
                 <a:solidFill>
-                  <a:srgbClr val="1F2A30"/>
-                </a:solidFill>
-                <a:latin typeface="Calibri" pitchFamily="34" charset="0"/>
-                <a:ea typeface="Calibri" pitchFamily="34" charset="-122"/>
-                <a:cs typeface="Calibri" pitchFamily="34" charset="-120"/>
+                  <a:srgbClr val="1D1D1B"/>
+                </a:solidFill>
+                <a:latin typeface="Lucida Sans" pitchFamily="34" charset="0"/>
+                <a:ea typeface="Lucida Sans" pitchFamily="34" charset="-122"/>
+                <a:cs typeface="Lucida Sans" pitchFamily="34" charset="-120"/>
               </a:rPr>
               <a:t>Auf dem Boden fahren lassen. Stimmt die Vorhersage? Was weicht ab?</a:t>
             </a:r>
@@ -3576,11 +3624,11 @@
             <a:lvl1pPr>
               <a:defRPr sz="1000">
                 <a:solidFill>
-                  <a:srgbClr val="5B6B73"/>
-                </a:solidFill>
-                <a:latin typeface="Calibri"/>
-                <a:ea typeface="Calibri"/>
-                <a:cs typeface="Calibri"/>
+                  <a:srgbClr val="706F6F"/>
+                </a:solidFill>
+                <a:latin typeface="Lucida Sans"/>
+                <a:ea typeface="Lucida Sans"/>
+                <a:cs typeface="Lucida Sans"/>
               </a:defRPr>
             </a:lvl1pPr>
           </a:lstStyle>
@@ -3624,13 +3672,13 @@
           <p:cNvPr id="2" name="Text 1"/>
           <p:cNvSpPr/>
           <p:nvPr>
-            <p:ph idx="101" type="title" hasCustomPrompt="1"/>
+            <p:ph idx="102" type="title" hasCustomPrompt="1"/>
           </p:nvPr>
         </p:nvSpPr>
         <p:spPr>
           <a:xfrm>
-            <a:off x="548640" y="320040"/>
-            <a:ext cx="11094415" cy="777240"/>
+            <a:off x="548640" y="274320"/>
+            <a:ext cx="8351215" cy="896112"/>
           </a:xfrm>
           <a:prstGeom prst="rect">
             <a:avLst/>
@@ -3642,21 +3690,21 @@
           <a:bodyPr wrap="square" lIns="0" tIns="0" rIns="0" bIns="0" rtlCol="0" anchor="ctr"/>
           <a:lstStyle/>
           <a:p>
-            <a:pPr indent="0" marL="0">
-              <a:buNone/>
-            </a:pPr>
-            <a:r>
-              <a:rPr lang="en-US" sz="3200" b="1" dirty="0">
-                <a:solidFill>
-                  <a:srgbClr val="0B3C49"/>
-                </a:solidFill>
-                <a:latin typeface="Cambria" pitchFamily="34" charset="0"/>
-                <a:ea typeface="Cambria" pitchFamily="34" charset="-122"/>
-                <a:cs typeface="Cambria" pitchFamily="34" charset="-120"/>
+            <a:pPr algn="l" indent="0" marL="0">
+              <a:buNone/>
+            </a:pPr>
+            <a:r>
+              <a:rPr lang="en-US" sz="2600" b="1" dirty="0">
+                <a:solidFill>
+                  <a:srgbClr val="7A003F"/>
+                </a:solidFill>
+                <a:latin typeface="Lucida Sans" pitchFamily="34" charset="0"/>
+                <a:ea typeface="Lucida Sans" pitchFamily="34" charset="-122"/>
+                <a:cs typeface="Lucida Sans" pitchFamily="34" charset="-120"/>
               </a:rPr>
               <a:t>Ihre Aufgaben (11 Minuten)</a:t>
             </a:r>
-            <a:endParaRPr lang="en-US" sz="3200" dirty="0"/>
+            <a:endParaRPr lang="en-US" sz="2600" dirty="0"/>
           </a:p>
         </p:txBody>
       </p:sp>
@@ -3677,11 +3725,11 @@
             </a:avLst>
           </a:prstGeom>
           <a:solidFill>
-            <a:srgbClr val="E6F2F1"/>
+            <a:srgbClr val="F2F2F2"/>
           </a:solidFill>
           <a:ln w="12700">
             <a:solidFill>
-              <a:srgbClr val="E6F2F1"/>
+              <a:srgbClr val="F2F2F2"/>
             </a:solidFill>
             <a:prstDash val="solid"/>
           </a:ln>
@@ -3702,11 +3750,11 @@
             <a:avLst/>
           </a:prstGeom>
           <a:solidFill>
-            <a:srgbClr val="E8772E"/>
+            <a:srgbClr val="EF7D00"/>
           </a:solidFill>
           <a:ln w="12700">
             <a:solidFill>
-              <a:srgbClr val="E8772E"/>
+              <a:srgbClr val="EF7D00"/>
             </a:solidFill>
             <a:prstDash val="solid"/>
           </a:ln>
@@ -3739,11 +3787,11 @@
             <a:r>
               <a:rPr lang="en-US" sz="1600" b="1" dirty="0">
                 <a:solidFill>
-                  <a:srgbClr val="FFFFFF"/>
-                </a:solidFill>
-                <a:latin typeface="Calibri" pitchFamily="34" charset="0"/>
-                <a:ea typeface="Calibri" pitchFamily="34" charset="-122"/>
-                <a:cs typeface="Calibri" pitchFamily="34" charset="-120"/>
+                  <a:srgbClr val="1D1D1B"/>
+                </a:solidFill>
+                <a:latin typeface="Lucida Sans" pitchFamily="34" charset="0"/>
+                <a:ea typeface="Lucida Sans" pitchFamily="34" charset="-122"/>
+                <a:cs typeface="Lucida Sans" pitchFamily="34" charset="-120"/>
               </a:rPr>
               <a:t>1</a:t>
             </a:r>
@@ -3778,11 +3826,11 @@
             <a:r>
               <a:rPr lang="en-US" sz="1800" b="1" dirty="0">
                 <a:solidFill>
-                  <a:srgbClr val="0B3C49"/>
-                </a:solidFill>
-                <a:latin typeface="Calibri" pitchFamily="34" charset="0"/>
-                <a:ea typeface="Calibri" pitchFamily="34" charset="-122"/>
-                <a:cs typeface="Calibri" pitchFamily="34" charset="-120"/>
+                  <a:srgbClr val="7A003F"/>
+                </a:solidFill>
+                <a:latin typeface="Lucida Sans" pitchFamily="34" charset="0"/>
+                <a:ea typeface="Lucida Sans" pitchFamily="34" charset="-122"/>
+                <a:cs typeface="Lucida Sans" pitchFamily="34" charset="-120"/>
               </a:rPr>
               <a:t>Pflicht: Fahren</a:t>
             </a:r>
@@ -3821,11 +3869,11 @@
             <a:r>
               <a:rPr lang="en-US" sz="1700" dirty="0">
                 <a:solidFill>
-                  <a:srgbClr val="1F2A30"/>
-                </a:solidFill>
-                <a:latin typeface="Calibri" pitchFamily="34" charset="0"/>
-                <a:ea typeface="Calibri" pitchFamily="34" charset="-122"/>
-                <a:cs typeface="Calibri" pitchFamily="34" charset="-120"/>
+                  <a:srgbClr val="1D1D1B"/>
+                </a:solidFill>
+                <a:latin typeface="Lucida Sans" pitchFamily="34" charset="0"/>
+                <a:ea typeface="Lucida Sans" pitchFamily="34" charset="-122"/>
+                <a:cs typeface="Lucida Sans" pitchFamily="34" charset="-120"/>
               </a:rPr>
               <a:t>Programm von der letzten Folie</a:t>
             </a:r>
@@ -3842,11 +3890,11 @@
             <a:r>
               <a:rPr lang="en-US" sz="1700" dirty="0">
                 <a:solidFill>
-                  <a:srgbClr val="1F2A30"/>
-                </a:solidFill>
-                <a:latin typeface="Calibri" pitchFamily="34" charset="0"/>
-                <a:ea typeface="Calibri" pitchFamily="34" charset="-122"/>
-                <a:cs typeface="Calibri" pitchFamily="34" charset="-120"/>
+                  <a:srgbClr val="1D1D1B"/>
+                </a:solidFill>
+                <a:latin typeface="Lucida Sans" pitchFamily="34" charset="0"/>
+                <a:ea typeface="Lucida Sans" pitchFamily="34" charset="-122"/>
+                <a:cs typeface="Lucida Sans" pitchFamily="34" charset="-120"/>
               </a:rPr>
               <a:t>erst vorhersagen, dann testen</a:t>
             </a:r>
@@ -3863,11 +3911,11 @@
             <a:r>
               <a:rPr lang="en-US" sz="1700" dirty="0">
                 <a:solidFill>
-                  <a:srgbClr val="1F2A30"/>
-                </a:solidFill>
-                <a:latin typeface="Calibri" pitchFamily="34" charset="0"/>
-                <a:ea typeface="Calibri" pitchFamily="34" charset="-122"/>
-                <a:cs typeface="Calibri" pitchFamily="34" charset="-120"/>
+                  <a:srgbClr val="1D1D1B"/>
+                </a:solidFill>
+                <a:latin typeface="Lucida Sans" pitchFamily="34" charset="0"/>
+                <a:ea typeface="Lucida Sans" pitchFamily="34" charset="-122"/>
+                <a:cs typeface="Lucida Sans" pitchFamily="34" charset="-120"/>
               </a:rPr>
               <a:t>Fahrtests auf dem Boden</a:t>
             </a:r>
@@ -3892,11 +3940,11 @@
             </a:avLst>
           </a:prstGeom>
           <a:solidFill>
-            <a:srgbClr val="E6F2F1"/>
+            <a:srgbClr val="F2F2F2"/>
           </a:solidFill>
           <a:ln w="12700">
             <a:solidFill>
-              <a:srgbClr val="E6F2F1"/>
+              <a:srgbClr val="F2F2F2"/>
             </a:solidFill>
             <a:prstDash val="solid"/>
           </a:ln>
@@ -3917,11 +3965,11 @@
             <a:avLst/>
           </a:prstGeom>
           <a:solidFill>
-            <a:srgbClr val="0B6E69"/>
+            <a:srgbClr val="7A003F"/>
           </a:solidFill>
           <a:ln w="12700">
             <a:solidFill>
-              <a:srgbClr val="0B6E69"/>
+              <a:srgbClr val="7A003F"/>
             </a:solidFill>
             <a:prstDash val="solid"/>
           </a:ln>
@@ -3956,9 +4004,9 @@
                 <a:solidFill>
                   <a:srgbClr val="FFFFFF"/>
                 </a:solidFill>
-                <a:latin typeface="Calibri" pitchFamily="34" charset="0"/>
-                <a:ea typeface="Calibri" pitchFamily="34" charset="-122"/>
-                <a:cs typeface="Calibri" pitchFamily="34" charset="-120"/>
+                <a:latin typeface="Lucida Sans" pitchFamily="34" charset="0"/>
+                <a:ea typeface="Lucida Sans" pitchFamily="34" charset="-122"/>
+                <a:cs typeface="Lucida Sans" pitchFamily="34" charset="-120"/>
               </a:rPr>
               <a:t>2</a:t>
             </a:r>
@@ -3993,11 +4041,11 @@
             <a:r>
               <a:rPr lang="en-US" sz="1800" b="1" dirty="0">
                 <a:solidFill>
-                  <a:srgbClr val="0B3C49"/>
-                </a:solidFill>
-                <a:latin typeface="Calibri" pitchFamily="34" charset="0"/>
-                <a:ea typeface="Calibri" pitchFamily="34" charset="-122"/>
-                <a:cs typeface="Calibri" pitchFamily="34" charset="-120"/>
+                  <a:srgbClr val="7A003F"/>
+                </a:solidFill>
+                <a:latin typeface="Lucida Sans" pitchFamily="34" charset="0"/>
+                <a:ea typeface="Lucida Sans" pitchFamily="34" charset="-122"/>
+                <a:cs typeface="Lucida Sans" pitchFamily="34" charset="-120"/>
               </a:rPr>
               <a:t>Wahl: Licht, Klang, Text</a:t>
             </a:r>
@@ -4036,11 +4084,11 @@
             <a:r>
               <a:rPr lang="en-US" sz="1700" dirty="0">
                 <a:solidFill>
-                  <a:srgbClr val="1F2A30"/>
-                </a:solidFill>
-                <a:latin typeface="Calibri" pitchFamily="34" charset="0"/>
-                <a:ea typeface="Calibri" pitchFamily="34" charset="-122"/>
-                <a:cs typeface="Calibri" pitchFamily="34" charset="-120"/>
+                  <a:srgbClr val="1D1D1B"/>
+                </a:solidFill>
+                <a:latin typeface="Lucida Sans" pitchFamily="34" charset="0"/>
+                <a:ea typeface="Lucida Sans" pitchFamily="34" charset="-122"/>
+                <a:cs typeface="Lucida Sans" pitchFamily="34" charset="-120"/>
               </a:rPr>
               <a:t>LEDs rot – grün – blau</a:t>
             </a:r>
@@ -4057,11 +4105,11 @@
             <a:r>
               <a:rPr lang="en-US" sz="1700" dirty="0">
                 <a:solidFill>
-                  <a:srgbClr val="1F2A30"/>
-                </a:solidFill>
-                <a:latin typeface="Calibri" pitchFamily="34" charset="0"/>
-                <a:ea typeface="Calibri" pitchFamily="34" charset="-122"/>
-                <a:cs typeface="Calibri" pitchFamily="34" charset="-120"/>
+                  <a:srgbClr val="1D1D1B"/>
+                </a:solidFill>
+                <a:latin typeface="Lucida Sans" pitchFamily="34" charset="0"/>
+                <a:ea typeface="Lucida Sans" pitchFamily="34" charset="-122"/>
+                <a:cs typeface="Lucida Sans" pitchFamily="34" charset="-120"/>
               </a:rPr>
               <a:t>Dreiklang c′ – e′ – g′</a:t>
             </a:r>
@@ -4078,11 +4126,11 @@
             <a:r>
               <a:rPr lang="en-US" sz="1700" dirty="0">
                 <a:solidFill>
-                  <a:srgbClr val="1F2A30"/>
-                </a:solidFill>
-                <a:latin typeface="Calibri" pitchFamily="34" charset="0"/>
-                <a:ea typeface="Calibri" pitchFamily="34" charset="-122"/>
-                <a:cs typeface="Calibri" pitchFamily="34" charset="-120"/>
+                  <a:srgbClr val="1D1D1B"/>
+                </a:solidFill>
+                <a:latin typeface="Lucida Sans" pitchFamily="34" charset="0"/>
+                <a:ea typeface="Lucida Sans" pitchFamily="34" charset="-122"/>
+                <a:cs typeface="Lucida Sans" pitchFamily="34" charset="-120"/>
               </a:rPr>
               <a:t>„Hallo“ und „Wie geht es dir?“</a:t>
             </a:r>
@@ -4107,11 +4155,11 @@
             </a:avLst>
           </a:prstGeom>
           <a:solidFill>
-            <a:srgbClr val="E6F2F1"/>
+            <a:srgbClr val="F2F2F2"/>
           </a:solidFill>
           <a:ln w="12700">
             <a:solidFill>
-              <a:srgbClr val="E6F2F1"/>
+              <a:srgbClr val="F2F2F2"/>
             </a:solidFill>
             <a:prstDash val="solid"/>
           </a:ln>
@@ -4132,11 +4180,11 @@
             <a:avLst/>
           </a:prstGeom>
           <a:solidFill>
-            <a:srgbClr val="0B6E69"/>
+            <a:srgbClr val="7A003F"/>
           </a:solidFill>
           <a:ln w="12700">
             <a:solidFill>
-              <a:srgbClr val="0B6E69"/>
+              <a:srgbClr val="7A003F"/>
             </a:solidFill>
             <a:prstDash val="solid"/>
           </a:ln>
@@ -4171,9 +4219,9 @@
                 <a:solidFill>
                   <a:srgbClr val="FFFFFF"/>
                 </a:solidFill>
-                <a:latin typeface="Calibri" pitchFamily="34" charset="0"/>
-                <a:ea typeface="Calibri" pitchFamily="34" charset="-122"/>
-                <a:cs typeface="Calibri" pitchFamily="34" charset="-120"/>
+                <a:latin typeface="Lucida Sans" pitchFamily="34" charset="0"/>
+                <a:ea typeface="Lucida Sans" pitchFamily="34" charset="-122"/>
+                <a:cs typeface="Lucida Sans" pitchFamily="34" charset="-120"/>
               </a:rPr>
               <a:t>3</a:t>
             </a:r>
@@ -4208,11 +4256,11 @@
             <a:r>
               <a:rPr lang="en-US" sz="1800" b="1" dirty="0">
                 <a:solidFill>
-                  <a:srgbClr val="0B3C49"/>
-                </a:solidFill>
-                <a:latin typeface="Calibri" pitchFamily="34" charset="0"/>
-                <a:ea typeface="Calibri" pitchFamily="34" charset="-122"/>
-                <a:cs typeface="Calibri" pitchFamily="34" charset="-120"/>
+                  <a:srgbClr val="7A003F"/>
+                </a:solidFill>
+                <a:latin typeface="Lucida Sans" pitchFamily="34" charset="0"/>
+                <a:ea typeface="Lucida Sans" pitchFamily="34" charset="-122"/>
+                <a:cs typeface="Lucida Sans" pitchFamily="34" charset="-120"/>
               </a:rPr>
               <a:t>Zusatz: Begrüßung</a:t>
             </a:r>
@@ -4251,11 +4299,11 @@
             <a:r>
               <a:rPr lang="en-US" sz="1700" dirty="0">
                 <a:solidFill>
-                  <a:srgbClr val="1F2A30"/>
-                </a:solidFill>
-                <a:latin typeface="Calibri" pitchFamily="34" charset="0"/>
-                <a:ea typeface="Calibri" pitchFamily="34" charset="-122"/>
-                <a:cs typeface="Calibri" pitchFamily="34" charset="-120"/>
+                  <a:srgbClr val="1D1D1B"/>
+                </a:solidFill>
+                <a:latin typeface="Lucida Sans" pitchFamily="34" charset="0"/>
+                <a:ea typeface="Lucida Sans" pitchFamily="34" charset="-122"/>
+                <a:cs typeface="Lucida Sans" pitchFamily="34" charset="-120"/>
               </a:rPr>
               <a:t>fährt 30 cm auf Sie zu</a:t>
             </a:r>
@@ -4272,11 +4320,11 @@
             <a:r>
               <a:rPr lang="en-US" sz="1700" dirty="0">
                 <a:solidFill>
-                  <a:srgbClr val="1F2A30"/>
-                </a:solidFill>
-                <a:latin typeface="Calibri" pitchFamily="34" charset="0"/>
-                <a:ea typeface="Calibri" pitchFamily="34" charset="-122"/>
-                <a:cs typeface="Calibri" pitchFamily="34" charset="-120"/>
+                  <a:srgbClr val="1D1D1B"/>
+                </a:solidFill>
+                <a:latin typeface="Lucida Sans" pitchFamily="34" charset="0"/>
+                <a:ea typeface="Lucida Sans" pitchFamily="34" charset="-122"/>
+                <a:cs typeface="Lucida Sans" pitchFamily="34" charset="-120"/>
               </a:rPr>
               <a:t>leuchtet grün, spielt eine Note</a:t>
             </a:r>
@@ -4293,11 +4341,11 @@
             <a:r>
               <a:rPr lang="en-US" sz="1700" dirty="0">
                 <a:solidFill>
-                  <a:srgbClr val="1F2A30"/>
-                </a:solidFill>
-                <a:latin typeface="Calibri" pitchFamily="34" charset="0"/>
-                <a:ea typeface="Calibri" pitchFamily="34" charset="-122"/>
-                <a:cs typeface="Calibri" pitchFamily="34" charset="-120"/>
+                  <a:srgbClr val="1D1D1B"/>
+                </a:solidFill>
+                <a:latin typeface="Lucida Sans" pitchFamily="34" charset="0"/>
+                <a:ea typeface="Lucida Sans" pitchFamily="34" charset="-122"/>
+                <a:cs typeface="Lucida Sans" pitchFamily="34" charset="-120"/>
               </a:rPr>
               <a:t>zeigt „Hallo!“</a:t>
             </a:r>
@@ -4322,11 +4370,11 @@
             </a:avLst>
           </a:prstGeom>
           <a:solidFill>
-            <a:srgbClr val="FCEBDD"/>
+            <a:srgbClr val="FDF0E3"/>
           </a:solidFill>
           <a:ln w="12700">
             <a:solidFill>
-              <a:srgbClr val="FCEBDD"/>
+              <a:srgbClr val="FDF0E3"/>
             </a:solidFill>
             <a:prstDash val="solid"/>
           </a:ln>
@@ -4347,11 +4395,11 @@
             <a:avLst/>
           </a:prstGeom>
           <a:solidFill>
-            <a:srgbClr val="E8772E"/>
+            <a:srgbClr val="EF7D00"/>
           </a:solidFill>
           <a:ln w="12700">
             <a:solidFill>
-              <a:srgbClr val="E8772E"/>
+              <a:srgbClr val="EF7D00"/>
             </a:solidFill>
             <a:prstDash val="solid"/>
           </a:ln>
@@ -4384,11 +4432,11 @@
             <a:r>
               <a:rPr lang="en-US" sz="2000" b="1" dirty="0">
                 <a:solidFill>
-                  <a:srgbClr val="FFFFFF"/>
-                </a:solidFill>
-                <a:latin typeface="Calibri" pitchFamily="34" charset="0"/>
-                <a:ea typeface="Calibri" pitchFamily="34" charset="-122"/>
-                <a:cs typeface="Calibri" pitchFamily="34" charset="-120"/>
+                  <a:srgbClr val="1D1D1B"/>
+                </a:solidFill>
+                <a:latin typeface="Lucida Sans" pitchFamily="34" charset="0"/>
+                <a:ea typeface="Lucida Sans" pitchFamily="34" charset="-122"/>
+                <a:cs typeface="Lucida Sans" pitchFamily="34" charset="-120"/>
               </a:rPr>
               <a:t>!</a:t>
             </a:r>
@@ -4423,11 +4471,11 @@
             <a:r>
               <a:rPr lang="en-US" sz="1500" dirty="0">
                 <a:solidFill>
-                  <a:srgbClr val="0B3C49"/>
-                </a:solidFill>
-                <a:latin typeface="Calibri" pitchFamily="34" charset="0"/>
-                <a:ea typeface="Calibri" pitchFamily="34" charset="-122"/>
-                <a:cs typeface="Calibri" pitchFamily="34" charset="-120"/>
+                  <a:srgbClr val="7A003F"/>
+                </a:solidFill>
+                <a:latin typeface="Lucida Sans" pitchFamily="34" charset="0"/>
+                <a:ea typeface="Lucida Sans" pitchFamily="34" charset="-122"/>
+                <a:cs typeface="Lucida Sans" pitchFamily="34" charset="-120"/>
               </a:rPr>
               <a:t>Hilfreiche Blöcke stehen im Arbeitsheft (Aufgabe 5). Erst Tandem, dann Nachbartandem, dann Leitung.</a:t>
             </a:r>
@@ -4465,11 +4513,11 @@
             <a:lvl1pPr>
               <a:defRPr sz="1000">
                 <a:solidFill>
-                  <a:srgbClr val="5B6B73"/>
-                </a:solidFill>
-                <a:latin typeface="Calibri"/>
-                <a:ea typeface="Calibri"/>
-                <a:cs typeface="Calibri"/>
+                  <a:srgbClr val="706F6F"/>
+                </a:solidFill>
+                <a:latin typeface="Lucida Sans"/>
+                <a:ea typeface="Lucida Sans"/>
+                <a:cs typeface="Lucida Sans"/>
               </a:defRPr>
             </a:lvl1pPr>
           </a:lstStyle>
@@ -4513,13 +4561,13 @@
           <p:cNvPr id="2" name="Text 1"/>
           <p:cNvSpPr/>
           <p:nvPr>
-            <p:ph idx="101" type="title" hasCustomPrompt="1"/>
+            <p:ph idx="102" type="title" hasCustomPrompt="1"/>
           </p:nvPr>
         </p:nvSpPr>
         <p:spPr>
           <a:xfrm>
-            <a:off x="548640" y="320040"/>
-            <a:ext cx="11094415" cy="777240"/>
+            <a:off x="548640" y="274320"/>
+            <a:ext cx="8351215" cy="896112"/>
           </a:xfrm>
           <a:prstGeom prst="rect">
             <a:avLst/>
@@ -4531,21 +4579,21 @@
           <a:bodyPr wrap="square" lIns="0" tIns="0" rIns="0" bIns="0" rtlCol="0" anchor="ctr"/>
           <a:lstStyle/>
           <a:p>
-            <a:pPr indent="0" marL="0">
-              <a:buNone/>
-            </a:pPr>
-            <a:r>
-              <a:rPr lang="en-US" sz="3200" b="1" dirty="0">
-                <a:solidFill>
-                  <a:srgbClr val="0B3C49"/>
-                </a:solidFill>
-                <a:latin typeface="Cambria" pitchFamily="34" charset="0"/>
-                <a:ea typeface="Cambria" pitchFamily="34" charset="-122"/>
-                <a:cs typeface="Cambria" pitchFamily="34" charset="-120"/>
+            <a:pPr algn="l" indent="0" marL="0">
+              <a:buNone/>
+            </a:pPr>
+            <a:r>
+              <a:rPr lang="en-US" sz="2600" b="1" dirty="0">
+                <a:solidFill>
+                  <a:srgbClr val="7A003F"/>
+                </a:solidFill>
+                <a:latin typeface="Lucida Sans" pitchFamily="34" charset="0"/>
+                <a:ea typeface="Lucida Sans" pitchFamily="34" charset="-122"/>
+                <a:cs typeface="Lucida Sans" pitchFamily="34" charset="-120"/>
               </a:rPr>
               <a:t>Was bedeutet das für Ihre Klasse?</a:t>
             </a:r>
-            <a:endParaRPr lang="en-US" sz="3200" dirty="0"/>
+            <a:endParaRPr lang="en-US" sz="2600" dirty="0"/>
           </a:p>
         </p:txBody>
       </p:sp>
@@ -4576,11 +4624,11 @@
             <a:r>
               <a:rPr lang="en-US" sz="1600" dirty="0">
                 <a:solidFill>
-                  <a:srgbClr val="5B6B73"/>
-                </a:solidFill>
-                <a:latin typeface="Calibri" pitchFamily="34" charset="0"/>
-                <a:ea typeface="Calibri" pitchFamily="34" charset="-122"/>
-                <a:cs typeface="Calibri" pitchFamily="34" charset="-120"/>
+                  <a:srgbClr val="706F6F"/>
+                </a:solidFill>
+                <a:latin typeface="Lucida Sans" pitchFamily="34" charset="0"/>
+                <a:ea typeface="Lucida Sans" pitchFamily="34" charset="-122"/>
+                <a:cs typeface="Lucida Sans" pitchFamily="34" charset="-120"/>
               </a:rPr>
               <a:t>Wer richtet die Technik ein? Zwei Wege aus der Erprobung:</a:t>
             </a:r>
@@ -4605,11 +4653,11 @@
             </a:avLst>
           </a:prstGeom>
           <a:solidFill>
-            <a:srgbClr val="EEF1F2"/>
+            <a:srgbClr val="F2F2F2"/>
           </a:solidFill>
           <a:ln w="12700">
             <a:solidFill>
-              <a:srgbClr val="EEF1F2"/>
+              <a:srgbClr val="F2F2F2"/>
             </a:solidFill>
             <a:prstDash val="solid"/>
           </a:ln>
@@ -4630,11 +4678,11 @@
             <a:avLst/>
           </a:prstGeom>
           <a:solidFill>
-            <a:srgbClr val="7A8B91"/>
+            <a:srgbClr val="9D9D9C"/>
           </a:solidFill>
           <a:ln w="12700">
             <a:solidFill>
-              <a:srgbClr val="7A8B91"/>
+              <a:srgbClr val="9D9D9C"/>
             </a:solidFill>
             <a:prstDash val="solid"/>
           </a:ln>
@@ -4669,9 +4717,9 @@
                 <a:solidFill>
                   <a:srgbClr val="FFFFFF"/>
                 </a:solidFill>
-                <a:latin typeface="Calibri" pitchFamily="34" charset="0"/>
-                <a:ea typeface="Calibri" pitchFamily="34" charset="-122"/>
-                <a:cs typeface="Calibri" pitchFamily="34" charset="-120"/>
+                <a:latin typeface="Lucida Sans" pitchFamily="34" charset="0"/>
+                <a:ea typeface="Lucida Sans" pitchFamily="34" charset="-122"/>
+                <a:cs typeface="Lucida Sans" pitchFamily="34" charset="-120"/>
               </a:rPr>
               <a:t>–</a:t>
             </a:r>
@@ -4706,11 +4754,11 @@
             <a:r>
               <a:rPr lang="en-US" sz="1800" b="1" dirty="0">
                 <a:solidFill>
-                  <a:srgbClr val="0B3C49"/>
-                </a:solidFill>
-                <a:latin typeface="Calibri" pitchFamily="34" charset="0"/>
-                <a:ea typeface="Calibri" pitchFamily="34" charset="-122"/>
-                <a:cs typeface="Calibri" pitchFamily="34" charset="-120"/>
+                  <a:srgbClr val="7A003F"/>
+                </a:solidFill>
+                <a:latin typeface="Lucida Sans" pitchFamily="34" charset="0"/>
+                <a:ea typeface="Lucida Sans" pitchFamily="34" charset="-122"/>
+                <a:cs typeface="Lucida Sans" pitchFamily="34" charset="-120"/>
               </a:rPr>
               <a:t>Weg 2: mit der Klasse einrichten</a:t>
             </a:r>
@@ -4749,11 +4797,11 @@
             <a:r>
               <a:rPr lang="en-US" sz="1600" dirty="0">
                 <a:solidFill>
-                  <a:srgbClr val="1F2A30"/>
-                </a:solidFill>
-                <a:latin typeface="Calibri" pitchFamily="34" charset="0"/>
-                <a:ea typeface="Calibri" pitchFamily="34" charset="-122"/>
-                <a:cs typeface="Calibri" pitchFamily="34" charset="-120"/>
+                  <a:srgbClr val="1D1D1B"/>
+                </a:solidFill>
+                <a:latin typeface="Lucida Sans" pitchFamily="34" charset="0"/>
+                <a:ea typeface="Lucida Sans" pitchFamily="34" charset="-122"/>
+                <a:cs typeface="Lucida Sans" pitchFamily="34" charset="-120"/>
               </a:rPr>
               <a:t>Installation wird Teil der Stunde</a:t>
             </a:r>
@@ -4770,11 +4818,11 @@
             <a:r>
               <a:rPr lang="en-US" sz="1600" dirty="0">
                 <a:solidFill>
-                  <a:srgbClr val="1F2A30"/>
-                </a:solidFill>
-                <a:latin typeface="Calibri" pitchFamily="34" charset="0"/>
-                <a:ea typeface="Calibri" pitchFamily="34" charset="-122"/>
-                <a:cs typeface="Calibri" pitchFamily="34" charset="-120"/>
+                  <a:srgbClr val="1D1D1B"/>
+                </a:solidFill>
+                <a:latin typeface="Lucida Sans" pitchFamily="34" charset="0"/>
+                <a:ea typeface="Lucida Sans" pitchFamily="34" charset="-122"/>
+                <a:cs typeface="Lucida Sans" pitchFamily="34" charset="-120"/>
               </a:rPr>
               <a:t>kostet etwa die Hälfte der Zeit</a:t>
             </a:r>
@@ -4791,11 +4839,11 @@
             <a:r>
               <a:rPr lang="en-US" sz="1600" dirty="0">
                 <a:solidFill>
-                  <a:srgbClr val="1F2A30"/>
-                </a:solidFill>
-                <a:latin typeface="Calibri" pitchFamily="34" charset="0"/>
-                <a:ea typeface="Calibri" pitchFamily="34" charset="-122"/>
-                <a:cs typeface="Calibri" pitchFamily="34" charset="-120"/>
+                  <a:srgbClr val="1D1D1B"/>
+                </a:solidFill>
+                <a:latin typeface="Lucida Sans" pitchFamily="34" charset="0"/>
+                <a:ea typeface="Lucida Sans" pitchFamily="34" charset="-122"/>
+                <a:cs typeface="Lucida Sans" pitchFamily="34" charset="-120"/>
               </a:rPr>
               <a:t>Aufgaben stark kürzen (z. B. nur Fahren)</a:t>
             </a:r>
@@ -4812,11 +4860,11 @@
             <a:r>
               <a:rPr lang="en-US" sz="1600" dirty="0">
                 <a:solidFill>
-                  <a:srgbClr val="1F2A30"/>
-                </a:solidFill>
-                <a:latin typeface="Calibri" pitchFamily="34" charset="0"/>
-                <a:ea typeface="Calibri" pitchFamily="34" charset="-122"/>
-                <a:cs typeface="Calibri" pitchFamily="34" charset="-120"/>
+                  <a:srgbClr val="1D1D1B"/>
+                </a:solidFill>
+                <a:latin typeface="Lucida Sans" pitchFamily="34" charset="0"/>
+                <a:ea typeface="Lucida Sans" pitchFamily="34" charset="-122"/>
+                <a:cs typeface="Lucida Sans" pitchFamily="34" charset="-120"/>
               </a:rPr>
               <a:t>Rechte auf Schulgeräten oft nicht vorhanden</a:t>
             </a:r>
@@ -4841,11 +4889,11 @@
             </a:avLst>
           </a:prstGeom>
           <a:solidFill>
-            <a:srgbClr val="E6F2F1"/>
+            <a:srgbClr val="F2F2F2"/>
           </a:solidFill>
           <a:ln w="12700">
             <a:solidFill>
-              <a:srgbClr val="E6F2F1"/>
+              <a:srgbClr val="F2F2F2"/>
             </a:solidFill>
             <a:prstDash val="solid"/>
           </a:ln>
@@ -4866,11 +4914,11 @@
             <a:avLst/>
           </a:prstGeom>
           <a:solidFill>
-            <a:srgbClr val="0B6E69"/>
+            <a:srgbClr val="7A003F"/>
           </a:solidFill>
           <a:ln w="12700">
             <a:solidFill>
-              <a:srgbClr val="0B6E69"/>
+              <a:srgbClr val="7A003F"/>
             </a:solidFill>
             <a:prstDash val="solid"/>
           </a:ln>
@@ -4905,9 +4953,9 @@
                 <a:solidFill>
                   <a:srgbClr val="FFFFFF"/>
                 </a:solidFill>
-                <a:latin typeface="Calibri" pitchFamily="34" charset="0"/>
-                <a:ea typeface="Calibri" pitchFamily="34" charset="-122"/>
-                <a:cs typeface="Calibri" pitchFamily="34" charset="-120"/>
+                <a:latin typeface="Lucida Sans" pitchFamily="34" charset="0"/>
+                <a:ea typeface="Lucida Sans" pitchFamily="34" charset="-122"/>
+                <a:cs typeface="Lucida Sans" pitchFamily="34" charset="-120"/>
               </a:rPr>
               <a:t>+</a:t>
             </a:r>
@@ -4942,11 +4990,11 @@
             <a:r>
               <a:rPr lang="en-US" sz="1800" b="1" dirty="0">
                 <a:solidFill>
-                  <a:srgbClr val="0B3C49"/>
-                </a:solidFill>
-                <a:latin typeface="Calibri" pitchFamily="34" charset="0"/>
-                <a:ea typeface="Calibri" pitchFamily="34" charset="-122"/>
-                <a:cs typeface="Calibri" pitchFamily="34" charset="-120"/>
+                  <a:srgbClr val="7A003F"/>
+                </a:solidFill>
+                <a:latin typeface="Lucida Sans" pitchFamily="34" charset="0"/>
+                <a:ea typeface="Lucida Sans" pitchFamily="34" charset="-122"/>
+                <a:cs typeface="Lucida Sans" pitchFamily="34" charset="-120"/>
               </a:rPr>
               <a:t>Weg 1: vorab einrichten (empfohlen)</a:t>
             </a:r>
@@ -4985,11 +5033,11 @@
             <a:r>
               <a:rPr lang="en-US" sz="1600" dirty="0">
                 <a:solidFill>
-                  <a:srgbClr val="1F2A30"/>
-                </a:solidFill>
-                <a:latin typeface="Calibri" pitchFamily="34" charset="0"/>
-                <a:ea typeface="Calibri" pitchFamily="34" charset="-122"/>
-                <a:cs typeface="Calibri" pitchFamily="34" charset="-120"/>
+                  <a:srgbClr val="1D1D1B"/>
+                </a:solidFill>
+                <a:latin typeface="Lucida Sans" pitchFamily="34" charset="0"/>
+                <a:ea typeface="Lucida Sans" pitchFamily="34" charset="-122"/>
+                <a:cs typeface="Lucida Sans" pitchFamily="34" charset="-120"/>
               </a:rPr>
               <a:t>Lehrkraft installiert und testet vorher</a:t>
             </a:r>
@@ -5006,11 +5054,11 @@
             <a:r>
               <a:rPr lang="en-US" sz="1600" dirty="0">
                 <a:solidFill>
-                  <a:srgbClr val="1F2A30"/>
-                </a:solidFill>
-                <a:latin typeface="Calibri" pitchFamily="34" charset="0"/>
-                <a:ea typeface="Calibri" pitchFamily="34" charset="-122"/>
-                <a:cs typeface="Calibri" pitchFamily="34" charset="-120"/>
+                  <a:srgbClr val="1D1D1B"/>
+                </a:solidFill>
+                <a:latin typeface="Lucida Sans" pitchFamily="34" charset="0"/>
+                <a:ea typeface="Lucida Sans" pitchFamily="34" charset="-122"/>
+                <a:cs typeface="Lucida Sans" pitchFamily="34" charset="-120"/>
               </a:rPr>
               <a:t>Rechte rechtzeitig mit der IT klären</a:t>
             </a:r>
@@ -5027,11 +5075,11 @@
             <a:r>
               <a:rPr lang="en-US" sz="1600" dirty="0">
                 <a:solidFill>
-                  <a:srgbClr val="1F2A30"/>
-                </a:solidFill>
-                <a:latin typeface="Calibri" pitchFamily="34" charset="0"/>
-                <a:ea typeface="Calibri" pitchFamily="34" charset="-122"/>
-                <a:cs typeface="Calibri" pitchFamily="34" charset="-120"/>
+                  <a:srgbClr val="1D1D1B"/>
+                </a:solidFill>
+                <a:latin typeface="Lucida Sans" pitchFamily="34" charset="0"/>
+                <a:ea typeface="Lucida Sans" pitchFamily="34" charset="-122"/>
+                <a:cs typeface="Lucida Sans" pitchFamily="34" charset="-120"/>
               </a:rPr>
               <a:t>die Stunde gehört den Lernzielen</a:t>
             </a:r>
@@ -5048,11 +5096,11 @@
             <a:r>
               <a:rPr lang="en-US" sz="1600" dirty="0">
                 <a:solidFill>
-                  <a:srgbClr val="1F2A30"/>
-                </a:solidFill>
-                <a:latin typeface="Calibri" pitchFamily="34" charset="0"/>
-                <a:ea typeface="Calibri" pitchFamily="34" charset="-122"/>
-                <a:cs typeface="Calibri" pitchFamily="34" charset="-120"/>
+                  <a:srgbClr val="1D1D1B"/>
+                </a:solidFill>
+                <a:latin typeface="Lucida Sans" pitchFamily="34" charset="0"/>
+                <a:ea typeface="Lucida Sans" pitchFamily="34" charset="-122"/>
+                <a:cs typeface="Lucida Sans" pitchFamily="34" charset="-120"/>
               </a:rPr>
               <a:t>Plan B: vormontierte, verbundene Geräte</a:t>
             </a:r>
@@ -5077,11 +5125,11 @@
             </a:avLst>
           </a:prstGeom>
           <a:solidFill>
-            <a:srgbClr val="FCEBDD"/>
+            <a:srgbClr val="FDF0E3"/>
           </a:solidFill>
           <a:ln w="12700">
             <a:solidFill>
-              <a:srgbClr val="FCEBDD"/>
+              <a:srgbClr val="FDF0E3"/>
             </a:solidFill>
             <a:prstDash val="solid"/>
           </a:ln>
@@ -5102,11 +5150,11 @@
             <a:avLst/>
           </a:prstGeom>
           <a:solidFill>
-            <a:srgbClr val="E8772E"/>
+            <a:srgbClr val="EF7D00"/>
           </a:solidFill>
           <a:ln w="12700">
             <a:solidFill>
-              <a:srgbClr val="E8772E"/>
+              <a:srgbClr val="EF7D00"/>
             </a:solidFill>
             <a:prstDash val="solid"/>
           </a:ln>
@@ -5139,11 +5187,11 @@
             <a:r>
               <a:rPr lang="en-US" sz="2000" b="1" dirty="0">
                 <a:solidFill>
-                  <a:srgbClr val="FFFFFF"/>
-                </a:solidFill>
-                <a:latin typeface="Calibri" pitchFamily="34" charset="0"/>
-                <a:ea typeface="Calibri" pitchFamily="34" charset="-122"/>
-                <a:cs typeface="Calibri" pitchFamily="34" charset="-120"/>
+                  <a:srgbClr val="1D1D1B"/>
+                </a:solidFill>
+                <a:latin typeface="Lucida Sans" pitchFamily="34" charset="0"/>
+                <a:ea typeface="Lucida Sans" pitchFamily="34" charset="-122"/>
+                <a:cs typeface="Lucida Sans" pitchFamily="34" charset="-120"/>
               </a:rPr>
               <a:t>!</a:t>
             </a:r>
@@ -5178,11 +5226,11 @@
             <a:r>
               <a:rPr lang="en-US" sz="1500" dirty="0">
                 <a:solidFill>
-                  <a:srgbClr val="0B3C49"/>
-                </a:solidFill>
-                <a:latin typeface="Calibri" pitchFamily="34" charset="0"/>
-                <a:ea typeface="Calibri" pitchFamily="34" charset="-122"/>
-                <a:cs typeface="Calibri" pitchFamily="34" charset="-120"/>
+                  <a:srgbClr val="7A003F"/>
+                </a:solidFill>
+                <a:latin typeface="Lucida Sans" pitchFamily="34" charset="0"/>
+                <a:ea typeface="Lucida Sans" pitchFamily="34" charset="-122"/>
+                <a:cs typeface="Lucida Sans" pitchFamily="34" charset="-120"/>
               </a:rPr>
               <a:t>Arbeitsheft Aufgabe 6: Zeitbedarf Montage? Was muss an Ihrer Schule vorbereitet werden? Welche Methode übernehmen Sie?</a:t>
             </a:r>
@@ -5220,11 +5268,11 @@
             <a:lvl1pPr>
               <a:defRPr sz="1000">
                 <a:solidFill>
-                  <a:srgbClr val="5B6B73"/>
-                </a:solidFill>
-                <a:latin typeface="Calibri"/>
-                <a:ea typeface="Calibri"/>
-                <a:cs typeface="Calibri"/>
+                  <a:srgbClr val="706F6F"/>
+                </a:solidFill>
+                <a:latin typeface="Lucida Sans"/>
+                <a:ea typeface="Lucida Sans"/>
+                <a:cs typeface="Lucida Sans"/>
               </a:defRPr>
             </a:lvl1pPr>
           </a:lstStyle>
@@ -5265,14 +5313,16 @@
       </p:grpSpPr>
       <p:sp>
         <p:nvSpPr>
-          <p:cNvPr id="2" name="Text 0"/>
-          <p:cNvSpPr txBox="1"/>
-          <p:nvPr/>
-        </p:nvSpPr>
-        <p:spPr>
-          <a:xfrm>
-            <a:off x="548640" y="548640"/>
-            <a:ext cx="11094415" cy="822960"/>
+          <p:cNvPr id="2" name="Text 1"/>
+          <p:cNvSpPr/>
+          <p:nvPr>
+            <p:ph idx="102" type="title" hasCustomPrompt="1"/>
+          </p:nvPr>
+        </p:nvSpPr>
+        <p:spPr>
+          <a:xfrm>
+            <a:off x="548640" y="274320"/>
+            <a:ext cx="8351215" cy="896112"/>
           </a:xfrm>
           <a:prstGeom prst="rect">
             <a:avLst/>
@@ -5284,21 +5334,21 @@
           <a:bodyPr wrap="square" lIns="0" tIns="0" rIns="0" bIns="0" rtlCol="0" anchor="ctr"/>
           <a:lstStyle/>
           <a:p>
-            <a:pPr indent="0" marL="0">
-              <a:buNone/>
-            </a:pPr>
-            <a:r>
-              <a:rPr lang="en-US" sz="3600" b="1" dirty="0">
-                <a:solidFill>
-                  <a:srgbClr val="FFFFFF"/>
-                </a:solidFill>
-                <a:latin typeface="Cambria" pitchFamily="34" charset="0"/>
-                <a:ea typeface="Cambria" pitchFamily="34" charset="-122"/>
-                <a:cs typeface="Cambria" pitchFamily="34" charset="-120"/>
+            <a:pPr algn="l" indent="0" marL="0">
+              <a:buNone/>
+            </a:pPr>
+            <a:r>
+              <a:rPr lang="en-US" sz="2600" b="1" dirty="0">
+                <a:solidFill>
+                  <a:srgbClr val="7A003F"/>
+                </a:solidFill>
+                <a:latin typeface="Lucida Sans" pitchFamily="34" charset="0"/>
+                <a:ea typeface="Lucida Sans" pitchFamily="34" charset="-122"/>
+                <a:cs typeface="Lucida Sans" pitchFamily="34" charset="-120"/>
               </a:rPr>
               <a:t>Bis zur nächsten Sitzung</a:t>
             </a:r>
-            <a:endParaRPr lang="en-US" sz="3600" dirty="0"/>
+            <a:endParaRPr lang="en-US" sz="2600" dirty="0"/>
           </a:p>
         </p:txBody>
       </p:sp>
@@ -5310,20 +5360,20 @@
         </p:nvSpPr>
         <p:spPr>
           <a:xfrm>
-            <a:off x="548640" y="1737360"/>
-            <a:ext cx="3454298" cy="3291840"/>
+            <a:off x="548640" y="1463040"/>
+            <a:ext cx="3454298" cy="3566160"/>
           </a:xfrm>
           <a:prstGeom prst="roundRect">
             <a:avLst>
-              <a:gd name="adj" fmla="val 3333"/>
+              <a:gd name="adj" fmla="val 3177"/>
             </a:avLst>
           </a:prstGeom>
           <a:solidFill>
-            <a:srgbClr val="174F5E"/>
+            <a:srgbClr val="FDF0E3"/>
           </a:solidFill>
           <a:ln w="12700">
             <a:solidFill>
-              <a:srgbClr val="2C6E7C"/>
+              <a:srgbClr val="FDF0E3"/>
             </a:solidFill>
             <a:prstDash val="solid"/>
           </a:ln>
@@ -5337,18 +5387,18 @@
         </p:nvSpPr>
         <p:spPr>
           <a:xfrm>
-            <a:off x="822960" y="1965960"/>
+            <a:off x="822960" y="1691640"/>
             <a:ext cx="548640" cy="548640"/>
           </a:xfrm>
           <a:prstGeom prst="ellipse">
             <a:avLst/>
           </a:prstGeom>
           <a:solidFill>
-            <a:srgbClr val="E8772E"/>
+            <a:srgbClr val="EF7D00"/>
           </a:solidFill>
           <a:ln w="12700">
             <a:solidFill>
-              <a:srgbClr val="E8772E"/>
+              <a:srgbClr val="EF7D00"/>
             </a:solidFill>
             <a:prstDash val="solid"/>
           </a:ln>
@@ -5362,7 +5412,7 @@
         </p:nvSpPr>
         <p:spPr>
           <a:xfrm>
-            <a:off x="822960" y="1965960"/>
+            <a:off x="822960" y="1691640"/>
             <a:ext cx="548640" cy="548640"/>
           </a:xfrm>
           <a:prstGeom prst="rect">
@@ -5381,11 +5431,11 @@
             <a:r>
               <a:rPr lang="en-US" sz="1600" b="1" dirty="0">
                 <a:solidFill>
-                  <a:srgbClr val="FFFFFF"/>
-                </a:solidFill>
-                <a:latin typeface="Calibri" pitchFamily="34" charset="0"/>
-                <a:ea typeface="Calibri" pitchFamily="34" charset="-122"/>
-                <a:cs typeface="Calibri" pitchFamily="34" charset="-120"/>
+                  <a:srgbClr val="1D1D1B"/>
+                </a:solidFill>
+                <a:latin typeface="Lucida Sans" pitchFamily="34" charset="0"/>
+                <a:ea typeface="Lucida Sans" pitchFamily="34" charset="-122"/>
+                <a:cs typeface="Lucida Sans" pitchFamily="34" charset="-120"/>
               </a:rPr>
               <a:t>1</a:t>
             </a:r>
@@ -5401,7 +5451,7 @@
         </p:nvSpPr>
         <p:spPr>
           <a:xfrm>
-            <a:off x="1508760" y="1965960"/>
+            <a:off x="1508760" y="1691640"/>
             <a:ext cx="2265578" cy="548640"/>
           </a:xfrm>
           <a:prstGeom prst="rect">
@@ -5418,17 +5468,17 @@
               <a:buNone/>
             </a:pPr>
             <a:r>
-              <a:rPr lang="en-US" sz="1900" b="1" dirty="0">
-                <a:solidFill>
-                  <a:srgbClr val="FFFFFF"/>
-                </a:solidFill>
-                <a:latin typeface="Calibri" pitchFamily="34" charset="0"/>
-                <a:ea typeface="Calibri" pitchFamily="34" charset="-122"/>
-                <a:cs typeface="Calibri" pitchFamily="34" charset="-120"/>
+              <a:rPr lang="en-US" sz="1800" b="1" dirty="0">
+                <a:solidFill>
+                  <a:srgbClr val="7A003F"/>
+                </a:solidFill>
+                <a:latin typeface="Lucida Sans" pitchFamily="34" charset="0"/>
+                <a:ea typeface="Lucida Sans" pitchFamily="34" charset="-122"/>
+                <a:cs typeface="Lucida Sans" pitchFamily="34" charset="-120"/>
               </a:rPr>
               <a:t>Selbstlernmodul 1</a:t>
             </a:r>
-            <a:endParaRPr lang="en-US" sz="1900" dirty="0"/>
+            <a:endParaRPr lang="en-US" sz="1800" dirty="0"/>
           </a:p>
         </p:txBody>
       </p:sp>
@@ -5440,8 +5490,8 @@
         </p:nvSpPr>
         <p:spPr>
           <a:xfrm>
-            <a:off x="822960" y="2743200"/>
-            <a:ext cx="2905658" cy="2148840"/>
+            <a:off x="822960" y="2468880"/>
+            <a:ext cx="2905658" cy="2377440"/>
           </a:xfrm>
           <a:prstGeom prst="rect">
             <a:avLst/>
@@ -5461,17 +5511,17 @@
               <a:buChar char="•"/>
             </a:pPr>
             <a:r>
-              <a:rPr lang="en-US" sz="1700" dirty="0">
-                <a:solidFill>
-                  <a:srgbClr val="E6F2F1"/>
-                </a:solidFill>
-                <a:latin typeface="Calibri" pitchFamily="34" charset="0"/>
-                <a:ea typeface="Calibri" pitchFamily="34" charset="-122"/>
-                <a:cs typeface="Calibri" pitchFamily="34" charset="-120"/>
+              <a:rPr lang="en-US" sz="1600" dirty="0">
+                <a:solidFill>
+                  <a:srgbClr val="1D1D1B"/>
+                </a:solidFill>
+                <a:latin typeface="Lucida Sans" pitchFamily="34" charset="0"/>
+                <a:ea typeface="Lucida Sans" pitchFamily="34" charset="-122"/>
+                <a:cs typeface="Lucida Sans" pitchFamily="34" charset="-120"/>
               </a:rPr>
               <a:t>Wissenscheck (10 Fragen)</a:t>
             </a:r>
-            <a:endParaRPr lang="en-US" sz="1700" dirty="0"/>
+            <a:endParaRPr lang="en-US" sz="1600" dirty="0"/>
           </a:p>
           <a:p>
             <a:pPr marL="177800" indent="-177800">
@@ -5482,17 +5532,17 @@
               <a:buChar char="•"/>
             </a:pPr>
             <a:r>
-              <a:rPr lang="en-US" sz="1700" dirty="0">
-                <a:solidFill>
-                  <a:srgbClr val="E6F2F1"/>
-                </a:solidFill>
-                <a:latin typeface="Calibri" pitchFamily="34" charset="0"/>
-                <a:ea typeface="Calibri" pitchFamily="34" charset="-122"/>
-                <a:cs typeface="Calibri" pitchFamily="34" charset="-120"/>
+              <a:rPr lang="en-US" sz="1600" dirty="0">
+                <a:solidFill>
+                  <a:srgbClr val="1D1D1B"/>
+                </a:solidFill>
+                <a:latin typeface="Lucida Sans" pitchFamily="34" charset="0"/>
+                <a:ea typeface="Lucida Sans" pitchFamily="34" charset="-122"/>
+                <a:cs typeface="Lucida Sans" pitchFamily="34" charset="-120"/>
               </a:rPr>
               <a:t>Open Roberta ohne Roboter erkunden</a:t>
             </a:r>
-            <a:endParaRPr lang="en-US" sz="1700" dirty="0"/>
+            <a:endParaRPr lang="en-US" sz="1600" dirty="0"/>
           </a:p>
           <a:p>
             <a:pPr marL="177800" indent="-177800">
@@ -5503,17 +5553,17 @@
               <a:buChar char="•"/>
             </a:pPr>
             <a:r>
-              <a:rPr lang="en-US" sz="1700" dirty="0">
-                <a:solidFill>
-                  <a:srgbClr val="E6F2F1"/>
-                </a:solidFill>
-                <a:latin typeface="Calibri" pitchFamily="34" charset="0"/>
-                <a:ea typeface="Calibri" pitchFamily="34" charset="-122"/>
-                <a:cs typeface="Calibri" pitchFamily="34" charset="-120"/>
+              <a:rPr lang="en-US" sz="1600" dirty="0">
+                <a:solidFill>
+                  <a:srgbClr val="1D1D1B"/>
+                </a:solidFill>
+                <a:latin typeface="Lucida Sans" pitchFamily="34" charset="0"/>
+                <a:ea typeface="Lucida Sans" pitchFamily="34" charset="-122"/>
+                <a:cs typeface="Lucida Sans" pitchFamily="34" charset="-120"/>
               </a:rPr>
               <a:t>ca. 30 Minuten im Moodle-Kurs</a:t>
             </a:r>
-            <a:endParaRPr lang="en-US" sz="1700" dirty="0"/>
+            <a:endParaRPr lang="en-US" sz="1600" dirty="0"/>
           </a:p>
         </p:txBody>
       </p:sp>
@@ -5525,20 +5575,20 @@
         </p:nvSpPr>
         <p:spPr>
           <a:xfrm>
-            <a:off x="4368698" y="1737360"/>
-            <a:ext cx="3454298" cy="3291840"/>
+            <a:off x="4368698" y="1463040"/>
+            <a:ext cx="3454298" cy="3566160"/>
           </a:xfrm>
           <a:prstGeom prst="roundRect">
             <a:avLst>
-              <a:gd name="adj" fmla="val 3333"/>
+              <a:gd name="adj" fmla="val 3177"/>
             </a:avLst>
           </a:prstGeom>
           <a:solidFill>
-            <a:srgbClr val="174F5E"/>
+            <a:srgbClr val="FDF0E3"/>
           </a:solidFill>
           <a:ln w="12700">
             <a:solidFill>
-              <a:srgbClr val="2C6E7C"/>
+              <a:srgbClr val="FDF0E3"/>
             </a:solidFill>
             <a:prstDash val="solid"/>
           </a:ln>
@@ -5552,18 +5602,18 @@
         </p:nvSpPr>
         <p:spPr>
           <a:xfrm>
-            <a:off x="4643018" y="1965960"/>
+            <a:off x="4643018" y="1691640"/>
             <a:ext cx="548640" cy="548640"/>
           </a:xfrm>
           <a:prstGeom prst="ellipse">
             <a:avLst/>
           </a:prstGeom>
           <a:solidFill>
-            <a:srgbClr val="E8772E"/>
+            <a:srgbClr val="EF7D00"/>
           </a:solidFill>
           <a:ln w="12700">
             <a:solidFill>
-              <a:srgbClr val="E8772E"/>
+              <a:srgbClr val="EF7D00"/>
             </a:solidFill>
             <a:prstDash val="solid"/>
           </a:ln>
@@ -5577,7 +5627,7 @@
         </p:nvSpPr>
         <p:spPr>
           <a:xfrm>
-            <a:off x="4643018" y="1965960"/>
+            <a:off x="4643018" y="1691640"/>
             <a:ext cx="548640" cy="548640"/>
           </a:xfrm>
           <a:prstGeom prst="rect">
@@ -5596,11 +5646,11 @@
             <a:r>
               <a:rPr lang="en-US" sz="1600" b="1" dirty="0">
                 <a:solidFill>
-                  <a:srgbClr val="FFFFFF"/>
-                </a:solidFill>
-                <a:latin typeface="Calibri" pitchFamily="34" charset="0"/>
-                <a:ea typeface="Calibri" pitchFamily="34" charset="-122"/>
-                <a:cs typeface="Calibri" pitchFamily="34" charset="-120"/>
+                  <a:srgbClr val="1D1D1B"/>
+                </a:solidFill>
+                <a:latin typeface="Lucida Sans" pitchFamily="34" charset="0"/>
+                <a:ea typeface="Lucida Sans" pitchFamily="34" charset="-122"/>
+                <a:cs typeface="Lucida Sans" pitchFamily="34" charset="-120"/>
               </a:rPr>
               <a:t>2</a:t>
             </a:r>
@@ -5616,7 +5666,7 @@
         </p:nvSpPr>
         <p:spPr>
           <a:xfrm>
-            <a:off x="5328818" y="1965960"/>
+            <a:off x="5328818" y="1691640"/>
             <a:ext cx="2265578" cy="548640"/>
           </a:xfrm>
           <a:prstGeom prst="rect">
@@ -5633,17 +5683,17 @@
               <a:buNone/>
             </a:pPr>
             <a:r>
-              <a:rPr lang="en-US" sz="1900" b="1" dirty="0">
-                <a:solidFill>
-                  <a:srgbClr val="FFFFFF"/>
-                </a:solidFill>
-                <a:latin typeface="Calibri" pitchFamily="34" charset="0"/>
-                <a:ea typeface="Calibri" pitchFamily="34" charset="-122"/>
-                <a:cs typeface="Calibri" pitchFamily="34" charset="-120"/>
+              <a:rPr lang="en-US" sz="1800" b="1" dirty="0">
+                <a:solidFill>
+                  <a:srgbClr val="7A003F"/>
+                </a:solidFill>
+                <a:latin typeface="Lucida Sans" pitchFamily="34" charset="0"/>
+                <a:ea typeface="Lucida Sans" pitchFamily="34" charset="-122"/>
+                <a:cs typeface="Lucida Sans" pitchFamily="34" charset="-120"/>
               </a:rPr>
               <a:t>Ihre mBot2</a:t>
             </a:r>
-            <a:endParaRPr lang="en-US" sz="1900" dirty="0"/>
+            <a:endParaRPr lang="en-US" sz="1800" dirty="0"/>
           </a:p>
         </p:txBody>
       </p:sp>
@@ -5655,8 +5705,8 @@
         </p:nvSpPr>
         <p:spPr>
           <a:xfrm>
-            <a:off x="4643018" y="2743200"/>
-            <a:ext cx="2905658" cy="2148840"/>
+            <a:off x="4643018" y="2468880"/>
+            <a:ext cx="2905658" cy="2377440"/>
           </a:xfrm>
           <a:prstGeom prst="rect">
             <a:avLst/>
@@ -5676,17 +5726,17 @@
               <a:buChar char="•"/>
             </a:pPr>
             <a:r>
-              <a:rPr lang="en-US" sz="1700" dirty="0">
-                <a:solidFill>
-                  <a:srgbClr val="E6F2F1"/>
-                </a:solidFill>
-                <a:latin typeface="Calibri" pitchFamily="34" charset="0"/>
-                <a:ea typeface="Calibri" pitchFamily="34" charset="-122"/>
-                <a:cs typeface="Calibri" pitchFamily="34" charset="-120"/>
+              <a:rPr lang="en-US" sz="1600" dirty="0">
+                <a:solidFill>
+                  <a:srgbClr val="1D1D1B"/>
+                </a:solidFill>
+                <a:latin typeface="Lucida Sans" pitchFamily="34" charset="0"/>
+                <a:ea typeface="Lucida Sans" pitchFamily="34" charset="-122"/>
+                <a:cs typeface="Lucida Sans" pitchFamily="34" charset="-120"/>
               </a:rPr>
               <a:t>bleiben montiert</a:t>
             </a:r>
-            <a:endParaRPr lang="en-US" sz="1700" dirty="0"/>
+            <a:endParaRPr lang="en-US" sz="1600" dirty="0"/>
           </a:p>
           <a:p>
             <a:pPr marL="177800" indent="-177800">
@@ -5697,17 +5747,17 @@
               <a:buChar char="•"/>
             </a:pPr>
             <a:r>
-              <a:rPr lang="en-US" sz="1700" dirty="0">
-                <a:solidFill>
-                  <a:srgbClr val="E6F2F1"/>
-                </a:solidFill>
-                <a:latin typeface="Calibri" pitchFamily="34" charset="0"/>
-                <a:ea typeface="Calibri" pitchFamily="34" charset="-122"/>
-                <a:cs typeface="Calibri" pitchFamily="34" charset="-120"/>
+              <a:rPr lang="en-US" sz="1600" dirty="0">
+                <a:solidFill>
+                  <a:srgbClr val="1D1D1B"/>
+                </a:solidFill>
+                <a:latin typeface="Lucida Sans" pitchFamily="34" charset="0"/>
+                <a:ea typeface="Lucida Sans" pitchFamily="34" charset="-122"/>
+                <a:cs typeface="Lucida Sans" pitchFamily="34" charset="-120"/>
               </a:rPr>
               <a:t>beschriften (Nr. am Shield)</a:t>
             </a:r>
-            <a:endParaRPr lang="en-US" sz="1700" dirty="0"/>
+            <a:endParaRPr lang="en-US" sz="1600" dirty="0"/>
           </a:p>
           <a:p>
             <a:pPr marL="177800" indent="-177800">
@@ -5718,17 +5768,17 @@
               <a:buChar char="•"/>
             </a:pPr>
             <a:r>
-              <a:rPr lang="en-US" sz="1700" dirty="0">
-                <a:solidFill>
-                  <a:srgbClr val="E6F2F1"/>
-                </a:solidFill>
-                <a:latin typeface="Calibri" pitchFamily="34" charset="0"/>
-                <a:ea typeface="Calibri" pitchFamily="34" charset="-122"/>
-                <a:cs typeface="Calibri" pitchFamily="34" charset="-120"/>
+              <a:rPr lang="en-US" sz="1600" dirty="0">
+                <a:solidFill>
+                  <a:srgbClr val="1D1D1B"/>
+                </a:solidFill>
+                <a:latin typeface="Lucida Sans" pitchFamily="34" charset="0"/>
+                <a:ea typeface="Lucida Sans" pitchFamily="34" charset="-122"/>
+                <a:cs typeface="Lucida Sans" pitchFamily="34" charset="-120"/>
               </a:rPr>
               <a:t>an die Ladestation</a:t>
             </a:r>
-            <a:endParaRPr lang="en-US" sz="1700" dirty="0"/>
+            <a:endParaRPr lang="en-US" sz="1600" dirty="0"/>
           </a:p>
         </p:txBody>
       </p:sp>
@@ -5740,20 +5790,20 @@
         </p:nvSpPr>
         <p:spPr>
           <a:xfrm>
-            <a:off x="8188757" y="1737360"/>
-            <a:ext cx="3454298" cy="3291840"/>
+            <a:off x="8188757" y="1463040"/>
+            <a:ext cx="3454298" cy="3566160"/>
           </a:xfrm>
           <a:prstGeom prst="roundRect">
             <a:avLst>
-              <a:gd name="adj" fmla="val 3333"/>
+              <a:gd name="adj" fmla="val 3177"/>
             </a:avLst>
           </a:prstGeom>
           <a:solidFill>
-            <a:srgbClr val="174F5E"/>
+            <a:srgbClr val="FDF0E3"/>
           </a:solidFill>
           <a:ln w="12700">
             <a:solidFill>
-              <a:srgbClr val="2C6E7C"/>
+              <a:srgbClr val="FDF0E3"/>
             </a:solidFill>
             <a:prstDash val="solid"/>
           </a:ln>
@@ -5767,18 +5817,18 @@
         </p:nvSpPr>
         <p:spPr>
           <a:xfrm>
-            <a:off x="8463077" y="1965960"/>
+            <a:off x="8463077" y="1691640"/>
             <a:ext cx="548640" cy="548640"/>
           </a:xfrm>
           <a:prstGeom prst="ellipse">
             <a:avLst/>
           </a:prstGeom>
           <a:solidFill>
-            <a:srgbClr val="E8772E"/>
+            <a:srgbClr val="EF7D00"/>
           </a:solidFill>
           <a:ln w="12700">
             <a:solidFill>
-              <a:srgbClr val="E8772E"/>
+              <a:srgbClr val="EF7D00"/>
             </a:solidFill>
             <a:prstDash val="solid"/>
           </a:ln>
@@ -5792,7 +5842,7 @@
         </p:nvSpPr>
         <p:spPr>
           <a:xfrm>
-            <a:off x="8463077" y="1965960"/>
+            <a:off x="8463077" y="1691640"/>
             <a:ext cx="548640" cy="548640"/>
           </a:xfrm>
           <a:prstGeom prst="rect">
@@ -5811,11 +5861,11 @@
             <a:r>
               <a:rPr lang="en-US" sz="1600" b="1" dirty="0">
                 <a:solidFill>
-                  <a:srgbClr val="FFFFFF"/>
-                </a:solidFill>
-                <a:latin typeface="Calibri" pitchFamily="34" charset="0"/>
-                <a:ea typeface="Calibri" pitchFamily="34" charset="-122"/>
-                <a:cs typeface="Calibri" pitchFamily="34" charset="-120"/>
+                  <a:srgbClr val="1D1D1B"/>
+                </a:solidFill>
+                <a:latin typeface="Lucida Sans" pitchFamily="34" charset="0"/>
+                <a:ea typeface="Lucida Sans" pitchFamily="34" charset="-122"/>
+                <a:cs typeface="Lucida Sans" pitchFamily="34" charset="-120"/>
               </a:rPr>
               <a:t>3</a:t>
             </a:r>
@@ -5831,7 +5881,7 @@
         </p:nvSpPr>
         <p:spPr>
           <a:xfrm>
-            <a:off x="9148877" y="1965960"/>
+            <a:off x="9148877" y="1691640"/>
             <a:ext cx="2265578" cy="548640"/>
           </a:xfrm>
           <a:prstGeom prst="rect">
@@ -5848,17 +5898,17 @@
               <a:buNone/>
             </a:pPr>
             <a:r>
-              <a:rPr lang="en-US" sz="1900" b="1" dirty="0">
-                <a:solidFill>
-                  <a:srgbClr val="FFFFFF"/>
-                </a:solidFill>
-                <a:latin typeface="Calibri" pitchFamily="34" charset="0"/>
-                <a:ea typeface="Calibri" pitchFamily="34" charset="-122"/>
-                <a:cs typeface="Calibri" pitchFamily="34" charset="-120"/>
+              <a:rPr lang="en-US" sz="1800" b="1" dirty="0">
+                <a:solidFill>
+                  <a:srgbClr val="7A003F"/>
+                </a:solidFill>
+                <a:latin typeface="Lucida Sans" pitchFamily="34" charset="0"/>
+                <a:ea typeface="Lucida Sans" pitchFamily="34" charset="-122"/>
+                <a:cs typeface="Lucida Sans" pitchFamily="34" charset="-120"/>
               </a:rPr>
               <a:t>Sitzung 2</a:t>
             </a:r>
-            <a:endParaRPr lang="en-US" sz="1900" dirty="0"/>
+            <a:endParaRPr lang="en-US" sz="1800" dirty="0"/>
           </a:p>
         </p:txBody>
       </p:sp>
@@ -5870,8 +5920,8 @@
         </p:nvSpPr>
         <p:spPr>
           <a:xfrm>
-            <a:off x="8463077" y="2743200"/>
-            <a:ext cx="2905658" cy="2148840"/>
+            <a:off x="8463077" y="2468880"/>
+            <a:ext cx="2905658" cy="2377440"/>
           </a:xfrm>
           <a:prstGeom prst="rect">
             <a:avLst/>
@@ -5891,17 +5941,17 @@
               <a:buChar char="•"/>
             </a:pPr>
             <a:r>
-              <a:rPr lang="en-US" sz="1700" dirty="0">
-                <a:solidFill>
-                  <a:srgbClr val="E6F2F1"/>
-                </a:solidFill>
-                <a:latin typeface="Calibri" pitchFamily="34" charset="0"/>
-                <a:ea typeface="Calibri" pitchFamily="34" charset="-122"/>
-                <a:cs typeface="Calibri" pitchFamily="34" charset="-120"/>
+              <a:rPr lang="en-US" sz="1600" dirty="0">
+                <a:solidFill>
+                  <a:srgbClr val="1D1D1B"/>
+                </a:solidFill>
+                <a:latin typeface="Lucida Sans" pitchFamily="34" charset="0"/>
+                <a:ea typeface="Lucida Sans" pitchFamily="34" charset="-122"/>
+                <a:cs typeface="Lucida Sans" pitchFamily="34" charset="-120"/>
               </a:rPr>
               <a:t>Schleifen und Bedingungen</a:t>
             </a:r>
-            <a:endParaRPr lang="en-US" sz="1700" dirty="0"/>
+            <a:endParaRPr lang="en-US" sz="1600" dirty="0"/>
           </a:p>
           <a:p>
             <a:pPr marL="177800" indent="-177800">
@@ -5912,17 +5962,17 @@
               <a:buChar char="•"/>
             </a:pPr>
             <a:r>
-              <a:rPr lang="en-US" sz="1700" dirty="0">
-                <a:solidFill>
-                  <a:srgbClr val="E6F2F1"/>
-                </a:solidFill>
-                <a:latin typeface="Calibri" pitchFamily="34" charset="0"/>
-                <a:ea typeface="Calibri" pitchFamily="34" charset="-122"/>
-                <a:cs typeface="Calibri" pitchFamily="34" charset="-120"/>
+              <a:rPr lang="en-US" sz="1600" dirty="0">
+                <a:solidFill>
+                  <a:srgbClr val="1D1D1B"/>
+                </a:solidFill>
+                <a:latin typeface="Lucida Sans" pitchFamily="34" charset="0"/>
+                <a:ea typeface="Lucida Sans" pitchFamily="34" charset="-122"/>
+                <a:cs typeface="Lucida Sans" pitchFamily="34" charset="-120"/>
               </a:rPr>
               <a:t>Sensoren und Schwellenwerte</a:t>
             </a:r>
-            <a:endParaRPr lang="en-US" sz="1700" dirty="0"/>
+            <a:endParaRPr lang="en-US" sz="1600" dirty="0"/>
           </a:p>
           <a:p>
             <a:pPr marL="177800" indent="-177800">
@@ -5933,17 +5983,65 @@
               <a:buChar char="•"/>
             </a:pPr>
             <a:r>
-              <a:rPr lang="en-US" sz="1700" dirty="0">
-                <a:solidFill>
-                  <a:srgbClr val="E6F2F1"/>
-                </a:solidFill>
-                <a:latin typeface="Calibri" pitchFamily="34" charset="0"/>
-                <a:ea typeface="Calibri" pitchFamily="34" charset="-122"/>
-                <a:cs typeface="Calibri" pitchFamily="34" charset="-120"/>
+              <a:rPr lang="en-US" sz="1600" dirty="0">
+                <a:solidFill>
+                  <a:srgbClr val="1D1D1B"/>
+                </a:solidFill>
+                <a:latin typeface="Lucida Sans" pitchFamily="34" charset="0"/>
+                <a:ea typeface="Lucida Sans" pitchFamily="34" charset="-122"/>
+                <a:cs typeface="Lucida Sans" pitchFamily="34" charset="-120"/>
               </a:rPr>
               <a:t>Lernpfade für jedes Vorwissen</a:t>
             </a:r>
-            <a:endParaRPr lang="en-US" sz="1700" dirty="0"/>
+            <a:endParaRPr lang="en-US" sz="1600" dirty="0"/>
+          </a:p>
+        </p:txBody>
+      </p:sp>
+      <p:sp>
+        <p:nvSpPr>
+          <p:cNvPr id="25" name="Slide Number Placeholder 0"/>
+          <p:cNvSpPr>
+            <a:spLocks noGrp="1"/>
+          </p:cNvSpPr>
+          <p:nvPr>
+            <p:ph type="sldNum" sz="quarter" idx="4294967295"/>
+          </p:nvPr>
+        </p:nvSpPr>
+        <p:spPr>
+          <a:xfrm>
+            <a:off x="11094415" y="6473952"/>
+            <a:ext cx="548640" cy="274320"/>
+          </a:xfrm>
+          <a:prstGeom prst="rect">
+            <a:avLst/>
+          </a:prstGeom>
+          <a:extLst>
+            <a:ext uri="{C572A759-6A51-4108-AA02-DFA0A04FC94B}">
+              <ma14:wrappingTextBoxFlag xmlns:ma14="http://schemas.microsoft.com/office/mac/drawingml/2011/main" val="0"/>
+            </a:ext>
+          </a:extLst>
+        </p:spPr>
+        <p:txBody>
+          <a:bodyPr/>
+          <a:lstStyle>
+            <a:lvl1pPr>
+              <a:defRPr sz="1000">
+                <a:solidFill>
+                  <a:srgbClr val="706F6F"/>
+                </a:solidFill>
+                <a:latin typeface="Lucida Sans"/>
+                <a:ea typeface="Lucida Sans"/>
+                <a:cs typeface="Lucida Sans"/>
+              </a:defRPr>
+            </a:lvl1pPr>
+          </a:lstStyle>
+          <a:p>
+            <a:pPr algn="r"/>
+            <a:fld id="{F7021451-1387-4CA6-816F-3879F97B5CBC}" type="slidenum">
+              <a:rPr b="0" lang="en-US"/>
+              <a:t>14</a:t>
+            </a:fld>
+            <a:endParaRPr lang="en-US"/>
           </a:p>
         </p:txBody>
       </p:sp>
@@ -5977,13 +6075,13 @@
           <p:cNvPr id="2" name="Text 1"/>
           <p:cNvSpPr/>
           <p:nvPr>
-            <p:ph idx="101" type="title" hasCustomPrompt="1"/>
+            <p:ph idx="102" type="title" hasCustomPrompt="1"/>
           </p:nvPr>
         </p:nvSpPr>
         <p:spPr>
           <a:xfrm>
-            <a:off x="548640" y="320040"/>
-            <a:ext cx="11094415" cy="777240"/>
+            <a:off x="548640" y="274320"/>
+            <a:ext cx="8351215" cy="896112"/>
           </a:xfrm>
           <a:prstGeom prst="rect">
             <a:avLst/>
@@ -5995,21 +6093,21 @@
           <a:bodyPr wrap="square" lIns="0" tIns="0" rIns="0" bIns="0" rtlCol="0" anchor="ctr"/>
           <a:lstStyle/>
           <a:p>
-            <a:pPr indent="0" marL="0">
-              <a:buNone/>
-            </a:pPr>
-            <a:r>
-              <a:rPr lang="en-US" sz="3200" b="1" dirty="0">
-                <a:solidFill>
-                  <a:srgbClr val="0B3C49"/>
-                </a:solidFill>
-                <a:latin typeface="Cambria" pitchFamily="34" charset="0"/>
-                <a:ea typeface="Cambria" pitchFamily="34" charset="-122"/>
-                <a:cs typeface="Cambria" pitchFamily="34" charset="-120"/>
+            <a:pPr algn="l" indent="0" marL="0">
+              <a:buNone/>
+            </a:pPr>
+            <a:r>
+              <a:rPr lang="en-US" sz="2600" b="1" dirty="0">
+                <a:solidFill>
+                  <a:srgbClr val="7A003F"/>
+                </a:solidFill>
+                <a:latin typeface="Lucida Sans" pitchFamily="34" charset="0"/>
+                <a:ea typeface="Lucida Sans" pitchFamily="34" charset="-122"/>
+                <a:cs typeface="Lucida Sans" pitchFamily="34" charset="-120"/>
               </a:rPr>
               <a:t>Die Fortbildungsreihe im Überblick</a:t>
             </a:r>
-            <a:endParaRPr lang="en-US" sz="3200" dirty="0"/>
+            <a:endParaRPr lang="en-US" sz="2600" dirty="0"/>
           </a:p>
         </p:txBody>
       </p:sp>
@@ -6040,11 +6138,11 @@
             <a:r>
               <a:rPr lang="en-US" sz="1700" dirty="0">
                 <a:solidFill>
-                  <a:srgbClr val="5B6B73"/>
-                </a:solidFill>
-                <a:latin typeface="Calibri" pitchFamily="34" charset="0"/>
-                <a:ea typeface="Calibri" pitchFamily="34" charset="-122"/>
-                <a:cs typeface="Calibri" pitchFamily="34" charset="-120"/>
+                  <a:srgbClr val="706F6F"/>
+                </a:solidFill>
+                <a:latin typeface="Lucida Sans" pitchFamily="34" charset="0"/>
+                <a:ea typeface="Lucida Sans" pitchFamily="34" charset="-122"/>
+                <a:cs typeface="Lucida Sans" pitchFamily="34" charset="-120"/>
               </a:rPr>
               <a:t>Jede Sitzung folgt dem Dreischritt Erleben → Reflektieren → Übertragen.</a:t>
             </a:r>
@@ -6069,11 +6167,11 @@
             </a:avLst>
           </a:prstGeom>
           <a:solidFill>
-            <a:srgbClr val="FCEBDD"/>
+            <a:srgbClr val="FDF0E3"/>
           </a:solidFill>
           <a:ln w="12700">
             <a:solidFill>
-              <a:srgbClr val="FCEBDD"/>
+              <a:srgbClr val="FDF0E3"/>
             </a:solidFill>
             <a:prstDash val="solid"/>
           </a:ln>
@@ -6094,11 +6192,11 @@
             <a:avLst/>
           </a:prstGeom>
           <a:solidFill>
-            <a:srgbClr val="E8772E"/>
+            <a:srgbClr val="EF7D00"/>
           </a:solidFill>
           <a:ln w="12700">
             <a:solidFill>
-              <a:srgbClr val="E8772E"/>
+              <a:srgbClr val="EF7D00"/>
             </a:solidFill>
             <a:prstDash val="solid"/>
           </a:ln>
@@ -6131,11 +6229,11 @@
             <a:r>
               <a:rPr lang="en-US" sz="1600" b="1" dirty="0">
                 <a:solidFill>
-                  <a:srgbClr val="FFFFFF"/>
-                </a:solidFill>
-                <a:latin typeface="Calibri" pitchFamily="34" charset="0"/>
-                <a:ea typeface="Calibri" pitchFamily="34" charset="-122"/>
-                <a:cs typeface="Calibri" pitchFamily="34" charset="-120"/>
+                  <a:srgbClr val="1D1D1B"/>
+                </a:solidFill>
+                <a:latin typeface="Lucida Sans" pitchFamily="34" charset="0"/>
+                <a:ea typeface="Lucida Sans" pitchFamily="34" charset="-122"/>
+                <a:cs typeface="Lucida Sans" pitchFamily="34" charset="-120"/>
               </a:rPr>
               <a:t>1</a:t>
             </a:r>
@@ -6170,11 +6268,11 @@
             <a:r>
               <a:rPr lang="en-US" sz="1800" b="1" dirty="0">
                 <a:solidFill>
-                  <a:srgbClr val="0B3C49"/>
-                </a:solidFill>
-                <a:latin typeface="Calibri" pitchFamily="34" charset="0"/>
-                <a:ea typeface="Calibri" pitchFamily="34" charset="-122"/>
-                <a:cs typeface="Calibri" pitchFamily="34" charset="-120"/>
+                  <a:srgbClr val="7A003F"/>
+                </a:solidFill>
+                <a:latin typeface="Lucida Sans" pitchFamily="34" charset="0"/>
+                <a:ea typeface="Lucida Sans" pitchFamily="34" charset="-122"/>
+                <a:cs typeface="Lucida Sans" pitchFamily="34" charset="-120"/>
               </a:rPr>
               <a:t>Sitzung 1 · heute</a:t>
             </a:r>
@@ -6211,17 +6309,17 @@
               <a:buChar char="•"/>
             </a:pPr>
             <a:r>
-              <a:rPr lang="en-US" sz="1700" dirty="0">
-                <a:solidFill>
-                  <a:srgbClr val="1F2A30"/>
-                </a:solidFill>
-                <a:latin typeface="Calibri" pitchFamily="34" charset="0"/>
-                <a:ea typeface="Calibri" pitchFamily="34" charset="-122"/>
-                <a:cs typeface="Calibri" pitchFamily="34" charset="-120"/>
+              <a:rPr lang="en-US" sz="1600" dirty="0">
+                <a:solidFill>
+                  <a:srgbClr val="1D1D1B"/>
+                </a:solidFill>
+                <a:latin typeface="Lucida Sans" pitchFamily="34" charset="0"/>
+                <a:ea typeface="Lucida Sans" pitchFamily="34" charset="-122"/>
+                <a:cs typeface="Lucida Sans" pitchFamily="34" charset="-120"/>
               </a:rPr>
               <a:t>mBot2 aufbauen und als System verstehen</a:t>
             </a:r>
-            <a:endParaRPr lang="en-US" sz="1700" dirty="0"/>
+            <a:endParaRPr lang="en-US" sz="1600" dirty="0"/>
           </a:p>
           <a:p>
             <a:pPr marL="177800" indent="-177800">
@@ -6232,17 +6330,17 @@
               <a:buChar char="•"/>
             </a:pPr>
             <a:r>
-              <a:rPr lang="en-US" sz="1700" dirty="0">
-                <a:solidFill>
-                  <a:srgbClr val="1F2A30"/>
-                </a:solidFill>
-                <a:latin typeface="Calibri" pitchFamily="34" charset="0"/>
-                <a:ea typeface="Calibri" pitchFamily="34" charset="-122"/>
-                <a:cs typeface="Calibri" pitchFamily="34" charset="-120"/>
+              <a:rPr lang="en-US" sz="1600" dirty="0">
+                <a:solidFill>
+                  <a:srgbClr val="1D1D1B"/>
+                </a:solidFill>
+                <a:latin typeface="Lucida Sans" pitchFamily="34" charset="0"/>
+                <a:ea typeface="Lucida Sans" pitchFamily="34" charset="-122"/>
+                <a:cs typeface="Lucida Sans" pitchFamily="34" charset="-120"/>
               </a:rPr>
               <a:t>EVA-Prinzip</a:t>
             </a:r>
-            <a:endParaRPr lang="en-US" sz="1700" dirty="0"/>
+            <a:endParaRPr lang="en-US" sz="1600" dirty="0"/>
           </a:p>
           <a:p>
             <a:pPr marL="177800" indent="-177800">
@@ -6253,17 +6351,17 @@
               <a:buChar char="•"/>
             </a:pPr>
             <a:r>
-              <a:rPr lang="en-US" sz="1700" dirty="0">
-                <a:solidFill>
-                  <a:srgbClr val="1F2A30"/>
-                </a:solidFill>
-                <a:latin typeface="Calibri" pitchFamily="34" charset="0"/>
-                <a:ea typeface="Calibri" pitchFamily="34" charset="-122"/>
-                <a:cs typeface="Calibri" pitchFamily="34" charset="-120"/>
+              <a:rPr lang="en-US" sz="1600" dirty="0">
+                <a:solidFill>
+                  <a:srgbClr val="1D1D1B"/>
+                </a:solidFill>
+                <a:latin typeface="Lucida Sans" pitchFamily="34" charset="0"/>
+                <a:ea typeface="Lucida Sans" pitchFamily="34" charset="-122"/>
+                <a:cs typeface="Lucida Sans" pitchFamily="34" charset="-120"/>
               </a:rPr>
               <a:t>mit Open Roberta verbinden</a:t>
             </a:r>
-            <a:endParaRPr lang="en-US" sz="1700" dirty="0"/>
+            <a:endParaRPr lang="en-US" sz="1600" dirty="0"/>
           </a:p>
           <a:p>
             <a:pPr marL="177800" indent="-177800">
@@ -6274,17 +6372,17 @@
               <a:buChar char="•"/>
             </a:pPr>
             <a:r>
-              <a:rPr lang="en-US" sz="1700" dirty="0">
-                <a:solidFill>
-                  <a:srgbClr val="1F2A30"/>
-                </a:solidFill>
-                <a:latin typeface="Calibri" pitchFamily="34" charset="0"/>
-                <a:ea typeface="Calibri" pitchFamily="34" charset="-122"/>
-                <a:cs typeface="Calibri" pitchFamily="34" charset="-120"/>
+              <a:rPr lang="en-US" sz="1600" dirty="0">
+                <a:solidFill>
+                  <a:srgbClr val="1D1D1B"/>
+                </a:solidFill>
+                <a:latin typeface="Lucida Sans" pitchFamily="34" charset="0"/>
+                <a:ea typeface="Lucida Sans" pitchFamily="34" charset="-122"/>
+                <a:cs typeface="Lucida Sans" pitchFamily="34" charset="-120"/>
               </a:rPr>
               <a:t>erstes Programm</a:t>
             </a:r>
-            <a:endParaRPr lang="en-US" sz="1700" dirty="0"/>
+            <a:endParaRPr lang="en-US" sz="1600" dirty="0"/>
           </a:p>
         </p:txBody>
       </p:sp>
@@ -6305,11 +6403,11 @@
             </a:avLst>
           </a:prstGeom>
           <a:solidFill>
-            <a:srgbClr val="E6F2F1"/>
+            <a:srgbClr val="F2F2F2"/>
           </a:solidFill>
           <a:ln w="12700">
             <a:solidFill>
-              <a:srgbClr val="E6F2F1"/>
+              <a:srgbClr val="F2F2F2"/>
             </a:solidFill>
             <a:prstDash val="solid"/>
           </a:ln>
@@ -6330,11 +6428,11 @@
             <a:avLst/>
           </a:prstGeom>
           <a:solidFill>
-            <a:srgbClr val="0B6E69"/>
+            <a:srgbClr val="7A003F"/>
           </a:solidFill>
           <a:ln w="12700">
             <a:solidFill>
-              <a:srgbClr val="0B6E69"/>
+              <a:srgbClr val="7A003F"/>
             </a:solidFill>
             <a:prstDash val="solid"/>
           </a:ln>
@@ -6369,9 +6467,9 @@
                 <a:solidFill>
                   <a:srgbClr val="FFFFFF"/>
                 </a:solidFill>
-                <a:latin typeface="Calibri" pitchFamily="34" charset="0"/>
-                <a:ea typeface="Calibri" pitchFamily="34" charset="-122"/>
-                <a:cs typeface="Calibri" pitchFamily="34" charset="-120"/>
+                <a:latin typeface="Lucida Sans" pitchFamily="34" charset="0"/>
+                <a:ea typeface="Lucida Sans" pitchFamily="34" charset="-122"/>
+                <a:cs typeface="Lucida Sans" pitchFamily="34" charset="-120"/>
               </a:rPr>
               <a:t>2</a:t>
             </a:r>
@@ -6406,11 +6504,11 @@
             <a:r>
               <a:rPr lang="en-US" sz="1800" b="1" dirty="0">
                 <a:solidFill>
-                  <a:srgbClr val="0B3C49"/>
-                </a:solidFill>
-                <a:latin typeface="Calibri" pitchFamily="34" charset="0"/>
-                <a:ea typeface="Calibri" pitchFamily="34" charset="-122"/>
-                <a:cs typeface="Calibri" pitchFamily="34" charset="-120"/>
+                  <a:srgbClr val="7A003F"/>
+                </a:solidFill>
+                <a:latin typeface="Lucida Sans" pitchFamily="34" charset="0"/>
+                <a:ea typeface="Lucida Sans" pitchFamily="34" charset="-122"/>
+                <a:cs typeface="Lucida Sans" pitchFamily="34" charset="-120"/>
               </a:rPr>
               <a:t>Sitzung 2</a:t>
             </a:r>
@@ -6447,17 +6545,17 @@
               <a:buChar char="•"/>
             </a:pPr>
             <a:r>
-              <a:rPr lang="en-US" sz="1700" dirty="0">
-                <a:solidFill>
-                  <a:srgbClr val="1F2A30"/>
-                </a:solidFill>
-                <a:latin typeface="Calibri" pitchFamily="34" charset="0"/>
-                <a:ea typeface="Calibri" pitchFamily="34" charset="-122"/>
-                <a:cs typeface="Calibri" pitchFamily="34" charset="-120"/>
+              <a:rPr lang="en-US" sz="1600" dirty="0">
+                <a:solidFill>
+                  <a:srgbClr val="1D1D1B"/>
+                </a:solidFill>
+                <a:latin typeface="Lucida Sans" pitchFamily="34" charset="0"/>
+                <a:ea typeface="Lucida Sans" pitchFamily="34" charset="-122"/>
+                <a:cs typeface="Lucida Sans" pitchFamily="34" charset="-120"/>
               </a:rPr>
               <a:t>Sequenz, Schleife, Bedingung</a:t>
             </a:r>
-            <a:endParaRPr lang="en-US" sz="1700" dirty="0"/>
+            <a:endParaRPr lang="en-US" sz="1600" dirty="0"/>
           </a:p>
           <a:p>
             <a:pPr marL="177800" indent="-177800">
@@ -6468,17 +6566,17 @@
               <a:buChar char="•"/>
             </a:pPr>
             <a:r>
-              <a:rPr lang="en-US" sz="1700" dirty="0">
-                <a:solidFill>
-                  <a:srgbClr val="1F2A30"/>
-                </a:solidFill>
-                <a:latin typeface="Calibri" pitchFamily="34" charset="0"/>
-                <a:ea typeface="Calibri" pitchFamily="34" charset="-122"/>
-                <a:cs typeface="Calibri" pitchFamily="34" charset="-120"/>
+              <a:rPr lang="en-US" sz="1600" dirty="0">
+                <a:solidFill>
+                  <a:srgbClr val="1D1D1B"/>
+                </a:solidFill>
+                <a:latin typeface="Lucida Sans" pitchFamily="34" charset="0"/>
+                <a:ea typeface="Lucida Sans" pitchFamily="34" charset="-122"/>
+                <a:cs typeface="Lucida Sans" pitchFamily="34" charset="-120"/>
               </a:rPr>
               <a:t>Sensorwerte und Schwellenwerte</a:t>
             </a:r>
-            <a:endParaRPr lang="en-US" sz="1700" dirty="0"/>
+            <a:endParaRPr lang="en-US" sz="1600" dirty="0"/>
           </a:p>
           <a:p>
             <a:pPr marL="177800" indent="-177800">
@@ -6489,17 +6587,17 @@
               <a:buChar char="•"/>
             </a:pPr>
             <a:r>
-              <a:rPr lang="en-US" sz="1700" dirty="0">
-                <a:solidFill>
-                  <a:srgbClr val="1F2A30"/>
-                </a:solidFill>
-                <a:latin typeface="Calibri" pitchFamily="34" charset="0"/>
-                <a:ea typeface="Calibri" pitchFamily="34" charset="-122"/>
-                <a:cs typeface="Calibri" pitchFamily="34" charset="-120"/>
+              <a:rPr lang="en-US" sz="1600" dirty="0">
+                <a:solidFill>
+                  <a:srgbClr val="1D1D1B"/>
+                </a:solidFill>
+                <a:latin typeface="Lucida Sans" pitchFamily="34" charset="0"/>
+                <a:ea typeface="Lucida Sans" pitchFamily="34" charset="-122"/>
+                <a:cs typeface="Lucida Sans" pitchFamily="34" charset="-120"/>
               </a:rPr>
               <a:t>Lernpfade A/B/C</a:t>
             </a:r>
-            <a:endParaRPr lang="en-US" sz="1700" dirty="0"/>
+            <a:endParaRPr lang="en-US" sz="1600" dirty="0"/>
           </a:p>
           <a:p>
             <a:pPr marL="177800" indent="-177800">
@@ -6510,17 +6608,17 @@
               <a:buChar char="•"/>
             </a:pPr>
             <a:r>
-              <a:rPr lang="en-US" sz="1700" dirty="0">
-                <a:solidFill>
-                  <a:srgbClr val="1F2A30"/>
-                </a:solidFill>
-                <a:latin typeface="Calibri" pitchFamily="34" charset="0"/>
-                <a:ea typeface="Calibri" pitchFamily="34" charset="-122"/>
-                <a:cs typeface="Calibri" pitchFamily="34" charset="-120"/>
+              <a:rPr lang="en-US" sz="1600" dirty="0">
+                <a:solidFill>
+                  <a:srgbClr val="1D1D1B"/>
+                </a:solidFill>
+                <a:latin typeface="Lucida Sans" pitchFamily="34" charset="0"/>
+                <a:ea typeface="Lucida Sans" pitchFamily="34" charset="-122"/>
+                <a:cs typeface="Lucida Sans" pitchFamily="34" charset="-120"/>
               </a:rPr>
               <a:t>Mini-Teach</a:t>
             </a:r>
-            <a:endParaRPr lang="en-US" sz="1700" dirty="0"/>
+            <a:endParaRPr lang="en-US" sz="1600" dirty="0"/>
           </a:p>
         </p:txBody>
       </p:sp>
@@ -6541,11 +6639,11 @@
             </a:avLst>
           </a:prstGeom>
           <a:solidFill>
-            <a:srgbClr val="E6F2F1"/>
+            <a:srgbClr val="F2F2F2"/>
           </a:solidFill>
           <a:ln w="12700">
             <a:solidFill>
-              <a:srgbClr val="E6F2F1"/>
+              <a:srgbClr val="F2F2F2"/>
             </a:solidFill>
             <a:prstDash val="solid"/>
           </a:ln>
@@ -6566,11 +6664,11 @@
             <a:avLst/>
           </a:prstGeom>
           <a:solidFill>
-            <a:srgbClr val="0B6E69"/>
+            <a:srgbClr val="7A003F"/>
           </a:solidFill>
           <a:ln w="12700">
             <a:solidFill>
-              <a:srgbClr val="0B6E69"/>
+              <a:srgbClr val="7A003F"/>
             </a:solidFill>
             <a:prstDash val="solid"/>
           </a:ln>
@@ -6605,9 +6703,9 @@
                 <a:solidFill>
                   <a:srgbClr val="FFFFFF"/>
                 </a:solidFill>
-                <a:latin typeface="Calibri" pitchFamily="34" charset="0"/>
-                <a:ea typeface="Calibri" pitchFamily="34" charset="-122"/>
-                <a:cs typeface="Calibri" pitchFamily="34" charset="-120"/>
+                <a:latin typeface="Lucida Sans" pitchFamily="34" charset="0"/>
+                <a:ea typeface="Lucida Sans" pitchFamily="34" charset="-122"/>
+                <a:cs typeface="Lucida Sans" pitchFamily="34" charset="-120"/>
               </a:rPr>
               <a:t>3</a:t>
             </a:r>
@@ -6642,11 +6740,11 @@
             <a:r>
               <a:rPr lang="en-US" sz="1800" b="1" dirty="0">
                 <a:solidFill>
-                  <a:srgbClr val="0B3C49"/>
-                </a:solidFill>
-                <a:latin typeface="Calibri" pitchFamily="34" charset="0"/>
-                <a:ea typeface="Calibri" pitchFamily="34" charset="-122"/>
-                <a:cs typeface="Calibri" pitchFamily="34" charset="-120"/>
+                  <a:srgbClr val="7A003F"/>
+                </a:solidFill>
+                <a:latin typeface="Lucida Sans" pitchFamily="34" charset="0"/>
+                <a:ea typeface="Lucida Sans" pitchFamily="34" charset="-122"/>
+                <a:cs typeface="Lucida Sans" pitchFamily="34" charset="-120"/>
               </a:rPr>
               <a:t>Sitzung 3</a:t>
             </a:r>
@@ -6683,17 +6781,17 @@
               <a:buChar char="•"/>
             </a:pPr>
             <a:r>
-              <a:rPr lang="en-US" sz="1700" dirty="0">
-                <a:solidFill>
-                  <a:srgbClr val="1F2A30"/>
-                </a:solidFill>
-                <a:latin typeface="Calibri" pitchFamily="34" charset="0"/>
-                <a:ea typeface="Calibri" pitchFamily="34" charset="-122"/>
-                <a:cs typeface="Calibri" pitchFamily="34" charset="-120"/>
+              <a:rPr lang="en-US" sz="1600" dirty="0">
+                <a:solidFill>
+                  <a:srgbClr val="1D1D1B"/>
+                </a:solidFill>
+                <a:latin typeface="Lucida Sans" pitchFamily="34" charset="0"/>
+                <a:ea typeface="Lucida Sans" pitchFamily="34" charset="-122"/>
+                <a:cs typeface="Lucida Sans" pitchFamily="34" charset="-120"/>
               </a:rPr>
               <a:t>Erprobung in Fachgruppen</a:t>
             </a:r>
-            <a:endParaRPr lang="en-US" sz="1700" dirty="0"/>
+            <a:endParaRPr lang="en-US" sz="1600" dirty="0"/>
           </a:p>
           <a:p>
             <a:pPr marL="177800" indent="-177800">
@@ -6704,17 +6802,17 @@
               <a:buChar char="•"/>
             </a:pPr>
             <a:r>
-              <a:rPr lang="en-US" sz="1700" dirty="0">
-                <a:solidFill>
-                  <a:srgbClr val="1F2A30"/>
-                </a:solidFill>
-                <a:latin typeface="Calibri" pitchFamily="34" charset="0"/>
-                <a:ea typeface="Calibri" pitchFamily="34" charset="-122"/>
-                <a:cs typeface="Calibri" pitchFamily="34" charset="-120"/>
-              </a:rPr>
-              <a:t>Tagesplan für eine Projektwoche Klasse 7</a:t>
-            </a:r>
-            <a:endParaRPr lang="en-US" sz="1700" dirty="0"/>
+              <a:rPr lang="en-US" sz="1600" dirty="0">
+                <a:solidFill>
+                  <a:srgbClr val="1D1D1B"/>
+                </a:solidFill>
+                <a:latin typeface="Lucida Sans" pitchFamily="34" charset="0"/>
+                <a:ea typeface="Lucida Sans" pitchFamily="34" charset="-122"/>
+                <a:cs typeface="Lucida Sans" pitchFamily="34" charset="-120"/>
+              </a:rPr>
+              <a:t>Tagesplan für eine Projektwoche (Kl. 5–13)</a:t>
+            </a:r>
+            <a:endParaRPr lang="en-US" sz="1600" dirty="0"/>
           </a:p>
           <a:p>
             <a:pPr marL="177800" indent="-177800">
@@ -6725,17 +6823,17 @@
               <a:buChar char="•"/>
             </a:pPr>
             <a:r>
-              <a:rPr lang="en-US" sz="1700" dirty="0">
-                <a:solidFill>
-                  <a:srgbClr val="1F2A30"/>
-                </a:solidFill>
-                <a:latin typeface="Calibri" pitchFamily="34" charset="0"/>
-                <a:ea typeface="Calibri" pitchFamily="34" charset="-122"/>
-                <a:cs typeface="Calibri" pitchFamily="34" charset="-120"/>
+              <a:rPr lang="en-US" sz="1600" dirty="0">
+                <a:solidFill>
+                  <a:srgbClr val="1D1D1B"/>
+                </a:solidFill>
+                <a:latin typeface="Lucida Sans" pitchFamily="34" charset="0"/>
+                <a:ea typeface="Lucida Sans" pitchFamily="34" charset="-122"/>
+                <a:cs typeface="Lucida Sans" pitchFamily="34" charset="-120"/>
               </a:rPr>
               <a:t>Peer-Feedback, Übergaben</a:t>
             </a:r>
-            <a:endParaRPr lang="en-US" sz="1700" dirty="0"/>
+            <a:endParaRPr lang="en-US" sz="1600" dirty="0"/>
           </a:p>
         </p:txBody>
       </p:sp>
@@ -6756,11 +6854,11 @@
             </a:avLst>
           </a:prstGeom>
           <a:solidFill>
-            <a:srgbClr val="FCEBDD"/>
+            <a:srgbClr val="FDF0E3"/>
           </a:solidFill>
           <a:ln w="12700">
             <a:solidFill>
-              <a:srgbClr val="FCEBDD"/>
+              <a:srgbClr val="FDF0E3"/>
             </a:solidFill>
             <a:prstDash val="solid"/>
           </a:ln>
@@ -6781,11 +6879,11 @@
             <a:avLst/>
           </a:prstGeom>
           <a:solidFill>
-            <a:srgbClr val="E8772E"/>
+            <a:srgbClr val="EF7D00"/>
           </a:solidFill>
           <a:ln w="12700">
             <a:solidFill>
-              <a:srgbClr val="E8772E"/>
+              <a:srgbClr val="EF7D00"/>
             </a:solidFill>
             <a:prstDash val="solid"/>
           </a:ln>
@@ -6818,11 +6916,11 @@
             <a:r>
               <a:rPr lang="en-US" sz="2000" b="1" dirty="0">
                 <a:solidFill>
-                  <a:srgbClr val="FFFFFF"/>
-                </a:solidFill>
-                <a:latin typeface="Calibri" pitchFamily="34" charset="0"/>
-                <a:ea typeface="Calibri" pitchFamily="34" charset="-122"/>
-                <a:cs typeface="Calibri" pitchFamily="34" charset="-120"/>
+                  <a:srgbClr val="1D1D1B"/>
+                </a:solidFill>
+                <a:latin typeface="Lucida Sans" pitchFamily="34" charset="0"/>
+                <a:ea typeface="Lucida Sans" pitchFamily="34" charset="-122"/>
+                <a:cs typeface="Lucida Sans" pitchFamily="34" charset="-120"/>
               </a:rPr>
               <a:t>!</a:t>
             </a:r>
@@ -6857,11 +6955,11 @@
             <a:r>
               <a:rPr lang="en-US" sz="1500" dirty="0">
                 <a:solidFill>
-                  <a:srgbClr val="0B3C49"/>
-                </a:solidFill>
-                <a:latin typeface="Calibri" pitchFamily="34" charset="0"/>
-                <a:ea typeface="Calibri" pitchFamily="34" charset="-122"/>
-                <a:cs typeface="Calibri" pitchFamily="34" charset="-120"/>
+                  <a:srgbClr val="7A003F"/>
+                </a:solidFill>
+                <a:latin typeface="Lucida Sans" pitchFamily="34" charset="0"/>
+                <a:ea typeface="Lucida Sans" pitchFamily="34" charset="-122"/>
+                <a:cs typeface="Lucida Sans" pitchFamily="34" charset="-120"/>
               </a:rPr>
               <a:t>Pädagogischer Doppeldecker: Sie erleben heute selbst die Methoden, die Sie später in Ihrer Klasse einsetzen können.</a:t>
             </a:r>
@@ -6899,11 +6997,11 @@
             <a:lvl1pPr>
               <a:defRPr sz="1000">
                 <a:solidFill>
-                  <a:srgbClr val="5B6B73"/>
-                </a:solidFill>
-                <a:latin typeface="Calibri"/>
-                <a:ea typeface="Calibri"/>
-                <a:cs typeface="Calibri"/>
+                  <a:srgbClr val="706F6F"/>
+                </a:solidFill>
+                <a:latin typeface="Lucida Sans"/>
+                <a:ea typeface="Lucida Sans"/>
+                <a:cs typeface="Lucida Sans"/>
               </a:defRPr>
             </a:lvl1pPr>
           </a:lstStyle>
@@ -6947,13 +7045,13 @@
           <p:cNvPr id="2" name="Text 1"/>
           <p:cNvSpPr/>
           <p:nvPr>
-            <p:ph idx="101" type="title" hasCustomPrompt="1"/>
+            <p:ph idx="102" type="title" hasCustomPrompt="1"/>
           </p:nvPr>
         </p:nvSpPr>
         <p:spPr>
           <a:xfrm>
-            <a:off x="548640" y="320040"/>
-            <a:ext cx="11094415" cy="777240"/>
+            <a:off x="548640" y="274320"/>
+            <a:ext cx="8351215" cy="896112"/>
           </a:xfrm>
           <a:prstGeom prst="rect">
             <a:avLst/>
@@ -6965,21 +7063,21 @@
           <a:bodyPr wrap="square" lIns="0" tIns="0" rIns="0" bIns="0" rtlCol="0" anchor="ctr"/>
           <a:lstStyle/>
           <a:p>
-            <a:pPr indent="0" marL="0">
-              <a:buNone/>
-            </a:pPr>
-            <a:r>
-              <a:rPr lang="en-US" sz="3200" b="1" dirty="0">
-                <a:solidFill>
-                  <a:srgbClr val="0B3C49"/>
-                </a:solidFill>
-                <a:latin typeface="Cambria" pitchFamily="34" charset="0"/>
-                <a:ea typeface="Cambria" pitchFamily="34" charset="-122"/>
-                <a:cs typeface="Cambria" pitchFamily="34" charset="-120"/>
+            <a:pPr algn="l" indent="0" marL="0">
+              <a:buNone/>
+            </a:pPr>
+            <a:r>
+              <a:rPr lang="en-US" sz="2600" b="1" dirty="0">
+                <a:solidFill>
+                  <a:srgbClr val="7A003F"/>
+                </a:solidFill>
+                <a:latin typeface="Lucida Sans" pitchFamily="34" charset="0"/>
+                <a:ea typeface="Lucida Sans" pitchFamily="34" charset="-122"/>
+                <a:cs typeface="Lucida Sans" pitchFamily="34" charset="-120"/>
               </a:rPr>
               <a:t>Ziele und Ablauf heute</a:t>
             </a:r>
-            <a:endParaRPr lang="en-US" sz="3200" dirty="0"/>
+            <a:endParaRPr lang="en-US" sz="2600" dirty="0"/>
           </a:p>
         </p:txBody>
       </p:sp>
@@ -7010,11 +7108,11 @@
             <a:r>
               <a:rPr lang="en-US" sz="1700" dirty="0">
                 <a:solidFill>
-                  <a:srgbClr val="5B6B73"/>
-                </a:solidFill>
-                <a:latin typeface="Calibri" pitchFamily="34" charset="0"/>
-                <a:ea typeface="Calibri" pitchFamily="34" charset="-122"/>
-                <a:cs typeface="Calibri" pitchFamily="34" charset="-120"/>
+                  <a:srgbClr val="706F6F"/>
+                </a:solidFill>
+                <a:latin typeface="Lucida Sans" pitchFamily="34" charset="0"/>
+                <a:ea typeface="Lucida Sans" pitchFamily="34" charset="-122"/>
+                <a:cs typeface="Lucida Sans" pitchFamily="34" charset="-120"/>
               </a:rPr>
               <a:t>Ziel: Den mBot2 selbstständig in Betrieb nehmen und das Zusammenspiel von Sensor, Steuerung und Aktor erklären.</a:t>
             </a:r>
@@ -7039,7 +7137,7 @@
           <a:noFill/>
           <a:ln w="25400">
             <a:solidFill>
-              <a:srgbClr val="C9DAD8"/>
+              <a:srgbClr val="D9D9D9"/>
             </a:solidFill>
             <a:prstDash val="solid"/>
           </a:ln>
@@ -7060,11 +7158,11 @@
             <a:avLst/>
           </a:prstGeom>
           <a:solidFill>
-            <a:srgbClr val="0B6E69"/>
+            <a:srgbClr val="7A003F"/>
           </a:solidFill>
           <a:ln w="12700">
             <a:solidFill>
-              <a:srgbClr val="0B6E69"/>
+              <a:srgbClr val="7A003F"/>
             </a:solidFill>
             <a:prstDash val="solid"/>
           </a:ln>
@@ -7099,9 +7197,9 @@
                 <a:solidFill>
                   <a:srgbClr val="FFFFFF"/>
                 </a:solidFill>
-                <a:latin typeface="Calibri" pitchFamily="34" charset="0"/>
-                <a:ea typeface="Calibri" pitchFamily="34" charset="-122"/>
-                <a:cs typeface="Calibri" pitchFamily="34" charset="-120"/>
+                <a:latin typeface="Lucida Sans" pitchFamily="34" charset="0"/>
+                <a:ea typeface="Lucida Sans" pitchFamily="34" charset="-122"/>
+                <a:cs typeface="Lucida Sans" pitchFamily="34" charset="-120"/>
               </a:rPr>
               <a:t>1</a:t>
             </a:r>
@@ -7136,11 +7234,11 @@
             <a:r>
               <a:rPr lang="en-US" sz="1400" b="1" dirty="0">
                 <a:solidFill>
-                  <a:srgbClr val="0B6E69"/>
-                </a:solidFill>
-                <a:latin typeface="Calibri" pitchFamily="34" charset="0"/>
-                <a:ea typeface="Calibri" pitchFamily="34" charset="-122"/>
-                <a:cs typeface="Calibri" pitchFamily="34" charset="-120"/>
+                  <a:srgbClr val="7A003F"/>
+                </a:solidFill>
+                <a:latin typeface="Lucida Sans" pitchFamily="34" charset="0"/>
+                <a:ea typeface="Lucida Sans" pitchFamily="34" charset="-122"/>
+                <a:cs typeface="Lucida Sans" pitchFamily="34" charset="-120"/>
               </a:rPr>
               <a:t>0–10</a:t>
             </a:r>
@@ -7165,11 +7263,11 @@
             </a:avLst>
           </a:prstGeom>
           <a:solidFill>
-            <a:srgbClr val="E6F2F1"/>
+            <a:srgbClr val="F2F2F2"/>
           </a:solidFill>
           <a:ln w="12700">
             <a:solidFill>
-              <a:srgbClr val="E6F2F1"/>
+              <a:srgbClr val="F2F2F2"/>
             </a:solidFill>
             <a:prstDash val="solid"/>
           </a:ln>
@@ -7202,11 +7300,11 @@
             <a:r>
               <a:rPr lang="en-US" sz="1600" b="1" dirty="0">
                 <a:solidFill>
-                  <a:srgbClr val="0B3C49"/>
-                </a:solidFill>
-                <a:latin typeface="Calibri" pitchFamily="34" charset="0"/>
-                <a:ea typeface="Calibri" pitchFamily="34" charset="-122"/>
-                <a:cs typeface="Calibri" pitchFamily="34" charset="-120"/>
+                  <a:srgbClr val="7A003F"/>
+                </a:solidFill>
+                <a:latin typeface="Lucida Sans" pitchFamily="34" charset="0"/>
+                <a:ea typeface="Lucida Sans" pitchFamily="34" charset="-122"/>
+                <a:cs typeface="Lucida Sans" pitchFamily="34" charset="-120"/>
               </a:rPr>
               <a:t>Ankommen</a:t>
             </a:r>
@@ -7239,17 +7337,17 @@
               <a:buNone/>
             </a:pPr>
             <a:r>
-              <a:rPr lang="en-US" sz="1500" dirty="0">
-                <a:solidFill>
-                  <a:srgbClr val="1F2A30"/>
-                </a:solidFill>
-                <a:latin typeface="Calibri" pitchFamily="34" charset="0"/>
-                <a:ea typeface="Calibri" pitchFamily="34" charset="-122"/>
-                <a:cs typeface="Calibri" pitchFamily="34" charset="-120"/>
-              </a:rPr>
-              <a:t>Ampel-Selbsteinschätzung, Tandems bilden</a:t>
-            </a:r>
-            <a:endParaRPr lang="en-US" sz="1500" dirty="0"/>
+              <a:rPr lang="en-US" sz="1400" dirty="0">
+                <a:solidFill>
+                  <a:srgbClr val="1D1D1B"/>
+                </a:solidFill>
+                <a:latin typeface="Lucida Sans" pitchFamily="34" charset="0"/>
+                <a:ea typeface="Lucida Sans" pitchFamily="34" charset="-122"/>
+                <a:cs typeface="Lucida Sans" pitchFamily="34" charset="-120"/>
+              </a:rPr>
+              <a:t>Ampel-Abfrage, Tandems bilden</a:t>
+            </a:r>
+            <a:endParaRPr lang="en-US" sz="1400" dirty="0"/>
           </a:p>
         </p:txBody>
       </p:sp>
@@ -7268,11 +7366,11 @@
             <a:avLst/>
           </a:prstGeom>
           <a:solidFill>
-            <a:srgbClr val="0B6E69"/>
+            <a:srgbClr val="7A003F"/>
           </a:solidFill>
           <a:ln w="12700">
             <a:solidFill>
-              <a:srgbClr val="0B6E69"/>
+              <a:srgbClr val="7A003F"/>
             </a:solidFill>
             <a:prstDash val="solid"/>
           </a:ln>
@@ -7307,9 +7405,9 @@
                 <a:solidFill>
                   <a:srgbClr val="FFFFFF"/>
                 </a:solidFill>
-                <a:latin typeface="Calibri" pitchFamily="34" charset="0"/>
-                <a:ea typeface="Calibri" pitchFamily="34" charset="-122"/>
-                <a:cs typeface="Calibri" pitchFamily="34" charset="-120"/>
+                <a:latin typeface="Lucida Sans" pitchFamily="34" charset="0"/>
+                <a:ea typeface="Lucida Sans" pitchFamily="34" charset="-122"/>
+                <a:cs typeface="Lucida Sans" pitchFamily="34" charset="-120"/>
               </a:rPr>
               <a:t>2</a:t>
             </a:r>
@@ -7344,11 +7442,11 @@
             <a:r>
               <a:rPr lang="en-US" sz="1400" b="1" dirty="0">
                 <a:solidFill>
-                  <a:srgbClr val="0B6E69"/>
-                </a:solidFill>
-                <a:latin typeface="Calibri" pitchFamily="34" charset="0"/>
-                <a:ea typeface="Calibri" pitchFamily="34" charset="-122"/>
-                <a:cs typeface="Calibri" pitchFamily="34" charset="-120"/>
+                  <a:srgbClr val="7A003F"/>
+                </a:solidFill>
+                <a:latin typeface="Lucida Sans" pitchFamily="34" charset="0"/>
+                <a:ea typeface="Lucida Sans" pitchFamily="34" charset="-122"/>
+                <a:cs typeface="Lucida Sans" pitchFamily="34" charset="-120"/>
               </a:rPr>
               <a:t>10–24</a:t>
             </a:r>
@@ -7373,11 +7471,11 @@
             </a:avLst>
           </a:prstGeom>
           <a:solidFill>
-            <a:srgbClr val="E6F2F1"/>
+            <a:srgbClr val="F2F2F2"/>
           </a:solidFill>
           <a:ln w="12700">
             <a:solidFill>
-              <a:srgbClr val="E6F2F1"/>
+              <a:srgbClr val="F2F2F2"/>
             </a:solidFill>
             <a:prstDash val="solid"/>
           </a:ln>
@@ -7410,11 +7508,11 @@
             <a:r>
               <a:rPr lang="en-US" sz="1600" b="1" dirty="0">
                 <a:solidFill>
-                  <a:srgbClr val="0B3C49"/>
-                </a:solidFill>
-                <a:latin typeface="Calibri" pitchFamily="34" charset="0"/>
-                <a:ea typeface="Calibri" pitchFamily="34" charset="-122"/>
-                <a:cs typeface="Calibri" pitchFamily="34" charset="-120"/>
+                  <a:srgbClr val="7A003F"/>
+                </a:solidFill>
+                <a:latin typeface="Lucida Sans" pitchFamily="34" charset="0"/>
+                <a:ea typeface="Lucida Sans" pitchFamily="34" charset="-122"/>
+                <a:cs typeface="Lucida Sans" pitchFamily="34" charset="-120"/>
               </a:rPr>
               <a:t>EVA und Bauteile</a:t>
             </a:r>
@@ -7447,17 +7545,17 @@
               <a:buNone/>
             </a:pPr>
             <a:r>
-              <a:rPr lang="en-US" sz="1500" dirty="0">
-                <a:solidFill>
-                  <a:srgbClr val="1F2A30"/>
-                </a:solidFill>
-                <a:latin typeface="Calibri" pitchFamily="34" charset="0"/>
-                <a:ea typeface="Calibri" pitchFamily="34" charset="-122"/>
-                <a:cs typeface="Calibri" pitchFamily="34" charset="-120"/>
+              <a:rPr lang="en-US" sz="1400" dirty="0">
+                <a:solidFill>
+                  <a:srgbClr val="1D1D1B"/>
+                </a:solidFill>
+                <a:latin typeface="Lucida Sans" pitchFamily="34" charset="0"/>
+                <a:ea typeface="Lucida Sans" pitchFamily="34" charset="-122"/>
+                <a:cs typeface="Lucida Sans" pitchFamily="34" charset="-120"/>
               </a:rPr>
               <a:t>Leitfrage, Bauteile zuordnen (Arbeitsheft Aufgabe 1)</a:t>
             </a:r>
-            <a:endParaRPr lang="en-US" sz="1500" dirty="0"/>
+            <a:endParaRPr lang="en-US" sz="1400" dirty="0"/>
           </a:p>
         </p:txBody>
       </p:sp>
@@ -7476,11 +7574,11 @@
             <a:avLst/>
           </a:prstGeom>
           <a:solidFill>
-            <a:srgbClr val="E8772E"/>
+            <a:srgbClr val="EF7D00"/>
           </a:solidFill>
           <a:ln w="12700">
             <a:solidFill>
-              <a:srgbClr val="E8772E"/>
+              <a:srgbClr val="EF7D00"/>
             </a:solidFill>
             <a:prstDash val="solid"/>
           </a:ln>
@@ -7513,11 +7611,11 @@
             <a:r>
               <a:rPr lang="en-US" sz="1600" b="1" dirty="0">
                 <a:solidFill>
-                  <a:srgbClr val="FFFFFF"/>
-                </a:solidFill>
-                <a:latin typeface="Calibri" pitchFamily="34" charset="0"/>
-                <a:ea typeface="Calibri" pitchFamily="34" charset="-122"/>
-                <a:cs typeface="Calibri" pitchFamily="34" charset="-120"/>
+                  <a:srgbClr val="1D1D1B"/>
+                </a:solidFill>
+                <a:latin typeface="Lucida Sans" pitchFamily="34" charset="0"/>
+                <a:ea typeface="Lucida Sans" pitchFamily="34" charset="-122"/>
+                <a:cs typeface="Lucida Sans" pitchFamily="34" charset="-120"/>
               </a:rPr>
               <a:t>3</a:t>
             </a:r>
@@ -7552,11 +7650,11 @@
             <a:r>
               <a:rPr lang="en-US" sz="1400" b="1" dirty="0">
                 <a:solidFill>
-                  <a:srgbClr val="0B6E69"/>
-                </a:solidFill>
-                <a:latin typeface="Calibri" pitchFamily="34" charset="0"/>
-                <a:ea typeface="Calibri" pitchFamily="34" charset="-122"/>
-                <a:cs typeface="Calibri" pitchFamily="34" charset="-120"/>
+                  <a:srgbClr val="7A003F"/>
+                </a:solidFill>
+                <a:latin typeface="Lucida Sans" pitchFamily="34" charset="0"/>
+                <a:ea typeface="Lucida Sans" pitchFamily="34" charset="-122"/>
+                <a:cs typeface="Lucida Sans" pitchFamily="34" charset="-120"/>
               </a:rPr>
               <a:t>24–62</a:t>
             </a:r>
@@ -7581,11 +7679,11 @@
             </a:avLst>
           </a:prstGeom>
           <a:solidFill>
-            <a:srgbClr val="FCEBDD"/>
+            <a:srgbClr val="FDF0E3"/>
           </a:solidFill>
           <a:ln w="12700">
             <a:solidFill>
-              <a:srgbClr val="FCEBDD"/>
+              <a:srgbClr val="FDF0E3"/>
             </a:solidFill>
             <a:prstDash val="solid"/>
           </a:ln>
@@ -7618,11 +7716,11 @@
             <a:r>
               <a:rPr lang="en-US" sz="1600" b="1" dirty="0">
                 <a:solidFill>
-                  <a:srgbClr val="0B3C49"/>
-                </a:solidFill>
-                <a:latin typeface="Calibri" pitchFamily="34" charset="0"/>
-                <a:ea typeface="Calibri" pitchFamily="34" charset="-122"/>
-                <a:cs typeface="Calibri" pitchFamily="34" charset="-120"/>
+                  <a:srgbClr val="7A003F"/>
+                </a:solidFill>
+                <a:latin typeface="Lucida Sans" pitchFamily="34" charset="0"/>
+                <a:ea typeface="Lucida Sans" pitchFamily="34" charset="-122"/>
+                <a:cs typeface="Lucida Sans" pitchFamily="34" charset="-120"/>
               </a:rPr>
               <a:t>Montage im Tandem</a:t>
             </a:r>
@@ -7655,17 +7753,17 @@
               <a:buNone/>
             </a:pPr>
             <a:r>
-              <a:rPr lang="en-US" sz="1500" dirty="0">
-                <a:solidFill>
-                  <a:srgbClr val="1F2A30"/>
-                </a:solidFill>
-                <a:latin typeface="Calibri" pitchFamily="34" charset="0"/>
-                <a:ea typeface="Calibri" pitchFamily="34" charset="-122"/>
-                <a:cs typeface="Calibri" pitchFamily="34" charset="-120"/>
+              <a:rPr lang="en-US" sz="1400" dirty="0">
+                <a:solidFill>
+                  <a:srgbClr val="1D1D1B"/>
+                </a:solidFill>
+                <a:latin typeface="Lucida Sans" pitchFamily="34" charset="0"/>
+                <a:ea typeface="Lucida Sans" pitchFamily="34" charset="-122"/>
+                <a:cs typeface="Lucida Sans" pitchFamily="34" charset="-120"/>
               </a:rPr>
               <a:t>Rollen, 9 Bauschritte, Funktionsprüfung</a:t>
             </a:r>
-            <a:endParaRPr lang="en-US" sz="1500" dirty="0"/>
+            <a:endParaRPr lang="en-US" sz="1400" dirty="0"/>
           </a:p>
         </p:txBody>
       </p:sp>
@@ -7684,11 +7782,11 @@
             <a:avLst/>
           </a:prstGeom>
           <a:solidFill>
-            <a:srgbClr val="0B6E69"/>
+            <a:srgbClr val="7A003F"/>
           </a:solidFill>
           <a:ln w="12700">
             <a:solidFill>
-              <a:srgbClr val="0B6E69"/>
+              <a:srgbClr val="7A003F"/>
             </a:solidFill>
             <a:prstDash val="solid"/>
           </a:ln>
@@ -7723,9 +7821,9 @@
                 <a:solidFill>
                   <a:srgbClr val="FFFFFF"/>
                 </a:solidFill>
-                <a:latin typeface="Calibri" pitchFamily="34" charset="0"/>
-                <a:ea typeface="Calibri" pitchFamily="34" charset="-122"/>
-                <a:cs typeface="Calibri" pitchFamily="34" charset="-120"/>
+                <a:latin typeface="Lucida Sans" pitchFamily="34" charset="0"/>
+                <a:ea typeface="Lucida Sans" pitchFamily="34" charset="-122"/>
+                <a:cs typeface="Lucida Sans" pitchFamily="34" charset="-120"/>
               </a:rPr>
               <a:t>4</a:t>
             </a:r>
@@ -7760,11 +7858,11 @@
             <a:r>
               <a:rPr lang="en-US" sz="1400" b="1" dirty="0">
                 <a:solidFill>
-                  <a:srgbClr val="0B6E69"/>
-                </a:solidFill>
-                <a:latin typeface="Calibri" pitchFamily="34" charset="0"/>
-                <a:ea typeface="Calibri" pitchFamily="34" charset="-122"/>
-                <a:cs typeface="Calibri" pitchFamily="34" charset="-120"/>
+                  <a:srgbClr val="7A003F"/>
+                </a:solidFill>
+                <a:latin typeface="Lucida Sans" pitchFamily="34" charset="0"/>
+                <a:ea typeface="Lucida Sans" pitchFamily="34" charset="-122"/>
+                <a:cs typeface="Lucida Sans" pitchFamily="34" charset="-120"/>
               </a:rPr>
               <a:t>62–80</a:t>
             </a:r>
@@ -7789,11 +7887,11 @@
             </a:avLst>
           </a:prstGeom>
           <a:solidFill>
-            <a:srgbClr val="E6F2F1"/>
+            <a:srgbClr val="F2F2F2"/>
           </a:solidFill>
           <a:ln w="12700">
             <a:solidFill>
-              <a:srgbClr val="E6F2F1"/>
+              <a:srgbClr val="F2F2F2"/>
             </a:solidFill>
             <a:prstDash val="solid"/>
           </a:ln>
@@ -7826,11 +7924,11 @@
             <a:r>
               <a:rPr lang="en-US" sz="1600" b="1" dirty="0">
                 <a:solidFill>
-                  <a:srgbClr val="0B3C49"/>
-                </a:solidFill>
-                <a:latin typeface="Calibri" pitchFamily="34" charset="0"/>
-                <a:ea typeface="Calibri" pitchFamily="34" charset="-122"/>
-                <a:cs typeface="Calibri" pitchFamily="34" charset="-120"/>
+                  <a:srgbClr val="7A003F"/>
+                </a:solidFill>
+                <a:latin typeface="Lucida Sans" pitchFamily="34" charset="0"/>
+                <a:ea typeface="Lucida Sans" pitchFamily="34" charset="-122"/>
+                <a:cs typeface="Lucida Sans" pitchFamily="34" charset="-120"/>
               </a:rPr>
               <a:t>Open Roberta</a:t>
             </a:r>
@@ -7863,17 +7961,17 @@
               <a:buNone/>
             </a:pPr>
             <a:r>
-              <a:rPr lang="en-US" sz="1500" dirty="0">
-                <a:solidFill>
-                  <a:srgbClr val="1F2A30"/>
-                </a:solidFill>
-                <a:latin typeface="Calibri" pitchFamily="34" charset="0"/>
-                <a:ea typeface="Calibri" pitchFamily="34" charset="-122"/>
-                <a:cs typeface="Calibri" pitchFamily="34" charset="-120"/>
+              <a:rPr lang="en-US" sz="1400" dirty="0">
+                <a:solidFill>
+                  <a:srgbClr val="1D1D1B"/>
+                </a:solidFill>
+                <a:latin typeface="Lucida Sans" pitchFamily="34" charset="0"/>
+                <a:ea typeface="Lucida Sans" pitchFamily="34" charset="-122"/>
+                <a:cs typeface="Lucida Sans" pitchFamily="34" charset="-120"/>
               </a:rPr>
               <a:t>Verbinden, erstes Programm vorhersagen und testen</a:t>
             </a:r>
-            <a:endParaRPr lang="en-US" sz="1500" dirty="0"/>
+            <a:endParaRPr lang="en-US" sz="1400" dirty="0"/>
           </a:p>
         </p:txBody>
       </p:sp>
@@ -7892,11 +7990,11 @@
             <a:avLst/>
           </a:prstGeom>
           <a:solidFill>
-            <a:srgbClr val="0B6E69"/>
+            <a:srgbClr val="7A003F"/>
           </a:solidFill>
           <a:ln w="12700">
             <a:solidFill>
-              <a:srgbClr val="0B6E69"/>
+              <a:srgbClr val="7A003F"/>
             </a:solidFill>
             <a:prstDash val="solid"/>
           </a:ln>
@@ -7931,9 +8029,9 @@
                 <a:solidFill>
                   <a:srgbClr val="FFFFFF"/>
                 </a:solidFill>
-                <a:latin typeface="Calibri" pitchFamily="34" charset="0"/>
-                <a:ea typeface="Calibri" pitchFamily="34" charset="-122"/>
-                <a:cs typeface="Calibri" pitchFamily="34" charset="-120"/>
+                <a:latin typeface="Lucida Sans" pitchFamily="34" charset="0"/>
+                <a:ea typeface="Lucida Sans" pitchFamily="34" charset="-122"/>
+                <a:cs typeface="Lucida Sans" pitchFamily="34" charset="-120"/>
               </a:rPr>
               <a:t>5</a:t>
             </a:r>
@@ -7968,11 +8066,11 @@
             <a:r>
               <a:rPr lang="en-US" sz="1400" b="1" dirty="0">
                 <a:solidFill>
-                  <a:srgbClr val="0B6E69"/>
-                </a:solidFill>
-                <a:latin typeface="Calibri" pitchFamily="34" charset="0"/>
-                <a:ea typeface="Calibri" pitchFamily="34" charset="-122"/>
-                <a:cs typeface="Calibri" pitchFamily="34" charset="-120"/>
+                  <a:srgbClr val="7A003F"/>
+                </a:solidFill>
+                <a:latin typeface="Lucida Sans" pitchFamily="34" charset="0"/>
+                <a:ea typeface="Lucida Sans" pitchFamily="34" charset="-122"/>
+                <a:cs typeface="Lucida Sans" pitchFamily="34" charset="-120"/>
               </a:rPr>
               <a:t>80–90</a:t>
             </a:r>
@@ -7997,11 +8095,11 @@
             </a:avLst>
           </a:prstGeom>
           <a:solidFill>
-            <a:srgbClr val="E6F2F1"/>
+            <a:srgbClr val="F2F2F2"/>
           </a:solidFill>
           <a:ln w="12700">
             <a:solidFill>
-              <a:srgbClr val="E6F2F1"/>
+              <a:srgbClr val="F2F2F2"/>
             </a:solidFill>
             <a:prstDash val="solid"/>
           </a:ln>
@@ -8034,11 +8132,11 @@
             <a:r>
               <a:rPr lang="en-US" sz="1600" b="1" dirty="0">
                 <a:solidFill>
-                  <a:srgbClr val="0B3C49"/>
-                </a:solidFill>
-                <a:latin typeface="Calibri" pitchFamily="34" charset="0"/>
-                <a:ea typeface="Calibri" pitchFamily="34" charset="-122"/>
-                <a:cs typeface="Calibri" pitchFamily="34" charset="-120"/>
+                  <a:srgbClr val="7A003F"/>
+                </a:solidFill>
+                <a:latin typeface="Lucida Sans" pitchFamily="34" charset="0"/>
+                <a:ea typeface="Lucida Sans" pitchFamily="34" charset="-122"/>
+                <a:cs typeface="Lucida Sans" pitchFamily="34" charset="-120"/>
               </a:rPr>
               <a:t>Reflexion</a:t>
             </a:r>
@@ -8071,17 +8169,17 @@
               <a:buNone/>
             </a:pPr>
             <a:r>
-              <a:rPr lang="en-US" sz="1500" dirty="0">
-                <a:solidFill>
-                  <a:srgbClr val="1F2A30"/>
-                </a:solidFill>
-                <a:latin typeface="Calibri" pitchFamily="34" charset="0"/>
-                <a:ea typeface="Calibri" pitchFamily="34" charset="-122"/>
-                <a:cs typeface="Calibri" pitchFamily="34" charset="-120"/>
+              <a:rPr lang="en-US" sz="1400" dirty="0">
+                <a:solidFill>
+                  <a:srgbClr val="1D1D1B"/>
+                </a:solidFill>
+                <a:latin typeface="Lucida Sans" pitchFamily="34" charset="0"/>
+                <a:ea typeface="Lucida Sans" pitchFamily="34" charset="-122"/>
+                <a:cs typeface="Lucida Sans" pitchFamily="34" charset="-120"/>
               </a:rPr>
               <a:t>Was bedeutet das für meine Klasse? Ausblick</a:t>
             </a:r>
-            <a:endParaRPr lang="en-US" sz="1500" dirty="0"/>
+            <a:endParaRPr lang="en-US" sz="1400" dirty="0"/>
           </a:p>
         </p:txBody>
       </p:sp>
@@ -8115,11 +8213,11 @@
             <a:lvl1pPr>
               <a:defRPr sz="1000">
                 <a:solidFill>
-                  <a:srgbClr val="5B6B73"/>
-                </a:solidFill>
-                <a:latin typeface="Calibri"/>
-                <a:ea typeface="Calibri"/>
-                <a:cs typeface="Calibri"/>
+                  <a:srgbClr val="706F6F"/>
+                </a:solidFill>
+                <a:latin typeface="Lucida Sans"/>
+                <a:ea typeface="Lucida Sans"/>
+                <a:cs typeface="Lucida Sans"/>
               </a:defRPr>
             </a:lvl1pPr>
           </a:lstStyle>
@@ -8163,13 +8261,13 @@
           <p:cNvPr id="2" name="Text 1"/>
           <p:cNvSpPr/>
           <p:nvPr>
-            <p:ph idx="101" type="title" hasCustomPrompt="1"/>
+            <p:ph idx="102" type="title" hasCustomPrompt="1"/>
           </p:nvPr>
         </p:nvSpPr>
         <p:spPr>
           <a:xfrm>
-            <a:off x="548640" y="320040"/>
-            <a:ext cx="11094415" cy="777240"/>
+            <a:off x="548640" y="274320"/>
+            <a:ext cx="8351215" cy="896112"/>
           </a:xfrm>
           <a:prstGeom prst="rect">
             <a:avLst/>
@@ -8181,21 +8279,21 @@
           <a:bodyPr wrap="square" lIns="0" tIns="0" rIns="0" bIns="0" rtlCol="0" anchor="ctr"/>
           <a:lstStyle/>
           <a:p>
-            <a:pPr indent="0" marL="0">
-              <a:buNone/>
-            </a:pPr>
-            <a:r>
-              <a:rPr lang="en-US" sz="3200" b="1" dirty="0">
-                <a:solidFill>
-                  <a:srgbClr val="0B3C49"/>
-                </a:solidFill>
-                <a:latin typeface="Cambria" pitchFamily="34" charset="0"/>
-                <a:ea typeface="Cambria" pitchFamily="34" charset="-122"/>
-                <a:cs typeface="Cambria" pitchFamily="34" charset="-120"/>
+            <a:pPr algn="l" indent="0" marL="0">
+              <a:buNone/>
+            </a:pPr>
+            <a:r>
+              <a:rPr lang="en-US" sz="2600" b="1" dirty="0">
+                <a:solidFill>
+                  <a:srgbClr val="7A003F"/>
+                </a:solidFill>
+                <a:latin typeface="Lucida Sans" pitchFamily="34" charset="0"/>
+                <a:ea typeface="Lucida Sans" pitchFamily="34" charset="-122"/>
+                <a:cs typeface="Lucida Sans" pitchFamily="34" charset="-120"/>
               </a:rPr>
               <a:t>Wo stehen Sie?</a:t>
             </a:r>
-            <a:endParaRPr lang="en-US" sz="3200" dirty="0"/>
+            <a:endParaRPr lang="en-US" sz="2600" dirty="0"/>
           </a:p>
         </p:txBody>
       </p:sp>
@@ -8226,11 +8324,11 @@
             <a:r>
               <a:rPr lang="en-US" sz="1700" dirty="0">
                 <a:solidFill>
-                  <a:srgbClr val="5B6B73"/>
-                </a:solidFill>
-                <a:latin typeface="Calibri" pitchFamily="34" charset="0"/>
-                <a:ea typeface="Calibri" pitchFamily="34" charset="-122"/>
-                <a:cs typeface="Calibri" pitchFamily="34" charset="-120"/>
+                  <a:srgbClr val="706F6F"/>
+                </a:solidFill>
+                <a:latin typeface="Lucida Sans" pitchFamily="34" charset="0"/>
+                <a:ea typeface="Lucida Sans" pitchFamily="34" charset="-122"/>
+                <a:cs typeface="Lucida Sans" pitchFamily="34" charset="-120"/>
               </a:rPr>
               <a:t>Halten Sie die Ampelkarte hoch, die am besten passt. Wir zählen und vergleichen am Ende.</a:t>
             </a:r>
@@ -8255,11 +8353,11 @@
             </a:avLst>
           </a:prstGeom>
           <a:solidFill>
-            <a:srgbClr val="E6F2F1"/>
+            <a:srgbClr val="F2F2F2"/>
           </a:solidFill>
           <a:ln w="12700">
             <a:solidFill>
-              <a:srgbClr val="E6F2F1"/>
+              <a:srgbClr val="F2F2F2"/>
             </a:solidFill>
             <a:prstDash val="solid"/>
           </a:ln>
@@ -8345,11 +8443,11 @@
             <a:r>
               <a:rPr lang="en-US" sz="1800" b="1" dirty="0">
                 <a:solidFill>
-                  <a:srgbClr val="0B3C49"/>
-                </a:solidFill>
-                <a:latin typeface="Calibri" pitchFamily="34" charset="0"/>
-                <a:ea typeface="Calibri" pitchFamily="34" charset="-122"/>
-                <a:cs typeface="Calibri" pitchFamily="34" charset="-120"/>
+                  <a:srgbClr val="7A003F"/>
+                </a:solidFill>
+                <a:latin typeface="Lucida Sans" pitchFamily="34" charset="0"/>
+                <a:ea typeface="Lucida Sans" pitchFamily="34" charset="-122"/>
+                <a:cs typeface="Lucida Sans" pitchFamily="34" charset="-120"/>
               </a:rPr>
               <a:t>Grün</a:t>
             </a:r>
@@ -8384,11 +8482,11 @@
             <a:r>
               <a:rPr lang="en-US" sz="1800" dirty="0">
                 <a:solidFill>
-                  <a:srgbClr val="1F2A30"/>
-                </a:solidFill>
-                <a:latin typeface="Calibri" pitchFamily="34" charset="0"/>
-                <a:ea typeface="Calibri" pitchFamily="34" charset="-122"/>
-                <a:cs typeface="Calibri" pitchFamily="34" charset="-120"/>
+                  <a:srgbClr val="1D1D1B"/>
+                </a:solidFill>
+                <a:latin typeface="Lucida Sans" pitchFamily="34" charset="0"/>
+                <a:ea typeface="Lucida Sans" pitchFamily="34" charset="-122"/>
+                <a:cs typeface="Lucida Sans" pitchFamily="34" charset="-120"/>
               </a:rPr>
               <a:t>Ich kenne den mBot2 oder ähnliche Roboter und habe schon programmiert.</a:t>
             </a:r>
@@ -8413,11 +8511,11 @@
             </a:avLst>
           </a:prstGeom>
           <a:solidFill>
-            <a:srgbClr val="E6F2F1"/>
+            <a:srgbClr val="F2F2F2"/>
           </a:solidFill>
           <a:ln w="12700">
             <a:solidFill>
-              <a:srgbClr val="E6F2F1"/>
+              <a:srgbClr val="F2F2F2"/>
             </a:solidFill>
             <a:prstDash val="solid"/>
           </a:ln>
@@ -8503,11 +8601,11 @@
             <a:r>
               <a:rPr lang="en-US" sz="1800" b="1" dirty="0">
                 <a:solidFill>
-                  <a:srgbClr val="0B3C49"/>
-                </a:solidFill>
-                <a:latin typeface="Calibri" pitchFamily="34" charset="0"/>
-                <a:ea typeface="Calibri" pitchFamily="34" charset="-122"/>
-                <a:cs typeface="Calibri" pitchFamily="34" charset="-120"/>
+                  <a:srgbClr val="7A003F"/>
+                </a:solidFill>
+                <a:latin typeface="Lucida Sans" pitchFamily="34" charset="0"/>
+                <a:ea typeface="Lucida Sans" pitchFamily="34" charset="-122"/>
+                <a:cs typeface="Lucida Sans" pitchFamily="34" charset="-120"/>
               </a:rPr>
               <a:t>Gelb</a:t>
             </a:r>
@@ -8542,11 +8640,11 @@
             <a:r>
               <a:rPr lang="en-US" sz="1800" dirty="0">
                 <a:solidFill>
-                  <a:srgbClr val="1F2A30"/>
-                </a:solidFill>
-                <a:latin typeface="Calibri" pitchFamily="34" charset="0"/>
-                <a:ea typeface="Calibri" pitchFamily="34" charset="-122"/>
-                <a:cs typeface="Calibri" pitchFamily="34" charset="-120"/>
+                  <a:srgbClr val="1D1D1B"/>
+                </a:solidFill>
+                <a:latin typeface="Lucida Sans" pitchFamily="34" charset="0"/>
+                <a:ea typeface="Lucida Sans" pitchFamily="34" charset="-122"/>
+                <a:cs typeface="Lucida Sans" pitchFamily="34" charset="-120"/>
               </a:rPr>
               <a:t>Ich habe schon etwas ausprobiert, z. B. Scratch, Calliope oder LEGO.</a:t>
             </a:r>
@@ -8571,11 +8669,11 @@
             </a:avLst>
           </a:prstGeom>
           <a:solidFill>
-            <a:srgbClr val="E6F2F1"/>
+            <a:srgbClr val="F2F2F2"/>
           </a:solidFill>
           <a:ln w="12700">
             <a:solidFill>
-              <a:srgbClr val="E6F2F1"/>
+              <a:srgbClr val="F2F2F2"/>
             </a:solidFill>
             <a:prstDash val="solid"/>
           </a:ln>
@@ -8661,11 +8759,11 @@
             <a:r>
               <a:rPr lang="en-US" sz="1800" b="1" dirty="0">
                 <a:solidFill>
-                  <a:srgbClr val="0B3C49"/>
-                </a:solidFill>
-                <a:latin typeface="Calibri" pitchFamily="34" charset="0"/>
-                <a:ea typeface="Calibri" pitchFamily="34" charset="-122"/>
-                <a:cs typeface="Calibri" pitchFamily="34" charset="-120"/>
+                  <a:srgbClr val="7A003F"/>
+                </a:solidFill>
+                <a:latin typeface="Lucida Sans" pitchFamily="34" charset="0"/>
+                <a:ea typeface="Lucida Sans" pitchFamily="34" charset="-122"/>
+                <a:cs typeface="Lucida Sans" pitchFamily="34" charset="-120"/>
               </a:rPr>
               <a:t>Rot</a:t>
             </a:r>
@@ -8700,11 +8798,11 @@
             <a:r>
               <a:rPr lang="en-US" sz="1800" dirty="0">
                 <a:solidFill>
-                  <a:srgbClr val="1F2A30"/>
-                </a:solidFill>
-                <a:latin typeface="Calibri" pitchFamily="34" charset="0"/>
-                <a:ea typeface="Calibri" pitchFamily="34" charset="-122"/>
-                <a:cs typeface="Calibri" pitchFamily="34" charset="-120"/>
+                  <a:srgbClr val="1D1D1B"/>
+                </a:solidFill>
+                <a:latin typeface="Lucida Sans" pitchFamily="34" charset="0"/>
+                <a:ea typeface="Lucida Sans" pitchFamily="34" charset="-122"/>
+                <a:cs typeface="Lucida Sans" pitchFamily="34" charset="-120"/>
               </a:rPr>
               <a:t>Das ist alles neu für mich.</a:t>
             </a:r>
@@ -8729,11 +8827,11 @@
             </a:avLst>
           </a:prstGeom>
           <a:solidFill>
-            <a:srgbClr val="FCEBDD"/>
+            <a:srgbClr val="FDF0E3"/>
           </a:solidFill>
           <a:ln w="12700">
             <a:solidFill>
-              <a:srgbClr val="FCEBDD"/>
+              <a:srgbClr val="FDF0E3"/>
             </a:solidFill>
             <a:prstDash val="solid"/>
           </a:ln>
@@ -8754,11 +8852,11 @@
             <a:avLst/>
           </a:prstGeom>
           <a:solidFill>
-            <a:srgbClr val="E8772E"/>
+            <a:srgbClr val="EF7D00"/>
           </a:solidFill>
           <a:ln w="12700">
             <a:solidFill>
-              <a:srgbClr val="E8772E"/>
+              <a:srgbClr val="EF7D00"/>
             </a:solidFill>
             <a:prstDash val="solid"/>
           </a:ln>
@@ -8791,11 +8889,11 @@
             <a:r>
               <a:rPr lang="en-US" sz="2000" b="1" dirty="0">
                 <a:solidFill>
-                  <a:srgbClr val="FFFFFF"/>
-                </a:solidFill>
-                <a:latin typeface="Calibri" pitchFamily="34" charset="0"/>
-                <a:ea typeface="Calibri" pitchFamily="34" charset="-122"/>
-                <a:cs typeface="Calibri" pitchFamily="34" charset="-120"/>
+                  <a:srgbClr val="1D1D1B"/>
+                </a:solidFill>
+                <a:latin typeface="Lucida Sans" pitchFamily="34" charset="0"/>
+                <a:ea typeface="Lucida Sans" pitchFamily="34" charset="-122"/>
+                <a:cs typeface="Lucida Sans" pitchFamily="34" charset="-120"/>
               </a:rPr>
               <a:t>!</a:t>
             </a:r>
@@ -8830,11 +8928,11 @@
             <a:r>
               <a:rPr lang="en-US" sz="1500" dirty="0">
                 <a:solidFill>
-                  <a:srgbClr val="0B3C49"/>
-                </a:solidFill>
-                <a:latin typeface="Calibri" pitchFamily="34" charset="0"/>
-                <a:ea typeface="Calibri" pitchFamily="34" charset="-122"/>
-                <a:cs typeface="Calibri" pitchFamily="34" charset="-120"/>
+                  <a:srgbClr val="7A003F"/>
+                </a:solidFill>
+                <a:latin typeface="Lucida Sans" pitchFamily="34" charset="0"/>
+                <a:ea typeface="Lucida Sans" pitchFamily="34" charset="-122"/>
+                <a:cs typeface="Lucida Sans" pitchFamily="34" charset="-120"/>
               </a:rPr>
               <a:t>Tandems: möglichst Grün oder Gelb zusammen mit Rot. Erfahrene erklären – fassen aber nicht an.</a:t>
             </a:r>
@@ -8872,11 +8970,11 @@
             <a:lvl1pPr>
               <a:defRPr sz="1000">
                 <a:solidFill>
-                  <a:srgbClr val="5B6B73"/>
-                </a:solidFill>
-                <a:latin typeface="Calibri"/>
-                <a:ea typeface="Calibri"/>
-                <a:cs typeface="Calibri"/>
+                  <a:srgbClr val="706F6F"/>
+                </a:solidFill>
+                <a:latin typeface="Lucida Sans"/>
+                <a:ea typeface="Lucida Sans"/>
+                <a:cs typeface="Lucida Sans"/>
               </a:defRPr>
             </a:lvl1pPr>
           </a:lstStyle>
@@ -8920,13 +9018,13 @@
           <p:cNvPr id="2" name="Text 1"/>
           <p:cNvSpPr/>
           <p:nvPr>
-            <p:ph idx="101" type="title" hasCustomPrompt="1"/>
+            <p:ph idx="102" type="title" hasCustomPrompt="1"/>
           </p:nvPr>
         </p:nvSpPr>
         <p:spPr>
           <a:xfrm>
-            <a:off x="548640" y="320040"/>
-            <a:ext cx="11094415" cy="777240"/>
+            <a:off x="548640" y="274320"/>
+            <a:ext cx="8351215" cy="896112"/>
           </a:xfrm>
           <a:prstGeom prst="rect">
             <a:avLst/>
@@ -8938,21 +9036,21 @@
           <a:bodyPr wrap="square" lIns="0" tIns="0" rIns="0" bIns="0" rtlCol="0" anchor="ctr"/>
           <a:lstStyle/>
           <a:p>
-            <a:pPr indent="0" marL="0">
-              <a:buNone/>
-            </a:pPr>
-            <a:r>
-              <a:rPr lang="en-US" sz="3200" b="1" dirty="0">
-                <a:solidFill>
-                  <a:srgbClr val="0B3C49"/>
-                </a:solidFill>
-                <a:latin typeface="Cambria" pitchFamily="34" charset="0"/>
-                <a:ea typeface="Cambria" pitchFamily="34" charset="-122"/>
-                <a:cs typeface="Cambria" pitchFamily="34" charset="-120"/>
+            <a:pPr algn="l" indent="0" marL="0">
+              <a:buNone/>
+            </a:pPr>
+            <a:r>
+              <a:rPr lang="en-US" sz="2600" b="1" dirty="0">
+                <a:solidFill>
+                  <a:srgbClr val="7A003F"/>
+                </a:solidFill>
+                <a:latin typeface="Lucida Sans" pitchFamily="34" charset="0"/>
+                <a:ea typeface="Lucida Sans" pitchFamily="34" charset="-122"/>
+                <a:cs typeface="Lucida Sans" pitchFamily="34" charset="-120"/>
               </a:rPr>
               <a:t>Das EVA-Prinzip</a:t>
             </a:r>
-            <a:endParaRPr lang="en-US" sz="3200" dirty="0"/>
+            <a:endParaRPr lang="en-US" sz="2600" dirty="0"/>
           </a:p>
         </p:txBody>
       </p:sp>
@@ -8983,11 +9081,11 @@
             <a:r>
               <a:rPr lang="en-US" sz="1700" dirty="0">
                 <a:solidFill>
-                  <a:srgbClr val="5B6B73"/>
-                </a:solidFill>
-                <a:latin typeface="Calibri" pitchFamily="34" charset="0"/>
-                <a:ea typeface="Calibri" pitchFamily="34" charset="-122"/>
-                <a:cs typeface="Calibri" pitchFamily="34" charset="-120"/>
+                  <a:srgbClr val="706F6F"/>
+                </a:solidFill>
+                <a:latin typeface="Lucida Sans" pitchFamily="34" charset="0"/>
+                <a:ea typeface="Lucida Sans" pitchFamily="34" charset="-122"/>
+                <a:cs typeface="Lucida Sans" pitchFamily="34" charset="-120"/>
               </a:rPr>
               <a:t>Leitfrage: Was muss ein Roboter besitzen, um wahrnehmen, entscheiden und handeln zu können?</a:t>
             </a:r>
@@ -9012,11 +9110,11 @@
             </a:avLst>
           </a:prstGeom>
           <a:solidFill>
-            <a:srgbClr val="2E86AB"/>
+            <a:srgbClr val="706F6F"/>
           </a:solidFill>
           <a:ln w="12700">
             <a:solidFill>
-              <a:srgbClr val="2E86AB"/>
+              <a:srgbClr val="706F6F"/>
             </a:solidFill>
             <a:prstDash val="solid"/>
           </a:ln>
@@ -9047,17 +9145,17 @@
               <a:buNone/>
             </a:pPr>
             <a:r>
-              <a:rPr lang="en-US" sz="2600" b="1" dirty="0">
+              <a:rPr lang="en-US" sz="2400" b="1" dirty="0">
                 <a:solidFill>
                   <a:srgbClr val="FFFFFF"/>
                 </a:solidFill>
-                <a:latin typeface="Cambria" pitchFamily="34" charset="0"/>
-                <a:ea typeface="Cambria" pitchFamily="34" charset="-122"/>
-                <a:cs typeface="Cambria" pitchFamily="34" charset="-120"/>
+                <a:latin typeface="Lucida Sans" pitchFamily="34" charset="0"/>
+                <a:ea typeface="Lucida Sans" pitchFamily="34" charset="-122"/>
+                <a:cs typeface="Lucida Sans" pitchFamily="34" charset="-120"/>
               </a:rPr>
               <a:t>Eingabe</a:t>
             </a:r>
-            <a:endParaRPr lang="en-US" sz="2600" dirty="0"/>
+            <a:endParaRPr lang="en-US" sz="2400" dirty="0"/>
           </a:p>
         </p:txBody>
       </p:sp>
@@ -9086,17 +9184,17 @@
               <a:buNone/>
             </a:pPr>
             <a:r>
-              <a:rPr lang="en-US" sz="1400" b="1" spc="200" kern="0" dirty="0">
+              <a:rPr lang="en-US" sz="1300" b="1" spc="200" kern="0" dirty="0">
                 <a:solidFill>
                   <a:srgbClr val="FFFFFF"/>
                 </a:solidFill>
-                <a:latin typeface="Calibri" pitchFamily="34" charset="0"/>
-                <a:ea typeface="Calibri" pitchFamily="34" charset="-122"/>
-                <a:cs typeface="Calibri" pitchFamily="34" charset="-120"/>
+                <a:latin typeface="Lucida Sans" pitchFamily="34" charset="0"/>
+                <a:ea typeface="Lucida Sans" pitchFamily="34" charset="-122"/>
+                <a:cs typeface="Lucida Sans" pitchFamily="34" charset="-120"/>
               </a:rPr>
               <a:t>WAHRNEHMEN</a:t>
             </a:r>
-            <a:endParaRPr lang="en-US" sz="1400" dirty="0"/>
+            <a:endParaRPr lang="en-US" sz="1300" dirty="0"/>
           </a:p>
         </p:txBody>
       </p:sp>
@@ -9129,9 +9227,9 @@
                 <a:solidFill>
                   <a:srgbClr val="FFFFFF"/>
                 </a:solidFill>
-                <a:latin typeface="Calibri" pitchFamily="34" charset="0"/>
-                <a:ea typeface="Calibri" pitchFamily="34" charset="-122"/>
-                <a:cs typeface="Calibri" pitchFamily="34" charset="-120"/>
+                <a:latin typeface="Lucida Sans" pitchFamily="34" charset="0"/>
+                <a:ea typeface="Lucida Sans" pitchFamily="34" charset="-122"/>
+                <a:cs typeface="Lucida Sans" pitchFamily="34" charset="-120"/>
               </a:rPr>
               <a:t>Sensoren erfassen die Umwelt: Abstand, Helligkeit, Farbe, Geräusch, Neigung, Tastendruck.</a:t>
             </a:r>
@@ -9154,11 +9252,11 @@
             <a:avLst/>
           </a:prstGeom>
           <a:solidFill>
-            <a:srgbClr val="C9DAD8"/>
+            <a:srgbClr val="D9D9D9"/>
           </a:solidFill>
           <a:ln w="12700">
             <a:solidFill>
-              <a:srgbClr val="C9DAD8"/>
+              <a:srgbClr val="D9D9D9"/>
             </a:solidFill>
             <a:prstDash val="solid"/>
           </a:ln>
@@ -9181,11 +9279,11 @@
             </a:avLst>
           </a:prstGeom>
           <a:solidFill>
-            <a:srgbClr val="0B6E69"/>
+            <a:srgbClr val="7A003F"/>
           </a:solidFill>
           <a:ln w="12700">
             <a:solidFill>
-              <a:srgbClr val="0B6E69"/>
+              <a:srgbClr val="7A003F"/>
             </a:solidFill>
             <a:prstDash val="solid"/>
           </a:ln>
@@ -9216,17 +9314,17 @@
               <a:buNone/>
             </a:pPr>
             <a:r>
-              <a:rPr lang="en-US" sz="2600" b="1" dirty="0">
+              <a:rPr lang="en-US" sz="2400" b="1" dirty="0">
                 <a:solidFill>
                   <a:srgbClr val="FFFFFF"/>
                 </a:solidFill>
-                <a:latin typeface="Cambria" pitchFamily="34" charset="0"/>
-                <a:ea typeface="Cambria" pitchFamily="34" charset="-122"/>
-                <a:cs typeface="Cambria" pitchFamily="34" charset="-120"/>
+                <a:latin typeface="Lucida Sans" pitchFamily="34" charset="0"/>
+                <a:ea typeface="Lucida Sans" pitchFamily="34" charset="-122"/>
+                <a:cs typeface="Lucida Sans" pitchFamily="34" charset="-120"/>
               </a:rPr>
               <a:t>Verarbeitung</a:t>
             </a:r>
-            <a:endParaRPr lang="en-US" sz="2600" dirty="0"/>
+            <a:endParaRPr lang="en-US" sz="2400" dirty="0"/>
           </a:p>
         </p:txBody>
       </p:sp>
@@ -9255,17 +9353,17 @@
               <a:buNone/>
             </a:pPr>
             <a:r>
-              <a:rPr lang="en-US" sz="1400" b="1" spc="200" kern="0" dirty="0">
+              <a:rPr lang="en-US" sz="1300" b="1" spc="200" kern="0" dirty="0">
                 <a:solidFill>
                   <a:srgbClr val="FFFFFF"/>
                 </a:solidFill>
-                <a:latin typeface="Calibri" pitchFamily="34" charset="0"/>
-                <a:ea typeface="Calibri" pitchFamily="34" charset="-122"/>
-                <a:cs typeface="Calibri" pitchFamily="34" charset="-120"/>
+                <a:latin typeface="Lucida Sans" pitchFamily="34" charset="0"/>
+                <a:ea typeface="Lucida Sans" pitchFamily="34" charset="-122"/>
+                <a:cs typeface="Lucida Sans" pitchFamily="34" charset="-120"/>
               </a:rPr>
               <a:t>ENTSCHEIDEN</a:t>
             </a:r>
-            <a:endParaRPr lang="en-US" sz="1400" dirty="0"/>
+            <a:endParaRPr lang="en-US" sz="1300" dirty="0"/>
           </a:p>
         </p:txBody>
       </p:sp>
@@ -9298,9 +9396,9 @@
                 <a:solidFill>
                   <a:srgbClr val="FFFFFF"/>
                 </a:solidFill>
-                <a:latin typeface="Calibri" pitchFamily="34" charset="0"/>
-                <a:ea typeface="Calibri" pitchFamily="34" charset="-122"/>
-                <a:cs typeface="Calibri" pitchFamily="34" charset="-120"/>
+                <a:latin typeface="Lucida Sans" pitchFamily="34" charset="0"/>
+                <a:ea typeface="Lucida Sans" pitchFamily="34" charset="-122"/>
+                <a:cs typeface="Lucida Sans" pitchFamily="34" charset="-120"/>
               </a:rPr>
               <a:t>Der CyberPi führt das Programm aus und entscheidet, was passieren soll.</a:t>
             </a:r>
@@ -9323,11 +9421,11 @@
             <a:avLst/>
           </a:prstGeom>
           <a:solidFill>
-            <a:srgbClr val="C9DAD8"/>
+            <a:srgbClr val="D9D9D9"/>
           </a:solidFill>
           <a:ln w="12700">
             <a:solidFill>
-              <a:srgbClr val="C9DAD8"/>
+              <a:srgbClr val="D9D9D9"/>
             </a:solidFill>
             <a:prstDash val="solid"/>
           </a:ln>
@@ -9350,11 +9448,11 @@
             </a:avLst>
           </a:prstGeom>
           <a:solidFill>
-            <a:srgbClr val="E8772E"/>
+            <a:srgbClr val="EF7D00"/>
           </a:solidFill>
           <a:ln w="12700">
             <a:solidFill>
-              <a:srgbClr val="E8772E"/>
+              <a:srgbClr val="EF7D00"/>
             </a:solidFill>
             <a:prstDash val="solid"/>
           </a:ln>
@@ -9385,17 +9483,17 @@
               <a:buNone/>
             </a:pPr>
             <a:r>
-              <a:rPr lang="en-US" sz="2600" b="1" dirty="0">
-                <a:solidFill>
-                  <a:srgbClr val="FFFFFF"/>
-                </a:solidFill>
-                <a:latin typeface="Cambria" pitchFamily="34" charset="0"/>
-                <a:ea typeface="Cambria" pitchFamily="34" charset="-122"/>
-                <a:cs typeface="Cambria" pitchFamily="34" charset="-120"/>
+              <a:rPr lang="en-US" sz="2400" b="1" dirty="0">
+                <a:solidFill>
+                  <a:srgbClr val="1D1D1B"/>
+                </a:solidFill>
+                <a:latin typeface="Lucida Sans" pitchFamily="34" charset="0"/>
+                <a:ea typeface="Lucida Sans" pitchFamily="34" charset="-122"/>
+                <a:cs typeface="Lucida Sans" pitchFamily="34" charset="-120"/>
               </a:rPr>
               <a:t>Ausgabe</a:t>
             </a:r>
-            <a:endParaRPr lang="en-US" sz="2600" dirty="0"/>
+            <a:endParaRPr lang="en-US" sz="2400" dirty="0"/>
           </a:p>
         </p:txBody>
       </p:sp>
@@ -9424,17 +9522,17 @@
               <a:buNone/>
             </a:pPr>
             <a:r>
-              <a:rPr lang="en-US" sz="1400" b="1" spc="200" kern="0" dirty="0">
-                <a:solidFill>
-                  <a:srgbClr val="FFFFFF"/>
-                </a:solidFill>
-                <a:latin typeface="Calibri" pitchFamily="34" charset="0"/>
-                <a:ea typeface="Calibri" pitchFamily="34" charset="-122"/>
-                <a:cs typeface="Calibri" pitchFamily="34" charset="-120"/>
+              <a:rPr lang="en-US" sz="1300" b="1" spc="200" kern="0" dirty="0">
+                <a:solidFill>
+                  <a:srgbClr val="1D1D1B"/>
+                </a:solidFill>
+                <a:latin typeface="Lucida Sans" pitchFamily="34" charset="0"/>
+                <a:ea typeface="Lucida Sans" pitchFamily="34" charset="-122"/>
+                <a:cs typeface="Lucida Sans" pitchFamily="34" charset="-120"/>
               </a:rPr>
               <a:t>HANDELN</a:t>
             </a:r>
-            <a:endParaRPr lang="en-US" sz="1400" dirty="0"/>
+            <a:endParaRPr lang="en-US" sz="1300" dirty="0"/>
           </a:p>
         </p:txBody>
       </p:sp>
@@ -9465,11 +9563,11 @@
             <a:r>
               <a:rPr lang="en-US" sz="1500" dirty="0">
                 <a:solidFill>
-                  <a:srgbClr val="FFFFFF"/>
-                </a:solidFill>
-                <a:latin typeface="Calibri" pitchFamily="34" charset="0"/>
-                <a:ea typeface="Calibri" pitchFamily="34" charset="-122"/>
-                <a:cs typeface="Calibri" pitchFamily="34" charset="-120"/>
+                  <a:srgbClr val="1D1D1B"/>
+                </a:solidFill>
+                <a:latin typeface="Lucida Sans" pitchFamily="34" charset="0"/>
+                <a:ea typeface="Lucida Sans" pitchFamily="34" charset="-122"/>
+                <a:cs typeface="Lucida Sans" pitchFamily="34" charset="-120"/>
               </a:rPr>
               <a:t>Motoren bewegen, LEDs leuchten, Lautsprecher tönen, das Display zeigt an.</a:t>
             </a:r>
@@ -9494,11 +9592,11 @@
             </a:avLst>
           </a:prstGeom>
           <a:solidFill>
-            <a:srgbClr val="FCEBDD"/>
+            <a:srgbClr val="FDF0E3"/>
           </a:solidFill>
           <a:ln w="12700">
             <a:solidFill>
-              <a:srgbClr val="FCEBDD"/>
+              <a:srgbClr val="FDF0E3"/>
             </a:solidFill>
             <a:prstDash val="solid"/>
           </a:ln>
@@ -9519,11 +9617,11 @@
             <a:avLst/>
           </a:prstGeom>
           <a:solidFill>
-            <a:srgbClr val="E8772E"/>
+            <a:srgbClr val="EF7D00"/>
           </a:solidFill>
           <a:ln w="12700">
             <a:solidFill>
-              <a:srgbClr val="E8772E"/>
+              <a:srgbClr val="EF7D00"/>
             </a:solidFill>
             <a:prstDash val="solid"/>
           </a:ln>
@@ -9556,11 +9654,11 @@
             <a:r>
               <a:rPr lang="en-US" sz="2000" b="1" dirty="0">
                 <a:solidFill>
-                  <a:srgbClr val="FFFFFF"/>
-                </a:solidFill>
-                <a:latin typeface="Calibri" pitchFamily="34" charset="0"/>
-                <a:ea typeface="Calibri" pitchFamily="34" charset="-122"/>
-                <a:cs typeface="Calibri" pitchFamily="34" charset="-120"/>
+                  <a:srgbClr val="1D1D1B"/>
+                </a:solidFill>
+                <a:latin typeface="Lucida Sans" pitchFamily="34" charset="0"/>
+                <a:ea typeface="Lucida Sans" pitchFamily="34" charset="-122"/>
+                <a:cs typeface="Lucida Sans" pitchFamily="34" charset="-120"/>
               </a:rPr>
               <a:t>!</a:t>
             </a:r>
@@ -9595,11 +9693,11 @@
             <a:r>
               <a:rPr lang="en-US" sz="1500" dirty="0">
                 <a:solidFill>
-                  <a:srgbClr val="0B3C49"/>
-                </a:solidFill>
-                <a:latin typeface="Calibri" pitchFamily="34" charset="0"/>
-                <a:ea typeface="Calibri" pitchFamily="34" charset="-122"/>
-                <a:cs typeface="Calibri" pitchFamily="34" charset="-120"/>
+                  <a:srgbClr val="7A003F"/>
+                </a:solidFill>
+                <a:latin typeface="Lucida Sans" pitchFamily="34" charset="0"/>
+                <a:ea typeface="Lucida Sans" pitchFamily="34" charset="-122"/>
+                <a:cs typeface="Lucida Sans" pitchFamily="34" charset="-120"/>
               </a:rPr>
               <a:t>Dazu kommen Energie (Akku im Shield) und Struktur/Verbindung (Chassis, Kabel).</a:t>
             </a:r>
@@ -9637,11 +9735,11 @@
             <a:lvl1pPr>
               <a:defRPr sz="1000">
                 <a:solidFill>
-                  <a:srgbClr val="5B6B73"/>
-                </a:solidFill>
-                <a:latin typeface="Calibri"/>
-                <a:ea typeface="Calibri"/>
-                <a:cs typeface="Calibri"/>
+                  <a:srgbClr val="706F6F"/>
+                </a:solidFill>
+                <a:latin typeface="Lucida Sans"/>
+                <a:ea typeface="Lucida Sans"/>
+                <a:cs typeface="Lucida Sans"/>
               </a:defRPr>
             </a:lvl1pPr>
           </a:lstStyle>
@@ -9685,13 +9783,13 @@
           <p:cNvPr id="2" name="Text 1"/>
           <p:cNvSpPr/>
           <p:nvPr>
-            <p:ph idx="101" type="title" hasCustomPrompt="1"/>
+            <p:ph idx="102" type="title" hasCustomPrompt="1"/>
           </p:nvPr>
         </p:nvSpPr>
         <p:spPr>
           <a:xfrm>
-            <a:off x="548640" y="320040"/>
-            <a:ext cx="11094415" cy="777240"/>
+            <a:off x="548640" y="274320"/>
+            <a:ext cx="8351215" cy="896112"/>
           </a:xfrm>
           <a:prstGeom prst="rect">
             <a:avLst/>
@@ -9703,21 +9801,21 @@
           <a:bodyPr wrap="square" lIns="0" tIns="0" rIns="0" bIns="0" rtlCol="0" anchor="ctr"/>
           <a:lstStyle/>
           <a:p>
-            <a:pPr indent="0" marL="0">
-              <a:buNone/>
-            </a:pPr>
-            <a:r>
-              <a:rPr lang="en-US" sz="3200" b="1" dirty="0">
-                <a:solidFill>
-                  <a:srgbClr val="0B3C49"/>
-                </a:solidFill>
-                <a:latin typeface="Cambria" pitchFamily="34" charset="0"/>
-                <a:ea typeface="Cambria" pitchFamily="34" charset="-122"/>
-                <a:cs typeface="Cambria" pitchFamily="34" charset="-120"/>
+            <a:pPr algn="l" indent="0" marL="0">
+              <a:buNone/>
+            </a:pPr>
+            <a:r>
+              <a:rPr lang="en-US" sz="2600" b="1" dirty="0">
+                <a:solidFill>
+                  <a:srgbClr val="7A003F"/>
+                </a:solidFill>
+                <a:latin typeface="Lucida Sans" pitchFamily="34" charset="0"/>
+                <a:ea typeface="Lucida Sans" pitchFamily="34" charset="-122"/>
+                <a:cs typeface="Lucida Sans" pitchFamily="34" charset="-120"/>
               </a:rPr>
               <a:t>Die Bauteile des mBot2</a:t>
             </a:r>
-            <a:endParaRPr lang="en-US" sz="3200" dirty="0"/>
+            <a:endParaRPr lang="en-US" sz="2600" dirty="0"/>
           </a:p>
         </p:txBody>
       </p:sp>
@@ -9748,11 +9846,11 @@
             <a:r>
               <a:rPr lang="en-US" sz="1600" dirty="0">
                 <a:solidFill>
-                  <a:srgbClr val="5B6B73"/>
-                </a:solidFill>
-                <a:latin typeface="Calibri" pitchFamily="34" charset="0"/>
-                <a:ea typeface="Calibri" pitchFamily="34" charset="-122"/>
-                <a:cs typeface="Calibri" pitchFamily="34" charset="-120"/>
+                  <a:srgbClr val="706F6F"/>
+                </a:solidFill>
+                <a:latin typeface="Lucida Sans" pitchFamily="34" charset="0"/>
+                <a:ea typeface="Lucida Sans" pitchFamily="34" charset="-122"/>
+                <a:cs typeface="Lucida Sans" pitchFamily="34" charset="-120"/>
               </a:rPr>
               <a:t>Lösung zu Aufgabe 1 – erst nach der Tandemphase zeigen.</a:t>
             </a:r>
@@ -9777,11 +9875,11 @@
             </a:avLst>
           </a:prstGeom>
           <a:solidFill>
-            <a:srgbClr val="E6F2F1"/>
+            <a:srgbClr val="F2F2F2"/>
           </a:solidFill>
           <a:ln w="12700">
             <a:solidFill>
-              <a:srgbClr val="E6F2F1"/>
+              <a:srgbClr val="F2F2F2"/>
             </a:solidFill>
             <a:prstDash val="solid"/>
           </a:ln>
@@ -9802,11 +9900,11 @@
             <a:avLst/>
           </a:prstGeom>
           <a:solidFill>
-            <a:srgbClr val="0B6E69"/>
+            <a:srgbClr val="7A003F"/>
           </a:solidFill>
           <a:ln w="12700">
             <a:solidFill>
-              <a:srgbClr val="0B6E69"/>
+              <a:srgbClr val="7A003F"/>
             </a:solidFill>
             <a:prstDash val="solid"/>
           </a:ln>
@@ -9841,9 +9939,9 @@
                 <a:solidFill>
                   <a:srgbClr val="FFFFFF"/>
                 </a:solidFill>
-                <a:latin typeface="Calibri" pitchFamily="34" charset="0"/>
-                <a:ea typeface="Calibri" pitchFamily="34" charset="-122"/>
-                <a:cs typeface="Calibri" pitchFamily="34" charset="-120"/>
+                <a:latin typeface="Lucida Sans" pitchFamily="34" charset="0"/>
+                <a:ea typeface="Lucida Sans" pitchFamily="34" charset="-122"/>
+                <a:cs typeface="Lucida Sans" pitchFamily="34" charset="-120"/>
               </a:rPr>
               <a:t>V</a:t>
             </a:r>
@@ -9878,11 +9976,11 @@
             <a:r>
               <a:rPr lang="en-US" sz="1500" b="1" dirty="0">
                 <a:solidFill>
-                  <a:srgbClr val="0B3C49"/>
-                </a:solidFill>
-                <a:latin typeface="Calibri" pitchFamily="34" charset="0"/>
-                <a:ea typeface="Calibri" pitchFamily="34" charset="-122"/>
-                <a:cs typeface="Calibri" pitchFamily="34" charset="-120"/>
+                  <a:srgbClr val="7A003F"/>
+                </a:solidFill>
+                <a:latin typeface="Lucida Sans" pitchFamily="34" charset="0"/>
+                <a:ea typeface="Lucida Sans" pitchFamily="34" charset="-122"/>
+                <a:cs typeface="Lucida Sans" pitchFamily="34" charset="-120"/>
               </a:rPr>
               <a:t>CyberPi</a:t>
             </a:r>
@@ -9917,11 +10015,11 @@
             <a:r>
               <a:rPr lang="en-US" sz="1500" dirty="0">
                 <a:solidFill>
-                  <a:srgbClr val="1F2A30"/>
-                </a:solidFill>
-                <a:latin typeface="Calibri" pitchFamily="34" charset="0"/>
-                <a:ea typeface="Calibri" pitchFamily="34" charset="-122"/>
-                <a:cs typeface="Calibri" pitchFamily="34" charset="-120"/>
+                  <a:srgbClr val="1D1D1B"/>
+                </a:solidFill>
+                <a:latin typeface="Lucida Sans" pitchFamily="34" charset="0"/>
+                <a:ea typeface="Lucida Sans" pitchFamily="34" charset="-122"/>
+                <a:cs typeface="Lucida Sans" pitchFamily="34" charset="-120"/>
               </a:rPr>
               <a:t>führt das Programm aus; enthält zusätzlich Display, LEDs, Lautsprecher, Licht- und Lagesensor, Mikrofon, Tasten</a:t>
             </a:r>
@@ -9946,11 +10044,11 @@
             </a:avLst>
           </a:prstGeom>
           <a:solidFill>
-            <a:srgbClr val="E6F2F1"/>
+            <a:srgbClr val="F2F2F2"/>
           </a:solidFill>
           <a:ln w="12700">
             <a:solidFill>
-              <a:srgbClr val="E6F2F1"/>
+              <a:srgbClr val="F2F2F2"/>
             </a:solidFill>
             <a:prstDash val="solid"/>
           </a:ln>
@@ -9971,11 +10069,11 @@
             <a:avLst/>
           </a:prstGeom>
           <a:solidFill>
-            <a:srgbClr val="2E86AB"/>
+            <a:srgbClr val="706F6F"/>
           </a:solidFill>
           <a:ln w="12700">
             <a:solidFill>
-              <a:srgbClr val="2E86AB"/>
+              <a:srgbClr val="706F6F"/>
             </a:solidFill>
             <a:prstDash val="solid"/>
           </a:ln>
@@ -10010,9 +10108,9 @@
                 <a:solidFill>
                   <a:srgbClr val="FFFFFF"/>
                 </a:solidFill>
-                <a:latin typeface="Calibri" pitchFamily="34" charset="0"/>
-                <a:ea typeface="Calibri" pitchFamily="34" charset="-122"/>
-                <a:cs typeface="Calibri" pitchFamily="34" charset="-120"/>
+                <a:latin typeface="Lucida Sans" pitchFamily="34" charset="0"/>
+                <a:ea typeface="Lucida Sans" pitchFamily="34" charset="-122"/>
+                <a:cs typeface="Lucida Sans" pitchFamily="34" charset="-120"/>
               </a:rPr>
               <a:t>E</a:t>
             </a:r>
@@ -10047,11 +10145,11 @@
             <a:r>
               <a:rPr lang="en-US" sz="1500" b="1" dirty="0">
                 <a:solidFill>
-                  <a:srgbClr val="0B3C49"/>
-                </a:solidFill>
-                <a:latin typeface="Calibri" pitchFamily="34" charset="0"/>
-                <a:ea typeface="Calibri" pitchFamily="34" charset="-122"/>
-                <a:cs typeface="Calibri" pitchFamily="34" charset="-120"/>
+                  <a:srgbClr val="7A003F"/>
+                </a:solidFill>
+                <a:latin typeface="Lucida Sans" pitchFamily="34" charset="0"/>
+                <a:ea typeface="Lucida Sans" pitchFamily="34" charset="-122"/>
+                <a:cs typeface="Lucida Sans" pitchFamily="34" charset="-120"/>
               </a:rPr>
               <a:t>Ultraschallsensor 2</a:t>
             </a:r>
@@ -10086,11 +10184,11 @@
             <a:r>
               <a:rPr lang="en-US" sz="1500" dirty="0">
                 <a:solidFill>
-                  <a:srgbClr val="1F2A30"/>
-                </a:solidFill>
-                <a:latin typeface="Calibri" pitchFamily="34" charset="0"/>
-                <a:ea typeface="Calibri" pitchFamily="34" charset="-122"/>
-                <a:cs typeface="Calibri" pitchFamily="34" charset="-120"/>
+                  <a:srgbClr val="1D1D1B"/>
+                </a:solidFill>
+                <a:latin typeface="Lucida Sans" pitchFamily="34" charset="0"/>
+                <a:ea typeface="Lucida Sans" pitchFamily="34" charset="-122"/>
+                <a:cs typeface="Lucida Sans" pitchFamily="34" charset="-120"/>
               </a:rPr>
               <a:t>misst mit Schallwellen den Abstand zu Hindernissen</a:t>
             </a:r>
@@ -10115,11 +10213,11 @@
             </a:avLst>
           </a:prstGeom>
           <a:solidFill>
-            <a:srgbClr val="E6F2F1"/>
+            <a:srgbClr val="F2F2F2"/>
           </a:solidFill>
           <a:ln w="12700">
             <a:solidFill>
-              <a:srgbClr val="E6F2F1"/>
+              <a:srgbClr val="F2F2F2"/>
             </a:solidFill>
             <a:prstDash val="solid"/>
           </a:ln>
@@ -10140,11 +10238,11 @@
             <a:avLst/>
           </a:prstGeom>
           <a:solidFill>
-            <a:srgbClr val="2E86AB"/>
+            <a:srgbClr val="706F6F"/>
           </a:solidFill>
           <a:ln w="12700">
             <a:solidFill>
-              <a:srgbClr val="2E86AB"/>
+              <a:srgbClr val="706F6F"/>
             </a:solidFill>
             <a:prstDash val="solid"/>
           </a:ln>
@@ -10179,9 +10277,9 @@
                 <a:solidFill>
                   <a:srgbClr val="FFFFFF"/>
                 </a:solidFill>
-                <a:latin typeface="Calibri" pitchFamily="34" charset="0"/>
-                <a:ea typeface="Calibri" pitchFamily="34" charset="-122"/>
-                <a:cs typeface="Calibri" pitchFamily="34" charset="-120"/>
+                <a:latin typeface="Lucida Sans" pitchFamily="34" charset="0"/>
+                <a:ea typeface="Lucida Sans" pitchFamily="34" charset="-122"/>
+                <a:cs typeface="Lucida Sans" pitchFamily="34" charset="-120"/>
               </a:rPr>
               <a:t>E</a:t>
             </a:r>
@@ -10216,11 +10314,11 @@
             <a:r>
               <a:rPr lang="en-US" sz="1500" b="1" dirty="0">
                 <a:solidFill>
-                  <a:srgbClr val="0B3C49"/>
-                </a:solidFill>
-                <a:latin typeface="Calibri" pitchFamily="34" charset="0"/>
-                <a:ea typeface="Calibri" pitchFamily="34" charset="-122"/>
-                <a:cs typeface="Calibri" pitchFamily="34" charset="-120"/>
+                  <a:srgbClr val="7A003F"/>
+                </a:solidFill>
+                <a:latin typeface="Lucida Sans" pitchFamily="34" charset="0"/>
+                <a:ea typeface="Lucida Sans" pitchFamily="34" charset="-122"/>
+                <a:cs typeface="Lucida Sans" pitchFamily="34" charset="-120"/>
               </a:rPr>
               <a:t>Quad-RGB-Sensor</a:t>
             </a:r>
@@ -10255,11 +10353,11 @@
             <a:r>
               <a:rPr lang="en-US" sz="1500" dirty="0">
                 <a:solidFill>
-                  <a:srgbClr val="1F2A30"/>
-                </a:solidFill>
-                <a:latin typeface="Calibri" pitchFamily="34" charset="0"/>
-                <a:ea typeface="Calibri" pitchFamily="34" charset="-122"/>
-                <a:cs typeface="Calibri" pitchFamily="34" charset="-120"/>
+                  <a:srgbClr val="1D1D1B"/>
+                </a:solidFill>
+                <a:latin typeface="Lucida Sans" pitchFamily="34" charset="0"/>
+                <a:ea typeface="Lucida Sans" pitchFamily="34" charset="-122"/>
+                <a:cs typeface="Lucida Sans" pitchFamily="34" charset="-120"/>
               </a:rPr>
               <a:t>vier Einzelsensoren erkennen hell/dunkel und Farben am Boden</a:t>
             </a:r>
@@ -10284,11 +10382,11 @@
             </a:avLst>
           </a:prstGeom>
           <a:solidFill>
-            <a:srgbClr val="E6F2F1"/>
+            <a:srgbClr val="F2F2F2"/>
           </a:solidFill>
           <a:ln w="12700">
             <a:solidFill>
-              <a:srgbClr val="E6F2F1"/>
+              <a:srgbClr val="F2F2F2"/>
             </a:solidFill>
             <a:prstDash val="solid"/>
           </a:ln>
@@ -10309,11 +10407,11 @@
             <a:avLst/>
           </a:prstGeom>
           <a:solidFill>
-            <a:srgbClr val="E8772E"/>
+            <a:srgbClr val="EF7D00"/>
           </a:solidFill>
           <a:ln w="12700">
             <a:solidFill>
-              <a:srgbClr val="E8772E"/>
+              <a:srgbClr val="EF7D00"/>
             </a:solidFill>
             <a:prstDash val="solid"/>
           </a:ln>
@@ -10346,11 +10444,11 @@
             <a:r>
               <a:rPr lang="en-US" sz="1400" b="1" dirty="0">
                 <a:solidFill>
-                  <a:srgbClr val="FFFFFF"/>
-                </a:solidFill>
-                <a:latin typeface="Calibri" pitchFamily="34" charset="0"/>
-                <a:ea typeface="Calibri" pitchFamily="34" charset="-122"/>
-                <a:cs typeface="Calibri" pitchFamily="34" charset="-120"/>
+                  <a:srgbClr val="1D1D1B"/>
+                </a:solidFill>
+                <a:latin typeface="Lucida Sans" pitchFamily="34" charset="0"/>
+                <a:ea typeface="Lucida Sans" pitchFamily="34" charset="-122"/>
+                <a:cs typeface="Lucida Sans" pitchFamily="34" charset="-120"/>
               </a:rPr>
               <a:t>A</a:t>
             </a:r>
@@ -10385,11 +10483,11 @@
             <a:r>
               <a:rPr lang="en-US" sz="1500" b="1" dirty="0">
                 <a:solidFill>
-                  <a:srgbClr val="0B3C49"/>
-                </a:solidFill>
-                <a:latin typeface="Calibri" pitchFamily="34" charset="0"/>
-                <a:ea typeface="Calibri" pitchFamily="34" charset="-122"/>
-                <a:cs typeface="Calibri" pitchFamily="34" charset="-120"/>
+                  <a:srgbClr val="7A003F"/>
+                </a:solidFill>
+                <a:latin typeface="Lucida Sans" pitchFamily="34" charset="0"/>
+                <a:ea typeface="Lucida Sans" pitchFamily="34" charset="-122"/>
+                <a:cs typeface="Lucida Sans" pitchFamily="34" charset="-120"/>
               </a:rPr>
               <a:t>Encoder-Motoren</a:t>
             </a:r>
@@ -10424,11 +10522,11 @@
             <a:r>
               <a:rPr lang="en-US" sz="1500" dirty="0">
                 <a:solidFill>
-                  <a:srgbClr val="1F2A30"/>
-                </a:solidFill>
-                <a:latin typeface="Calibri" pitchFamily="34" charset="0"/>
-                <a:ea typeface="Calibri" pitchFamily="34" charset="-122"/>
-                <a:cs typeface="Calibri" pitchFamily="34" charset="-120"/>
+                  <a:srgbClr val="1D1D1B"/>
+                </a:solidFill>
+                <a:latin typeface="Lucida Sans" pitchFamily="34" charset="0"/>
+                <a:ea typeface="Lucida Sans" pitchFamily="34" charset="-122"/>
+                <a:cs typeface="Lucida Sans" pitchFamily="34" charset="-120"/>
               </a:rPr>
               <a:t>treiben die Räder an; der Encoder misst dabei die Drehung (auch Eingabe!)</a:t>
             </a:r>
@@ -10453,11 +10551,11 @@
             </a:avLst>
           </a:prstGeom>
           <a:solidFill>
-            <a:srgbClr val="E6F2F1"/>
+            <a:srgbClr val="F2F2F2"/>
           </a:solidFill>
           <a:ln w="12700">
             <a:solidFill>
-              <a:srgbClr val="E6F2F1"/>
+              <a:srgbClr val="F2F2F2"/>
             </a:solidFill>
             <a:prstDash val="solid"/>
           </a:ln>
@@ -10478,11 +10576,11 @@
             <a:avLst/>
           </a:prstGeom>
           <a:solidFill>
-            <a:srgbClr val="7A8B91"/>
+            <a:srgbClr val="9D9D9C"/>
           </a:solidFill>
           <a:ln w="12700">
             <a:solidFill>
-              <a:srgbClr val="7A8B91"/>
+              <a:srgbClr val="9D9D9C"/>
             </a:solidFill>
             <a:prstDash val="solid"/>
           </a:ln>
@@ -10517,9 +10615,9 @@
                 <a:solidFill>
                   <a:srgbClr val="FFFFFF"/>
                 </a:solidFill>
-                <a:latin typeface="Calibri" pitchFamily="34" charset="0"/>
-                <a:ea typeface="Calibri" pitchFamily="34" charset="-122"/>
-                <a:cs typeface="Calibri" pitchFamily="34" charset="-120"/>
+                <a:latin typeface="Lucida Sans" pitchFamily="34" charset="0"/>
+                <a:ea typeface="Lucida Sans" pitchFamily="34" charset="-122"/>
+                <a:cs typeface="Lucida Sans" pitchFamily="34" charset="-120"/>
               </a:rPr>
               <a:t>⚡</a:t>
             </a:r>
@@ -10554,11 +10652,11 @@
             <a:r>
               <a:rPr lang="en-US" sz="1500" b="1" dirty="0">
                 <a:solidFill>
-                  <a:srgbClr val="0B3C49"/>
-                </a:solidFill>
-                <a:latin typeface="Calibri" pitchFamily="34" charset="0"/>
-                <a:ea typeface="Calibri" pitchFamily="34" charset="-122"/>
-                <a:cs typeface="Calibri" pitchFamily="34" charset="-120"/>
+                  <a:srgbClr val="7A003F"/>
+                </a:solidFill>
+                <a:latin typeface="Lucida Sans" pitchFamily="34" charset="0"/>
+                <a:ea typeface="Lucida Sans" pitchFamily="34" charset="-122"/>
+                <a:cs typeface="Lucida Sans" pitchFamily="34" charset="-120"/>
               </a:rPr>
               <a:t>mBot2-Shield</a:t>
             </a:r>
@@ -10593,11 +10691,11 @@
             <a:r>
               <a:rPr lang="en-US" sz="1500" dirty="0">
                 <a:solidFill>
-                  <a:srgbClr val="1F2A30"/>
-                </a:solidFill>
-                <a:latin typeface="Calibri" pitchFamily="34" charset="0"/>
-                <a:ea typeface="Calibri" pitchFamily="34" charset="-122"/>
-                <a:cs typeface="Calibri" pitchFamily="34" charset="-120"/>
+                  <a:srgbClr val="1D1D1B"/>
+                </a:solidFill>
+                <a:latin typeface="Lucida Sans" pitchFamily="34" charset="0"/>
+                <a:ea typeface="Lucida Sans" pitchFamily="34" charset="-122"/>
+                <a:cs typeface="Lucida Sans" pitchFamily="34" charset="-120"/>
               </a:rPr>
               <a:t>eingebauter Akku (Laden per USB-C); verbindet CyberPi, Motoren und Sensoren</a:t>
             </a:r>
@@ -10622,11 +10720,11 @@
             </a:avLst>
           </a:prstGeom>
           <a:solidFill>
-            <a:srgbClr val="E6F2F1"/>
+            <a:srgbClr val="F2F2F2"/>
           </a:solidFill>
           <a:ln w="12700">
             <a:solidFill>
-              <a:srgbClr val="E6F2F1"/>
+              <a:srgbClr val="F2F2F2"/>
             </a:solidFill>
             <a:prstDash val="solid"/>
           </a:ln>
@@ -10647,11 +10745,11 @@
             <a:avLst/>
           </a:prstGeom>
           <a:solidFill>
-            <a:srgbClr val="7A8B91"/>
+            <a:srgbClr val="9D9D9C"/>
           </a:solidFill>
           <a:ln w="12700">
             <a:solidFill>
-              <a:srgbClr val="7A8B91"/>
+              <a:srgbClr val="9D9D9C"/>
             </a:solidFill>
             <a:prstDash val="solid"/>
           </a:ln>
@@ -10686,9 +10784,9 @@
                 <a:solidFill>
                   <a:srgbClr val="FFFFFF"/>
                 </a:solidFill>
-                <a:latin typeface="Calibri" pitchFamily="34" charset="0"/>
-                <a:ea typeface="Calibri" pitchFamily="34" charset="-122"/>
-                <a:cs typeface="Calibri" pitchFamily="34" charset="-120"/>
+                <a:latin typeface="Lucida Sans" pitchFamily="34" charset="0"/>
+                <a:ea typeface="Lucida Sans" pitchFamily="34" charset="-122"/>
+                <a:cs typeface="Lucida Sans" pitchFamily="34" charset="-120"/>
               </a:rPr>
               <a:t>S</a:t>
             </a:r>
@@ -10723,11 +10821,11 @@
             <a:r>
               <a:rPr lang="en-US" sz="1500" b="1" dirty="0">
                 <a:solidFill>
-                  <a:srgbClr val="0B3C49"/>
-                </a:solidFill>
-                <a:latin typeface="Calibri" pitchFamily="34" charset="0"/>
-                <a:ea typeface="Calibri" pitchFamily="34" charset="-122"/>
-                <a:cs typeface="Calibri" pitchFamily="34" charset="-120"/>
+                  <a:srgbClr val="7A003F"/>
+                </a:solidFill>
+                <a:latin typeface="Lucida Sans" pitchFamily="34" charset="0"/>
+                <a:ea typeface="Lucida Sans" pitchFamily="34" charset="-122"/>
+                <a:cs typeface="Lucida Sans" pitchFamily="34" charset="-120"/>
               </a:rPr>
               <a:t>Chassis und Kabel</a:t>
             </a:r>
@@ -10762,11 +10860,11 @@
             <a:r>
               <a:rPr lang="en-US" sz="1500" dirty="0">
                 <a:solidFill>
-                  <a:srgbClr val="1F2A30"/>
-                </a:solidFill>
-                <a:latin typeface="Calibri" pitchFamily="34" charset="0"/>
-                <a:ea typeface="Calibri" pitchFamily="34" charset="-122"/>
-                <a:cs typeface="Calibri" pitchFamily="34" charset="-120"/>
+                  <a:srgbClr val="1D1D1B"/>
+                </a:solidFill>
+                <a:latin typeface="Lucida Sans" pitchFamily="34" charset="0"/>
+                <a:ea typeface="Lucida Sans" pitchFamily="34" charset="-122"/>
+                <a:cs typeface="Lucida Sans" pitchFamily="34" charset="-120"/>
               </a:rPr>
               <a:t>Aluminiumrahmen trägt alles; Motor- und mBuild-Kabel übertragen Strom und Signale</a:t>
             </a:r>
@@ -10804,11 +10902,11 @@
             <a:lvl1pPr>
               <a:defRPr sz="1000">
                 <a:solidFill>
-                  <a:srgbClr val="5B6B73"/>
-                </a:solidFill>
-                <a:latin typeface="Calibri"/>
-                <a:ea typeface="Calibri"/>
-                <a:cs typeface="Calibri"/>
+                  <a:srgbClr val="706F6F"/>
+                </a:solidFill>
+                <a:latin typeface="Lucida Sans"/>
+                <a:ea typeface="Lucida Sans"/>
+                <a:cs typeface="Lucida Sans"/>
               </a:defRPr>
             </a:lvl1pPr>
           </a:lstStyle>
@@ -10852,13 +10950,13 @@
           <p:cNvPr id="2" name="Text 1"/>
           <p:cNvSpPr/>
           <p:nvPr>
-            <p:ph idx="101" type="title" hasCustomPrompt="1"/>
+            <p:ph idx="102" type="title" hasCustomPrompt="1"/>
           </p:nvPr>
         </p:nvSpPr>
         <p:spPr>
           <a:xfrm>
-            <a:off x="548640" y="320040"/>
-            <a:ext cx="11094415" cy="777240"/>
+            <a:off x="548640" y="274320"/>
+            <a:ext cx="8351215" cy="896112"/>
           </a:xfrm>
           <a:prstGeom prst="rect">
             <a:avLst/>
@@ -10870,21 +10968,21 @@
           <a:bodyPr wrap="square" lIns="0" tIns="0" rIns="0" bIns="0" rtlCol="0" anchor="ctr"/>
           <a:lstStyle/>
           <a:p>
-            <a:pPr indent="0" marL="0">
-              <a:buNone/>
-            </a:pPr>
-            <a:r>
-              <a:rPr lang="en-US" sz="3200" b="1" dirty="0">
-                <a:solidFill>
-                  <a:srgbClr val="0B3C49"/>
-                </a:solidFill>
-                <a:latin typeface="Cambria" pitchFamily="34" charset="0"/>
-                <a:ea typeface="Cambria" pitchFamily="34" charset="-122"/>
-                <a:cs typeface="Cambria" pitchFamily="34" charset="-120"/>
+            <a:pPr algn="l" indent="0" marL="0">
+              <a:buNone/>
+            </a:pPr>
+            <a:r>
+              <a:rPr lang="en-US" sz="2600" b="1" dirty="0">
+                <a:solidFill>
+                  <a:srgbClr val="7A003F"/>
+                </a:solidFill>
+                <a:latin typeface="Lucida Sans" pitchFamily="34" charset="0"/>
+                <a:ea typeface="Lucida Sans" pitchFamily="34" charset="-122"/>
+                <a:cs typeface="Lucida Sans" pitchFamily="34" charset="-120"/>
               </a:rPr>
               <a:t>Montage im Tandem: Rollen und Regeln</a:t>
             </a:r>
-            <a:endParaRPr lang="en-US" sz="3200" dirty="0"/>
+            <a:endParaRPr lang="en-US" sz="2600" dirty="0"/>
           </a:p>
         </p:txBody>
       </p:sp>
@@ -10905,11 +11003,11 @@
             </a:avLst>
           </a:prstGeom>
           <a:solidFill>
-            <a:srgbClr val="E6F2F1"/>
+            <a:srgbClr val="F2F2F2"/>
           </a:solidFill>
           <a:ln w="12700">
             <a:solidFill>
-              <a:srgbClr val="E6F2F1"/>
+              <a:srgbClr val="F2F2F2"/>
             </a:solidFill>
             <a:prstDash val="solid"/>
           </a:ln>
@@ -10930,11 +11028,11 @@
             <a:avLst/>
           </a:prstGeom>
           <a:solidFill>
-            <a:srgbClr val="0B6E69"/>
+            <a:srgbClr val="7A003F"/>
           </a:solidFill>
           <a:ln w="12700">
             <a:solidFill>
-              <a:srgbClr val="0B6E69"/>
+              <a:srgbClr val="7A003F"/>
             </a:solidFill>
             <a:prstDash val="solid"/>
           </a:ln>
@@ -10969,9 +11067,9 @@
                 <a:solidFill>
                   <a:srgbClr val="FFFFFF"/>
                 </a:solidFill>
-                <a:latin typeface="Calibri" pitchFamily="34" charset="0"/>
-                <a:ea typeface="Calibri" pitchFamily="34" charset="-122"/>
-                <a:cs typeface="Calibri" pitchFamily="34" charset="-120"/>
+                <a:latin typeface="Lucida Sans" pitchFamily="34" charset="0"/>
+                <a:ea typeface="Lucida Sans" pitchFamily="34" charset="-122"/>
+                <a:cs typeface="Lucida Sans" pitchFamily="34" charset="-120"/>
               </a:rPr>
               <a:t>1</a:t>
             </a:r>
@@ -11006,11 +11104,11 @@
             <a:r>
               <a:rPr lang="en-US" sz="1800" b="1" dirty="0">
                 <a:solidFill>
-                  <a:srgbClr val="0B3C49"/>
-                </a:solidFill>
-                <a:latin typeface="Calibri" pitchFamily="34" charset="0"/>
-                <a:ea typeface="Calibri" pitchFamily="34" charset="-122"/>
-                <a:cs typeface="Calibri" pitchFamily="34" charset="-120"/>
+                  <a:srgbClr val="7A003F"/>
+                </a:solidFill>
+                <a:latin typeface="Lucida Sans" pitchFamily="34" charset="0"/>
+                <a:ea typeface="Lucida Sans" pitchFamily="34" charset="-122"/>
+                <a:cs typeface="Lucida Sans" pitchFamily="34" charset="-120"/>
               </a:rPr>
               <a:t>Navigator:in</a:t>
             </a:r>
@@ -11049,11 +11147,11 @@
             <a:r>
               <a:rPr lang="en-US" sz="1700" dirty="0">
                 <a:solidFill>
-                  <a:srgbClr val="1F2A30"/>
-                </a:solidFill>
-                <a:latin typeface="Calibri" pitchFamily="34" charset="0"/>
-                <a:ea typeface="Calibri" pitchFamily="34" charset="-122"/>
-                <a:cs typeface="Calibri" pitchFamily="34" charset="-120"/>
+                  <a:srgbClr val="1D1D1B"/>
+                </a:solidFill>
+                <a:latin typeface="Lucida Sans" pitchFamily="34" charset="0"/>
+                <a:ea typeface="Lucida Sans" pitchFamily="34" charset="-122"/>
+                <a:cs typeface="Lucida Sans" pitchFamily="34" charset="-120"/>
               </a:rPr>
               <a:t>liest jeden Schritt aus der Originalanleitung vor</a:t>
             </a:r>
@@ -11070,11 +11168,11 @@
             <a:r>
               <a:rPr lang="en-US" sz="1700" dirty="0">
                 <a:solidFill>
-                  <a:srgbClr val="1F2A30"/>
-                </a:solidFill>
-                <a:latin typeface="Calibri" pitchFamily="34" charset="0"/>
-                <a:ea typeface="Calibri" pitchFamily="34" charset="-122"/>
-                <a:cs typeface="Calibri" pitchFamily="34" charset="-120"/>
+                  <a:srgbClr val="1D1D1B"/>
+                </a:solidFill>
+                <a:latin typeface="Lucida Sans" pitchFamily="34" charset="0"/>
+                <a:ea typeface="Lucida Sans" pitchFamily="34" charset="-122"/>
+                <a:cs typeface="Lucida Sans" pitchFamily="34" charset="-120"/>
               </a:rPr>
               <a:t>sucht die richtigen Schrauben heraus</a:t>
             </a:r>
@@ -11091,11 +11189,11 @@
             <a:r>
               <a:rPr lang="en-US" sz="1700" dirty="0">
                 <a:solidFill>
-                  <a:srgbClr val="1F2A30"/>
-                </a:solidFill>
-                <a:latin typeface="Calibri" pitchFamily="34" charset="0"/>
-                <a:ea typeface="Calibri" pitchFamily="34" charset="-122"/>
-                <a:cs typeface="Calibri" pitchFamily="34" charset="-120"/>
+                  <a:srgbClr val="1D1D1B"/>
+                </a:solidFill>
+                <a:latin typeface="Lucida Sans" pitchFamily="34" charset="0"/>
+                <a:ea typeface="Lucida Sans" pitchFamily="34" charset="-122"/>
+                <a:cs typeface="Lucida Sans" pitchFamily="34" charset="-120"/>
               </a:rPr>
               <a:t>prüft das Ergebnis</a:t>
             </a:r>
@@ -11120,11 +11218,11 @@
             </a:avLst>
           </a:prstGeom>
           <a:solidFill>
-            <a:srgbClr val="E6F2F1"/>
+            <a:srgbClr val="F2F2F2"/>
           </a:solidFill>
           <a:ln w="12700">
             <a:solidFill>
-              <a:srgbClr val="E6F2F1"/>
+              <a:srgbClr val="F2F2F2"/>
             </a:solidFill>
             <a:prstDash val="solid"/>
           </a:ln>
@@ -11145,11 +11243,11 @@
             <a:avLst/>
           </a:prstGeom>
           <a:solidFill>
-            <a:srgbClr val="0B6E69"/>
+            <a:srgbClr val="7A003F"/>
           </a:solidFill>
           <a:ln w="12700">
             <a:solidFill>
-              <a:srgbClr val="0B6E69"/>
+              <a:srgbClr val="7A003F"/>
             </a:solidFill>
             <a:prstDash val="solid"/>
           </a:ln>
@@ -11184,9 +11282,9 @@
                 <a:solidFill>
                   <a:srgbClr val="FFFFFF"/>
                 </a:solidFill>
-                <a:latin typeface="Calibri" pitchFamily="34" charset="0"/>
-                <a:ea typeface="Calibri" pitchFamily="34" charset="-122"/>
-                <a:cs typeface="Calibri" pitchFamily="34" charset="-120"/>
+                <a:latin typeface="Lucida Sans" pitchFamily="34" charset="0"/>
+                <a:ea typeface="Lucida Sans" pitchFamily="34" charset="-122"/>
+                <a:cs typeface="Lucida Sans" pitchFamily="34" charset="-120"/>
               </a:rPr>
               <a:t>2</a:t>
             </a:r>
@@ -11221,11 +11319,11 @@
             <a:r>
               <a:rPr lang="en-US" sz="1800" b="1" dirty="0">
                 <a:solidFill>
-                  <a:srgbClr val="0B3C49"/>
-                </a:solidFill>
-                <a:latin typeface="Calibri" pitchFamily="34" charset="0"/>
-                <a:ea typeface="Calibri" pitchFamily="34" charset="-122"/>
-                <a:cs typeface="Calibri" pitchFamily="34" charset="-120"/>
+                  <a:srgbClr val="7A003F"/>
+                </a:solidFill>
+                <a:latin typeface="Lucida Sans" pitchFamily="34" charset="0"/>
+                <a:ea typeface="Lucida Sans" pitchFamily="34" charset="-122"/>
+                <a:cs typeface="Lucida Sans" pitchFamily="34" charset="-120"/>
               </a:rPr>
               <a:t>Monteur:in</a:t>
             </a:r>
@@ -11264,11 +11362,11 @@
             <a:r>
               <a:rPr lang="en-US" sz="1700" dirty="0">
                 <a:solidFill>
-                  <a:srgbClr val="1F2A30"/>
-                </a:solidFill>
-                <a:latin typeface="Calibri" pitchFamily="34" charset="0"/>
-                <a:ea typeface="Calibri" pitchFamily="34" charset="-122"/>
-                <a:cs typeface="Calibri" pitchFamily="34" charset="-120"/>
+                  <a:srgbClr val="1D1D1B"/>
+                </a:solidFill>
+                <a:latin typeface="Lucida Sans" pitchFamily="34" charset="0"/>
+                <a:ea typeface="Lucida Sans" pitchFamily="34" charset="-122"/>
+                <a:cs typeface="Lucida Sans" pitchFamily="34" charset="-120"/>
               </a:rPr>
               <a:t>schraubt und steckt</a:t>
             </a:r>
@@ -11285,11 +11383,11 @@
             <a:r>
               <a:rPr lang="en-US" sz="1700" dirty="0">
                 <a:solidFill>
-                  <a:srgbClr val="1F2A30"/>
-                </a:solidFill>
-                <a:latin typeface="Calibri" pitchFamily="34" charset="0"/>
-                <a:ea typeface="Calibri" pitchFamily="34" charset="-122"/>
-                <a:cs typeface="Calibri" pitchFamily="34" charset="-120"/>
+                  <a:srgbClr val="1D1D1B"/>
+                </a:solidFill>
+                <a:latin typeface="Lucida Sans" pitchFamily="34" charset="0"/>
+                <a:ea typeface="Lucida Sans" pitchFamily="34" charset="-122"/>
+                <a:cs typeface="Lucida Sans" pitchFamily="34" charset="-120"/>
               </a:rPr>
               <a:t>baut nur, was vorgelesen wurde</a:t>
             </a:r>
@@ -11306,11 +11404,11 @@
             <a:r>
               <a:rPr lang="en-US" sz="1700" dirty="0">
                 <a:solidFill>
-                  <a:srgbClr val="1F2A30"/>
-                </a:solidFill>
-                <a:latin typeface="Calibri" pitchFamily="34" charset="0"/>
-                <a:ea typeface="Calibri" pitchFamily="34" charset="-122"/>
-                <a:cs typeface="Calibri" pitchFamily="34" charset="-120"/>
+                  <a:srgbClr val="1D1D1B"/>
+                </a:solidFill>
+                <a:latin typeface="Lucida Sans" pitchFamily="34" charset="0"/>
+                <a:ea typeface="Lucida Sans" pitchFamily="34" charset="-122"/>
+                <a:cs typeface="Lucida Sans" pitchFamily="34" charset="-120"/>
               </a:rPr>
               <a:t>Rollenwechsel nach Schritt 5</a:t>
             </a:r>
@@ -11335,11 +11433,11 @@
             </a:avLst>
           </a:prstGeom>
           <a:solidFill>
-            <a:srgbClr val="E6F2F1"/>
+            <a:srgbClr val="F2F2F2"/>
           </a:solidFill>
           <a:ln w="12700">
             <a:solidFill>
-              <a:srgbClr val="E6F2F1"/>
+              <a:srgbClr val="F2F2F2"/>
             </a:solidFill>
             <a:prstDash val="solid"/>
           </a:ln>
@@ -11360,11 +11458,11 @@
             <a:avLst/>
           </a:prstGeom>
           <a:solidFill>
-            <a:srgbClr val="E8772E"/>
+            <a:srgbClr val="EF7D00"/>
           </a:solidFill>
           <a:ln w="12700">
             <a:solidFill>
-              <a:srgbClr val="E8772E"/>
+              <a:srgbClr val="EF7D00"/>
             </a:solidFill>
             <a:prstDash val="solid"/>
           </a:ln>
@@ -11397,11 +11495,11 @@
             <a:r>
               <a:rPr lang="en-US" sz="1600" b="1" dirty="0">
                 <a:solidFill>
-                  <a:srgbClr val="FFFFFF"/>
-                </a:solidFill>
-                <a:latin typeface="Calibri" pitchFamily="34" charset="0"/>
-                <a:ea typeface="Calibri" pitchFamily="34" charset="-122"/>
-                <a:cs typeface="Calibri" pitchFamily="34" charset="-120"/>
+                  <a:srgbClr val="1D1D1B"/>
+                </a:solidFill>
+                <a:latin typeface="Lucida Sans" pitchFamily="34" charset="0"/>
+                <a:ea typeface="Lucida Sans" pitchFamily="34" charset="-122"/>
+                <a:cs typeface="Lucida Sans" pitchFamily="34" charset="-120"/>
               </a:rPr>
               <a:t>3</a:t>
             </a:r>
@@ -11436,11 +11534,11 @@
             <a:r>
               <a:rPr lang="en-US" sz="1800" b="1" dirty="0">
                 <a:solidFill>
-                  <a:srgbClr val="0B3C49"/>
-                </a:solidFill>
-                <a:latin typeface="Calibri" pitchFamily="34" charset="0"/>
-                <a:ea typeface="Calibri" pitchFamily="34" charset="-122"/>
-                <a:cs typeface="Calibri" pitchFamily="34" charset="-120"/>
+                  <a:srgbClr val="7A003F"/>
+                </a:solidFill>
+                <a:latin typeface="Lucida Sans" pitchFamily="34" charset="0"/>
+                <a:ea typeface="Lucida Sans" pitchFamily="34" charset="-122"/>
+                <a:cs typeface="Lucida Sans" pitchFamily="34" charset="-120"/>
               </a:rPr>
               <a:t>Erfahrene</a:t>
             </a:r>
@@ -11479,11 +11577,11 @@
             <a:r>
               <a:rPr lang="en-US" sz="1700" dirty="0">
                 <a:solidFill>
-                  <a:srgbClr val="1F2A30"/>
-                </a:solidFill>
-                <a:latin typeface="Calibri" pitchFamily="34" charset="0"/>
-                <a:ea typeface="Calibri" pitchFamily="34" charset="-122"/>
-                <a:cs typeface="Calibri" pitchFamily="34" charset="-120"/>
+                  <a:srgbClr val="1D1D1B"/>
+                </a:solidFill>
+                <a:latin typeface="Lucida Sans" pitchFamily="34" charset="0"/>
+                <a:ea typeface="Lucida Sans" pitchFamily="34" charset="-122"/>
+                <a:cs typeface="Lucida Sans" pitchFamily="34" charset="-120"/>
               </a:rPr>
               <a:t>erklären durch Fragen und Zeigen</a:t>
             </a:r>
@@ -11500,11 +11598,11 @@
             <a:r>
               <a:rPr lang="en-US" sz="1700" dirty="0">
                 <a:solidFill>
-                  <a:srgbClr val="1F2A30"/>
-                </a:solidFill>
-                <a:latin typeface="Calibri" pitchFamily="34" charset="0"/>
-                <a:ea typeface="Calibri" pitchFamily="34" charset="-122"/>
-                <a:cs typeface="Calibri" pitchFamily="34" charset="-120"/>
+                  <a:srgbClr val="1D1D1B"/>
+                </a:solidFill>
+                <a:latin typeface="Lucida Sans" pitchFamily="34" charset="0"/>
+                <a:ea typeface="Lucida Sans" pitchFamily="34" charset="-122"/>
+                <a:cs typeface="Lucida Sans" pitchFamily="34" charset="-120"/>
               </a:rPr>
               <a:t>fassen nicht an</a:t>
             </a:r>
@@ -11521,11 +11619,11 @@
             <a:r>
               <a:rPr lang="en-US" sz="1700" dirty="0">
                 <a:solidFill>
-                  <a:srgbClr val="1F2A30"/>
-                </a:solidFill>
-                <a:latin typeface="Calibri" pitchFamily="34" charset="0"/>
-                <a:ea typeface="Calibri" pitchFamily="34" charset="-122"/>
-                <a:cs typeface="Calibri" pitchFamily="34" charset="-120"/>
+                  <a:srgbClr val="1D1D1B"/>
+                </a:solidFill>
+                <a:latin typeface="Lucida Sans" pitchFamily="34" charset="0"/>
+                <a:ea typeface="Lucida Sans" pitchFamily="34" charset="-122"/>
+                <a:cs typeface="Lucida Sans" pitchFamily="34" charset="-120"/>
               </a:rPr>
               <a:t>haben Zusatzaufgaben im Arbeitsheft</a:t>
             </a:r>
@@ -11550,11 +11648,11 @@
             </a:avLst>
           </a:prstGeom>
           <a:solidFill>
-            <a:srgbClr val="FCEBDD"/>
+            <a:srgbClr val="FDF0E3"/>
           </a:solidFill>
           <a:ln w="12700">
             <a:solidFill>
-              <a:srgbClr val="FCEBDD"/>
+              <a:srgbClr val="FDF0E3"/>
             </a:solidFill>
             <a:prstDash val="solid"/>
           </a:ln>
@@ -11575,11 +11673,11 @@
             <a:avLst/>
           </a:prstGeom>
           <a:solidFill>
-            <a:srgbClr val="E8772E"/>
+            <a:srgbClr val="EF7D00"/>
           </a:solidFill>
           <a:ln w="12700">
             <a:solidFill>
-              <a:srgbClr val="E8772E"/>
+              <a:srgbClr val="EF7D00"/>
             </a:solidFill>
             <a:prstDash val="solid"/>
           </a:ln>
@@ -11612,11 +11710,11 @@
             <a:r>
               <a:rPr lang="en-US" sz="2000" b="1" dirty="0">
                 <a:solidFill>
-                  <a:srgbClr val="FFFFFF"/>
-                </a:solidFill>
-                <a:latin typeface="Calibri" pitchFamily="34" charset="0"/>
-                <a:ea typeface="Calibri" pitchFamily="34" charset="-122"/>
-                <a:cs typeface="Calibri" pitchFamily="34" charset="-120"/>
+                  <a:srgbClr val="1D1D1B"/>
+                </a:solidFill>
+                <a:latin typeface="Lucida Sans" pitchFamily="34" charset="0"/>
+                <a:ea typeface="Lucida Sans" pitchFamily="34" charset="-122"/>
+                <a:cs typeface="Lucida Sans" pitchFamily="34" charset="-120"/>
               </a:rPr>
               <a:t>!</a:t>
             </a:r>
@@ -11651,11 +11749,11 @@
             <a:r>
               <a:rPr lang="en-US" sz="1500" dirty="0">
                 <a:solidFill>
-                  <a:srgbClr val="0B3C49"/>
-                </a:solidFill>
-                <a:latin typeface="Calibri" pitchFamily="34" charset="0"/>
-                <a:ea typeface="Calibri" pitchFamily="34" charset="-122"/>
-                <a:cs typeface="Calibri" pitchFamily="34" charset="-120"/>
+                  <a:srgbClr val="7A003F"/>
+                </a:solidFill>
+                <a:latin typeface="Lucida Sans" pitchFamily="34" charset="0"/>
+                <a:ea typeface="Lucida Sans" pitchFamily="34" charset="-122"/>
+                <a:cs typeface="Lucida Sans" pitchFamily="34" charset="-120"/>
               </a:rPr>
               <a:t>Schraubendreher-Tipp: Das Bit lässt sich umstecken – Kreuzseite und Sechskantseite. Schrauben vorher nach Größe sortieren.</a:t>
             </a:r>
@@ -11693,11 +11791,11 @@
             <a:lvl1pPr>
               <a:defRPr sz="1000">
                 <a:solidFill>
-                  <a:srgbClr val="5B6B73"/>
-                </a:solidFill>
-                <a:latin typeface="Calibri"/>
-                <a:ea typeface="Calibri"/>
-                <a:cs typeface="Calibri"/>
+                  <a:srgbClr val="706F6F"/>
+                </a:solidFill>
+                <a:latin typeface="Lucida Sans"/>
+                <a:ea typeface="Lucida Sans"/>
+                <a:cs typeface="Lucida Sans"/>
               </a:defRPr>
             </a:lvl1pPr>
           </a:lstStyle>
@@ -11741,13 +11839,13 @@
           <p:cNvPr id="2" name="Text 1"/>
           <p:cNvSpPr/>
           <p:nvPr>
-            <p:ph idx="101" type="title" hasCustomPrompt="1"/>
+            <p:ph idx="102" type="title" hasCustomPrompt="1"/>
           </p:nvPr>
         </p:nvSpPr>
         <p:spPr>
           <a:xfrm>
-            <a:off x="548640" y="320040"/>
-            <a:ext cx="11094415" cy="777240"/>
+            <a:off x="548640" y="274320"/>
+            <a:ext cx="8351215" cy="896112"/>
           </a:xfrm>
           <a:prstGeom prst="rect">
             <a:avLst/>
@@ -11759,21 +11857,21 @@
           <a:bodyPr wrap="square" lIns="0" tIns="0" rIns="0" bIns="0" rtlCol="0" anchor="ctr"/>
           <a:lstStyle/>
           <a:p>
-            <a:pPr indent="0" marL="0">
-              <a:buNone/>
-            </a:pPr>
-            <a:r>
-              <a:rPr lang="en-US" sz="3200" b="1" dirty="0">
-                <a:solidFill>
-                  <a:srgbClr val="0B3C49"/>
-                </a:solidFill>
-                <a:latin typeface="Cambria" pitchFamily="34" charset="0"/>
-                <a:ea typeface="Cambria" pitchFamily="34" charset="-122"/>
-                <a:cs typeface="Cambria" pitchFamily="34" charset="-120"/>
+            <a:pPr algn="l" indent="0" marL="0">
+              <a:buNone/>
+            </a:pPr>
+            <a:r>
+              <a:rPr lang="en-US" sz="2600" b="1" dirty="0">
+                <a:solidFill>
+                  <a:srgbClr val="7A003F"/>
+                </a:solidFill>
+                <a:latin typeface="Lucida Sans" pitchFamily="34" charset="0"/>
+                <a:ea typeface="Lucida Sans" pitchFamily="34" charset="-122"/>
+                <a:cs typeface="Lucida Sans" pitchFamily="34" charset="-120"/>
               </a:rPr>
               <a:t>Die 9 Bauschritte</a:t>
             </a:r>
-            <a:endParaRPr lang="en-US" sz="3200" dirty="0"/>
+            <a:endParaRPr lang="en-US" sz="2600" dirty="0"/>
           </a:p>
         </p:txBody>
       </p:sp>
@@ -11794,11 +11892,11 @@
             </a:avLst>
           </a:prstGeom>
           <a:solidFill>
-            <a:srgbClr val="E6F2F1"/>
+            <a:srgbClr val="F2F2F2"/>
           </a:solidFill>
           <a:ln w="12700">
             <a:solidFill>
-              <a:srgbClr val="E6F2F1"/>
+              <a:srgbClr val="F2F2F2"/>
             </a:solidFill>
             <a:prstDash val="solid"/>
           </a:ln>
@@ -11819,11 +11917,11 @@
             <a:avLst/>
           </a:prstGeom>
           <a:solidFill>
-            <a:srgbClr val="0B6E69"/>
+            <a:srgbClr val="7A003F"/>
           </a:solidFill>
           <a:ln w="12700">
             <a:solidFill>
-              <a:srgbClr val="0B6E69"/>
+              <a:srgbClr val="7A003F"/>
             </a:solidFill>
             <a:prstDash val="solid"/>
           </a:ln>
@@ -11858,9 +11956,9 @@
                 <a:solidFill>
                   <a:srgbClr val="FFFFFF"/>
                 </a:solidFill>
-                <a:latin typeface="Calibri" pitchFamily="34" charset="0"/>
-                <a:ea typeface="Calibri" pitchFamily="34" charset="-122"/>
-                <a:cs typeface="Calibri" pitchFamily="34" charset="-120"/>
+                <a:latin typeface="Lucida Sans" pitchFamily="34" charset="0"/>
+                <a:ea typeface="Lucida Sans" pitchFamily="34" charset="-122"/>
+                <a:cs typeface="Lucida Sans" pitchFamily="34" charset="-120"/>
               </a:rPr>
               <a:t>1</a:t>
             </a:r>
@@ -11895,11 +11993,11 @@
             <a:r>
               <a:rPr lang="en-US" sz="1500" b="1" dirty="0">
                 <a:solidFill>
-                  <a:srgbClr val="0B3C49"/>
-                </a:solidFill>
-                <a:latin typeface="Calibri" pitchFamily="34" charset="0"/>
-                <a:ea typeface="Calibri" pitchFamily="34" charset="-122"/>
-                <a:cs typeface="Calibri" pitchFamily="34" charset="-120"/>
+                  <a:srgbClr val="7A003F"/>
+                </a:solidFill>
+                <a:latin typeface="Lucida Sans" pitchFamily="34" charset="0"/>
+                <a:ea typeface="Lucida Sans" pitchFamily="34" charset="-122"/>
+                <a:cs typeface="Lucida Sans" pitchFamily="34" charset="-120"/>
               </a:rPr>
               <a:t>Räder und Motorkabel</a:t>
             </a:r>
@@ -11934,11 +12032,11 @@
             <a:r>
               <a:rPr lang="en-US" sz="1500" dirty="0">
                 <a:solidFill>
-                  <a:srgbClr val="1F2A30"/>
-                </a:solidFill>
-                <a:latin typeface="Calibri" pitchFamily="34" charset="0"/>
-                <a:ea typeface="Calibri" pitchFamily="34" charset="-122"/>
-                <a:cs typeface="Calibri" pitchFamily="34" charset="-120"/>
+                  <a:srgbClr val="1D1D1B"/>
+                </a:solidFill>
+                <a:latin typeface="Lucida Sans" pitchFamily="34" charset="0"/>
+                <a:ea typeface="Lucida Sans" pitchFamily="34" charset="-122"/>
+                <a:cs typeface="Lucida Sans" pitchFamily="34" charset="-120"/>
               </a:rPr>
               <a:t>Reifen auf die Radnaben, Motorkabel an beide Motoren</a:t>
             </a:r>
@@ -11963,11 +12061,11 @@
             </a:avLst>
           </a:prstGeom>
           <a:solidFill>
-            <a:srgbClr val="E6F2F1"/>
+            <a:srgbClr val="F2F2F2"/>
           </a:solidFill>
           <a:ln w="12700">
             <a:solidFill>
-              <a:srgbClr val="E6F2F1"/>
+              <a:srgbClr val="F2F2F2"/>
             </a:solidFill>
             <a:prstDash val="solid"/>
           </a:ln>
@@ -11988,11 +12086,11 @@
             <a:avLst/>
           </a:prstGeom>
           <a:solidFill>
-            <a:srgbClr val="0B6E69"/>
+            <a:srgbClr val="7A003F"/>
           </a:solidFill>
           <a:ln w="12700">
             <a:solidFill>
-              <a:srgbClr val="0B6E69"/>
+              <a:srgbClr val="7A003F"/>
             </a:solidFill>
             <a:prstDash val="solid"/>
           </a:ln>
@@ -12027,9 +12125,9 @@
                 <a:solidFill>
                   <a:srgbClr val="FFFFFF"/>
                 </a:solidFill>
-                <a:latin typeface="Calibri" pitchFamily="34" charset="0"/>
-                <a:ea typeface="Calibri" pitchFamily="34" charset="-122"/>
-                <a:cs typeface="Calibri" pitchFamily="34" charset="-120"/>
+                <a:latin typeface="Lucida Sans" pitchFamily="34" charset="0"/>
+                <a:ea typeface="Lucida Sans" pitchFamily="34" charset="-122"/>
+                <a:cs typeface="Lucida Sans" pitchFamily="34" charset="-120"/>
               </a:rPr>
               <a:t>2</a:t>
             </a:r>
@@ -12064,11 +12162,11 @@
             <a:r>
               <a:rPr lang="en-US" sz="1500" b="1" dirty="0">
                 <a:solidFill>
-                  <a:srgbClr val="0B3C49"/>
-                </a:solidFill>
-                <a:latin typeface="Calibri" pitchFamily="34" charset="0"/>
-                <a:ea typeface="Calibri" pitchFamily="34" charset="-122"/>
-                <a:cs typeface="Calibri" pitchFamily="34" charset="-120"/>
+                  <a:srgbClr val="7A003F"/>
+                </a:solidFill>
+                <a:latin typeface="Lucida Sans" pitchFamily="34" charset="0"/>
+                <a:ea typeface="Lucida Sans" pitchFamily="34" charset="-122"/>
+                <a:cs typeface="Lucida Sans" pitchFamily="34" charset="-120"/>
               </a:rPr>
               <a:t>Motoren ans Chassis</a:t>
             </a:r>
@@ -12103,11 +12201,11 @@
             <a:r>
               <a:rPr lang="en-US" sz="1500" dirty="0">
                 <a:solidFill>
-                  <a:srgbClr val="1F2A30"/>
-                </a:solidFill>
-                <a:latin typeface="Calibri" pitchFamily="34" charset="0"/>
-                <a:ea typeface="Calibri" pitchFamily="34" charset="-122"/>
-                <a:cs typeface="Calibri" pitchFamily="34" charset="-120"/>
+                  <a:srgbClr val="1D1D1B"/>
+                </a:solidFill>
+                <a:latin typeface="Lucida Sans" pitchFamily="34" charset="0"/>
+                <a:ea typeface="Lucida Sans" pitchFamily="34" charset="-122"/>
+                <a:cs typeface="Lucida Sans" pitchFamily="34" charset="-120"/>
               </a:rPr>
               <a:t>beide Encoder-Motoren festschrauben · M4×8</a:t>
             </a:r>
@@ -12132,11 +12230,11 @@
             </a:avLst>
           </a:prstGeom>
           <a:solidFill>
-            <a:srgbClr val="E6F2F1"/>
+            <a:srgbClr val="F2F2F2"/>
           </a:solidFill>
           <a:ln w="12700">
             <a:solidFill>
-              <a:srgbClr val="E6F2F1"/>
+              <a:srgbClr val="F2F2F2"/>
             </a:solidFill>
             <a:prstDash val="solid"/>
           </a:ln>
@@ -12157,11 +12255,11 @@
             <a:avLst/>
           </a:prstGeom>
           <a:solidFill>
-            <a:srgbClr val="0B6E69"/>
+            <a:srgbClr val="7A003F"/>
           </a:solidFill>
           <a:ln w="12700">
             <a:solidFill>
-              <a:srgbClr val="0B6E69"/>
+              <a:srgbClr val="7A003F"/>
             </a:solidFill>
             <a:prstDash val="solid"/>
           </a:ln>
@@ -12196,9 +12294,9 @@
                 <a:solidFill>
                   <a:srgbClr val="FFFFFF"/>
                 </a:solidFill>
-                <a:latin typeface="Calibri" pitchFamily="34" charset="0"/>
-                <a:ea typeface="Calibri" pitchFamily="34" charset="-122"/>
-                <a:cs typeface="Calibri" pitchFamily="34" charset="-120"/>
+                <a:latin typeface="Lucida Sans" pitchFamily="34" charset="0"/>
+                <a:ea typeface="Lucida Sans" pitchFamily="34" charset="-122"/>
+                <a:cs typeface="Lucida Sans" pitchFamily="34" charset="-120"/>
               </a:rPr>
               <a:t>3</a:t>
             </a:r>
@@ -12233,11 +12331,11 @@
             <a:r>
               <a:rPr lang="en-US" sz="1500" b="1" dirty="0">
                 <a:solidFill>
-                  <a:srgbClr val="0B3C49"/>
-                </a:solidFill>
-                <a:latin typeface="Calibri" pitchFamily="34" charset="0"/>
-                <a:ea typeface="Calibri" pitchFamily="34" charset="-122"/>
-                <a:cs typeface="Calibri" pitchFamily="34" charset="-120"/>
+                  <a:srgbClr val="7A003F"/>
+                </a:solidFill>
+                <a:latin typeface="Lucida Sans" pitchFamily="34" charset="0"/>
+                <a:ea typeface="Lucida Sans" pitchFamily="34" charset="-122"/>
+                <a:cs typeface="Lucida Sans" pitchFamily="34" charset="-120"/>
               </a:rPr>
               <a:t>Räder anbringen</a:t>
             </a:r>
@@ -12272,11 +12370,11 @@
             <a:r>
               <a:rPr lang="en-US" sz="1500" dirty="0">
                 <a:solidFill>
-                  <a:srgbClr val="1F2A30"/>
-                </a:solidFill>
-                <a:latin typeface="Calibri" pitchFamily="34" charset="0"/>
-                <a:ea typeface="Calibri" pitchFamily="34" charset="-122"/>
-                <a:cs typeface="Calibri" pitchFamily="34" charset="-120"/>
+                  <a:srgbClr val="1D1D1B"/>
+                </a:solidFill>
+                <a:latin typeface="Lucida Sans" pitchFamily="34" charset="0"/>
+                <a:ea typeface="Lucida Sans" pitchFamily="34" charset="-122"/>
+                <a:cs typeface="Lucida Sans" pitchFamily="34" charset="-120"/>
               </a:rPr>
               <a:t>Räder auf die Motorachsen · M2,5×12</a:t>
             </a:r>
@@ -12301,11 +12399,11 @@
             </a:avLst>
           </a:prstGeom>
           <a:solidFill>
-            <a:srgbClr val="E6F2F1"/>
+            <a:srgbClr val="F2F2F2"/>
           </a:solidFill>
           <a:ln w="12700">
             <a:solidFill>
-              <a:srgbClr val="E6F2F1"/>
+              <a:srgbClr val="F2F2F2"/>
             </a:solidFill>
             <a:prstDash val="solid"/>
           </a:ln>
@@ -12326,11 +12424,11 @@
             <a:avLst/>
           </a:prstGeom>
           <a:solidFill>
-            <a:srgbClr val="0B6E69"/>
+            <a:srgbClr val="7A003F"/>
           </a:solidFill>
           <a:ln w="12700">
             <a:solidFill>
-              <a:srgbClr val="0B6E69"/>
+              <a:srgbClr val="7A003F"/>
             </a:solidFill>
             <a:prstDash val="solid"/>
           </a:ln>
@@ -12365,9 +12463,9 @@
                 <a:solidFill>
                   <a:srgbClr val="FFFFFF"/>
                 </a:solidFill>
-                <a:latin typeface="Calibri" pitchFamily="34" charset="0"/>
-                <a:ea typeface="Calibri" pitchFamily="34" charset="-122"/>
-                <a:cs typeface="Calibri" pitchFamily="34" charset="-120"/>
+                <a:latin typeface="Lucida Sans" pitchFamily="34" charset="0"/>
+                <a:ea typeface="Lucida Sans" pitchFamily="34" charset="-122"/>
+                <a:cs typeface="Lucida Sans" pitchFamily="34" charset="-120"/>
               </a:rPr>
               <a:t>4</a:t>
             </a:r>
@@ -12402,11 +12500,11 @@
             <a:r>
               <a:rPr lang="en-US" sz="1500" b="1" dirty="0">
                 <a:solidFill>
-                  <a:srgbClr val="0B3C49"/>
-                </a:solidFill>
-                <a:latin typeface="Calibri" pitchFamily="34" charset="0"/>
-                <a:ea typeface="Calibri" pitchFamily="34" charset="-122"/>
-                <a:cs typeface="Calibri" pitchFamily="34" charset="-120"/>
+                  <a:srgbClr val="7A003F"/>
+                </a:solidFill>
+                <a:latin typeface="Lucida Sans" pitchFamily="34" charset="0"/>
+                <a:ea typeface="Lucida Sans" pitchFamily="34" charset="-122"/>
+                <a:cs typeface="Lucida Sans" pitchFamily="34" charset="-120"/>
               </a:rPr>
               <a:t>Stützrad und Quad-RGB</a:t>
             </a:r>
@@ -12441,11 +12539,11 @@
             <a:r>
               <a:rPr lang="en-US" sz="1500" dirty="0">
                 <a:solidFill>
-                  <a:srgbClr val="1F2A30"/>
-                </a:solidFill>
-                <a:latin typeface="Calibri" pitchFamily="34" charset="0"/>
-                <a:ea typeface="Calibri" pitchFamily="34" charset="-122"/>
-                <a:cs typeface="Calibri" pitchFamily="34" charset="-120"/>
+                  <a:srgbClr val="1D1D1B"/>
+                </a:solidFill>
+                <a:latin typeface="Lucida Sans" pitchFamily="34" charset="0"/>
+                <a:ea typeface="Lucida Sans" pitchFamily="34" charset="-122"/>
+                <a:cs typeface="Lucida Sans" pitchFamily="34" charset="-120"/>
               </a:rPr>
               <a:t>Mini-Rad und Quad-RGB-Sensor unten · M4×14</a:t>
             </a:r>
@@ -12470,11 +12568,11 @@
             </a:avLst>
           </a:prstGeom>
           <a:solidFill>
-            <a:srgbClr val="FCEBDD"/>
+            <a:srgbClr val="FDF0E3"/>
           </a:solidFill>
           <a:ln w="12700">
             <a:solidFill>
-              <a:srgbClr val="FCEBDD"/>
+              <a:srgbClr val="FDF0E3"/>
             </a:solidFill>
             <a:prstDash val="solid"/>
           </a:ln>
@@ -12495,11 +12593,11 @@
             <a:avLst/>
           </a:prstGeom>
           <a:solidFill>
-            <a:srgbClr val="E8772E"/>
+            <a:srgbClr val="EF7D00"/>
           </a:solidFill>
           <a:ln w="12700">
             <a:solidFill>
-              <a:srgbClr val="E8772E"/>
+              <a:srgbClr val="EF7D00"/>
             </a:solidFill>
             <a:prstDash val="solid"/>
           </a:ln>
@@ -12532,11 +12630,11 @@
             <a:r>
               <a:rPr lang="en-US" sz="1400" b="1" dirty="0">
                 <a:solidFill>
-                  <a:srgbClr val="FFFFFF"/>
-                </a:solidFill>
-                <a:latin typeface="Calibri" pitchFamily="34" charset="0"/>
-                <a:ea typeface="Calibri" pitchFamily="34" charset="-122"/>
-                <a:cs typeface="Calibri" pitchFamily="34" charset="-120"/>
+                  <a:srgbClr val="1D1D1B"/>
+                </a:solidFill>
+                <a:latin typeface="Lucida Sans" pitchFamily="34" charset="0"/>
+                <a:ea typeface="Lucida Sans" pitchFamily="34" charset="-122"/>
+                <a:cs typeface="Lucida Sans" pitchFamily="34" charset="-120"/>
               </a:rPr>
               <a:t>5</a:t>
             </a:r>
@@ -12571,11 +12669,11 @@
             <a:r>
               <a:rPr lang="en-US" sz="1500" b="1" dirty="0">
                 <a:solidFill>
-                  <a:srgbClr val="0B3C49"/>
-                </a:solidFill>
-                <a:latin typeface="Calibri" pitchFamily="34" charset="0"/>
-                <a:ea typeface="Calibri" pitchFamily="34" charset="-122"/>
-                <a:cs typeface="Calibri" pitchFamily="34" charset="-120"/>
+                  <a:srgbClr val="7A003F"/>
+                </a:solidFill>
+                <a:latin typeface="Lucida Sans" pitchFamily="34" charset="0"/>
+                <a:ea typeface="Lucida Sans" pitchFamily="34" charset="-122"/>
+                <a:cs typeface="Lucida Sans" pitchFamily="34" charset="-120"/>
               </a:rPr>
               <a:t>Quad-RGB verkabeln</a:t>
             </a:r>
@@ -12610,11 +12708,11 @@
             <a:r>
               <a:rPr lang="en-US" sz="1500" dirty="0">
                 <a:solidFill>
-                  <a:srgbClr val="1F2A30"/>
-                </a:solidFill>
-                <a:latin typeface="Calibri" pitchFamily="34" charset="0"/>
-                <a:ea typeface="Calibri" pitchFamily="34" charset="-122"/>
-                <a:cs typeface="Calibri" pitchFamily="34" charset="-120"/>
+                  <a:srgbClr val="1D1D1B"/>
+                </a:solidFill>
+                <a:latin typeface="Lucida Sans" pitchFamily="34" charset="0"/>
+                <a:ea typeface="Lucida Sans" pitchFamily="34" charset="-122"/>
+                <a:cs typeface="Lucida Sans" pitchFamily="34" charset="-120"/>
               </a:rPr>
               <a:t>10-cm-Kabel, nicht 20 cm! → Zwischencheck</a:t>
             </a:r>
@@ -12639,11 +12737,11 @@
             </a:avLst>
           </a:prstGeom>
           <a:solidFill>
-            <a:srgbClr val="E6F2F1"/>
+            <a:srgbClr val="F2F2F2"/>
           </a:solidFill>
           <a:ln w="12700">
             <a:solidFill>
-              <a:srgbClr val="E6F2F1"/>
+              <a:srgbClr val="F2F2F2"/>
             </a:solidFill>
             <a:prstDash val="solid"/>
           </a:ln>
@@ -12664,11 +12762,11 @@
             <a:avLst/>
           </a:prstGeom>
           <a:solidFill>
-            <a:srgbClr val="0B6E69"/>
+            <a:srgbClr val="7A003F"/>
           </a:solidFill>
           <a:ln w="12700">
             <a:solidFill>
-              <a:srgbClr val="0B6E69"/>
+              <a:srgbClr val="7A003F"/>
             </a:solidFill>
             <a:prstDash val="solid"/>
           </a:ln>
@@ -12703,9 +12801,9 @@
                 <a:solidFill>
                   <a:srgbClr val="FFFFFF"/>
                 </a:solidFill>
-                <a:latin typeface="Calibri" pitchFamily="34" charset="0"/>
-                <a:ea typeface="Calibri" pitchFamily="34" charset="-122"/>
-                <a:cs typeface="Calibri" pitchFamily="34" charset="-120"/>
+                <a:latin typeface="Lucida Sans" pitchFamily="34" charset="0"/>
+                <a:ea typeface="Lucida Sans" pitchFamily="34" charset="-122"/>
+                <a:cs typeface="Lucida Sans" pitchFamily="34" charset="-120"/>
               </a:rPr>
               <a:t>6</a:t>
             </a:r>
@@ -12740,11 +12838,11 @@
             <a:r>
               <a:rPr lang="en-US" sz="1500" b="1" dirty="0">
                 <a:solidFill>
-                  <a:srgbClr val="0B3C49"/>
-                </a:solidFill>
-                <a:latin typeface="Calibri" pitchFamily="34" charset="0"/>
-                <a:ea typeface="Calibri" pitchFamily="34" charset="-122"/>
-                <a:cs typeface="Calibri" pitchFamily="34" charset="-120"/>
+                  <a:srgbClr val="7A003F"/>
+                </a:solidFill>
+                <a:latin typeface="Lucida Sans" pitchFamily="34" charset="0"/>
+                <a:ea typeface="Lucida Sans" pitchFamily="34" charset="-122"/>
+                <a:cs typeface="Lucida Sans" pitchFamily="34" charset="-120"/>
               </a:rPr>
               <a:t>Ultraschallsensor 2</a:t>
             </a:r>
@@ -12779,11 +12877,11 @@
             <a:r>
               <a:rPr lang="en-US" sz="1500" dirty="0">
                 <a:solidFill>
-                  <a:srgbClr val="1F2A30"/>
-                </a:solidFill>
-                <a:latin typeface="Calibri" pitchFamily="34" charset="0"/>
-                <a:ea typeface="Calibri" pitchFamily="34" charset="-122"/>
-                <a:cs typeface="Calibri" pitchFamily="34" charset="-120"/>
+                  <a:srgbClr val="1D1D1B"/>
+                </a:solidFill>
+                <a:latin typeface="Lucida Sans" pitchFamily="34" charset="0"/>
+                <a:ea typeface="Lucida Sans" pitchFamily="34" charset="-122"/>
+                <a:cs typeface="Lucida Sans" pitchFamily="34" charset="-120"/>
               </a:rPr>
               <a:t>vorn anbauen, 10-cm-Kabel · M4×14</a:t>
             </a:r>
@@ -12808,11 +12906,11 @@
             </a:avLst>
           </a:prstGeom>
           <a:solidFill>
-            <a:srgbClr val="E6F2F1"/>
+            <a:srgbClr val="F2F2F2"/>
           </a:solidFill>
           <a:ln w="12700">
             <a:solidFill>
-              <a:srgbClr val="E6F2F1"/>
+              <a:srgbClr val="F2F2F2"/>
             </a:solidFill>
             <a:prstDash val="solid"/>
           </a:ln>
@@ -12833,11 +12931,11 @@
             <a:avLst/>
           </a:prstGeom>
           <a:solidFill>
-            <a:srgbClr val="0B6E69"/>
+            <a:srgbClr val="7A003F"/>
           </a:solidFill>
           <a:ln w="12700">
             <a:solidFill>
-              <a:srgbClr val="0B6E69"/>
+              <a:srgbClr val="7A003F"/>
             </a:solidFill>
             <a:prstDash val="solid"/>
           </a:ln>
@@ -12872,9 +12970,9 @@
                 <a:solidFill>
                   <a:srgbClr val="FFFFFF"/>
                 </a:solidFill>
-                <a:latin typeface="Calibri" pitchFamily="34" charset="0"/>
-                <a:ea typeface="Calibri" pitchFamily="34" charset="-122"/>
-                <a:cs typeface="Calibri" pitchFamily="34" charset="-120"/>
+                <a:latin typeface="Lucida Sans" pitchFamily="34" charset="0"/>
+                <a:ea typeface="Lucida Sans" pitchFamily="34" charset="-122"/>
+                <a:cs typeface="Lucida Sans" pitchFamily="34" charset="-120"/>
               </a:rPr>
               <a:t>7</a:t>
             </a:r>
@@ -12909,11 +13007,11 @@
             <a:r>
               <a:rPr lang="en-US" sz="1500" b="1" dirty="0">
                 <a:solidFill>
-                  <a:srgbClr val="0B3C49"/>
-                </a:solidFill>
-                <a:latin typeface="Calibri" pitchFamily="34" charset="0"/>
-                <a:ea typeface="Calibri" pitchFamily="34" charset="-122"/>
-                <a:cs typeface="Calibri" pitchFamily="34" charset="-120"/>
+                  <a:srgbClr val="7A003F"/>
+                </a:solidFill>
+                <a:latin typeface="Lucida Sans" pitchFamily="34" charset="0"/>
+                <a:ea typeface="Lucida Sans" pitchFamily="34" charset="-122"/>
+                <a:cs typeface="Lucida Sans" pitchFamily="34" charset="-120"/>
               </a:rPr>
               <a:t>Shield aufsetzen</a:t>
             </a:r>
@@ -12948,11 +13046,11 @@
             <a:r>
               <a:rPr lang="en-US" sz="1500" dirty="0">
                 <a:solidFill>
-                  <a:srgbClr val="1F2A30"/>
-                </a:solidFill>
-                <a:latin typeface="Calibri" pitchFamily="34" charset="0"/>
-                <a:ea typeface="Calibri" pitchFamily="34" charset="-122"/>
-                <a:cs typeface="Calibri" pitchFamily="34" charset="-120"/>
+                  <a:srgbClr val="1D1D1B"/>
+                </a:solidFill>
+                <a:latin typeface="Lucida Sans" pitchFamily="34" charset="0"/>
+                <a:ea typeface="Lucida Sans" pitchFamily="34" charset="-122"/>
+                <a:cs typeface="Lucida Sans" pitchFamily="34" charset="-120"/>
               </a:rPr>
               <a:t>mBot2-Shield oben festschrauben · M4×25</a:t>
             </a:r>
@@ -12977,11 +13075,11 @@
             </a:avLst>
           </a:prstGeom>
           <a:solidFill>
-            <a:srgbClr val="FCEBDD"/>
+            <a:srgbClr val="FDF0E3"/>
           </a:solidFill>
           <a:ln w="12700">
             <a:solidFill>
-              <a:srgbClr val="FCEBDD"/>
+              <a:srgbClr val="FDF0E3"/>
             </a:solidFill>
             <a:prstDash val="solid"/>
           </a:ln>
@@ -13002,11 +13100,11 @@
             <a:avLst/>
           </a:prstGeom>
           <a:solidFill>
-            <a:srgbClr val="E8772E"/>
+            <a:srgbClr val="EF7D00"/>
           </a:solidFill>
           <a:ln w="12700">
             <a:solidFill>
-              <a:srgbClr val="E8772E"/>
+              <a:srgbClr val="EF7D00"/>
             </a:solidFill>
             <a:prstDash val="solid"/>
           </a:ln>
@@ -13039,11 +13137,11 @@
             <a:r>
               <a:rPr lang="en-US" sz="1400" b="1" dirty="0">
                 <a:solidFill>
-                  <a:srgbClr val="FFFFFF"/>
-                </a:solidFill>
-                <a:latin typeface="Calibri" pitchFamily="34" charset="0"/>
-                <a:ea typeface="Calibri" pitchFamily="34" charset="-122"/>
-                <a:cs typeface="Calibri" pitchFamily="34" charset="-120"/>
+                  <a:srgbClr val="1D1D1B"/>
+                </a:solidFill>
+                <a:latin typeface="Lucida Sans" pitchFamily="34" charset="0"/>
+                <a:ea typeface="Lucida Sans" pitchFamily="34" charset="-122"/>
+                <a:cs typeface="Lucida Sans" pitchFamily="34" charset="-120"/>
               </a:rPr>
               <a:t>8</a:t>
             </a:r>
@@ -13078,11 +13176,11 @@
             <a:r>
               <a:rPr lang="en-US" sz="1500" b="1" dirty="0">
                 <a:solidFill>
-                  <a:srgbClr val="0B3C49"/>
-                </a:solidFill>
-                <a:latin typeface="Calibri" pitchFamily="34" charset="0"/>
-                <a:ea typeface="Calibri" pitchFamily="34" charset="-122"/>
-                <a:cs typeface="Calibri" pitchFamily="34" charset="-120"/>
+                  <a:srgbClr val="7A003F"/>
+                </a:solidFill>
+                <a:latin typeface="Lucida Sans" pitchFamily="34" charset="0"/>
+                <a:ea typeface="Lucida Sans" pitchFamily="34" charset="-122"/>
+                <a:cs typeface="Lucida Sans" pitchFamily="34" charset="-120"/>
               </a:rPr>
               <a:t>Verkabeln</a:t>
             </a:r>
@@ -13117,11 +13215,11 @@
             <a:r>
               <a:rPr lang="en-US" sz="1500" dirty="0">
                 <a:solidFill>
-                  <a:srgbClr val="1F2A30"/>
-                </a:solidFill>
-                <a:latin typeface="Calibri" pitchFamily="34" charset="0"/>
-                <a:ea typeface="Calibri" pitchFamily="34" charset="-122"/>
-                <a:cs typeface="Calibri" pitchFamily="34" charset="-120"/>
+                  <a:srgbClr val="1D1D1B"/>
+                </a:solidFill>
+                <a:latin typeface="Lucida Sans" pitchFamily="34" charset="0"/>
+                <a:ea typeface="Lucida Sans" pitchFamily="34" charset="-122"/>
+                <a:cs typeface="Lucida Sans" pitchFamily="34" charset="-120"/>
               </a:rPr>
               <a:t>linker Motor → EM1, rechter Motor → EM2</a:t>
             </a:r>
@@ -13146,11 +13244,11 @@
             </a:avLst>
           </a:prstGeom>
           <a:solidFill>
-            <a:srgbClr val="E6F2F1"/>
+            <a:srgbClr val="F2F2F2"/>
           </a:solidFill>
           <a:ln w="12700">
             <a:solidFill>
-              <a:srgbClr val="E6F2F1"/>
+              <a:srgbClr val="F2F2F2"/>
             </a:solidFill>
             <a:prstDash val="solid"/>
           </a:ln>
@@ -13171,11 +13269,11 @@
             <a:avLst/>
           </a:prstGeom>
           <a:solidFill>
-            <a:srgbClr val="0B6E69"/>
+            <a:srgbClr val="7A003F"/>
           </a:solidFill>
           <a:ln w="12700">
             <a:solidFill>
-              <a:srgbClr val="0B6E69"/>
+              <a:srgbClr val="7A003F"/>
             </a:solidFill>
             <a:prstDash val="solid"/>
           </a:ln>
@@ -13210,9 +13308,9 @@
                 <a:solidFill>
                   <a:srgbClr val="FFFFFF"/>
                 </a:solidFill>
-                <a:latin typeface="Calibri" pitchFamily="34" charset="0"/>
-                <a:ea typeface="Calibri" pitchFamily="34" charset="-122"/>
-                <a:cs typeface="Calibri" pitchFamily="34" charset="-120"/>
+                <a:latin typeface="Lucida Sans" pitchFamily="34" charset="0"/>
+                <a:ea typeface="Lucida Sans" pitchFamily="34" charset="-122"/>
+                <a:cs typeface="Lucida Sans" pitchFamily="34" charset="-120"/>
               </a:rPr>
               <a:t>9</a:t>
             </a:r>
@@ -13247,11 +13345,11 @@
             <a:r>
               <a:rPr lang="en-US" sz="1500" b="1" dirty="0">
                 <a:solidFill>
-                  <a:srgbClr val="0B3C49"/>
-                </a:solidFill>
-                <a:latin typeface="Calibri" pitchFamily="34" charset="0"/>
-                <a:ea typeface="Calibri" pitchFamily="34" charset="-122"/>
-                <a:cs typeface="Calibri" pitchFamily="34" charset="-120"/>
+                  <a:srgbClr val="7A003F"/>
+                </a:solidFill>
+                <a:latin typeface="Lucida Sans" pitchFamily="34" charset="0"/>
+                <a:ea typeface="Lucida Sans" pitchFamily="34" charset="-122"/>
+                <a:cs typeface="Lucida Sans" pitchFamily="34" charset="-120"/>
               </a:rPr>
               <a:t>CyberPi aufstecken</a:t>
             </a:r>
@@ -13286,11 +13384,11 @@
             <a:r>
               <a:rPr lang="en-US" sz="1500" dirty="0">
                 <a:solidFill>
-                  <a:srgbClr val="1F2A30"/>
-                </a:solidFill>
-                <a:latin typeface="Calibri" pitchFamily="34" charset="0"/>
-                <a:ea typeface="Calibri" pitchFamily="34" charset="-122"/>
-                <a:cs typeface="Calibri" pitchFamily="34" charset="-120"/>
+                  <a:srgbClr val="1D1D1B"/>
+                </a:solidFill>
+                <a:latin typeface="Lucida Sans" pitchFamily="34" charset="0"/>
+                <a:ea typeface="Lucida Sans" pitchFamily="34" charset="-122"/>
+                <a:cs typeface="Lucida Sans" pitchFamily="34" charset="-120"/>
               </a:rPr>
               <a:t>Funktionsprüfung: Display leuchtet, Räder drehen frei</a:t>
             </a:r>
@@ -13328,11 +13426,11 @@
             <a:lvl1pPr>
               <a:defRPr sz="1000">
                 <a:solidFill>
-                  <a:srgbClr val="5B6B73"/>
-                </a:solidFill>
-                <a:latin typeface="Calibri"/>
-                <a:ea typeface="Calibri"/>
-                <a:cs typeface="Calibri"/>
+                  <a:srgbClr val="706F6F"/>
+                </a:solidFill>
+                <a:latin typeface="Lucida Sans"/>
+                <a:ea typeface="Lucida Sans"/>
+                <a:cs typeface="Lucida Sans"/>
               </a:defRPr>
             </a:lvl1pPr>
           </a:lstStyle>
@@ -13376,13 +13474,13 @@
           <p:cNvPr id="2" name="Text 1"/>
           <p:cNvSpPr/>
           <p:nvPr>
-            <p:ph idx="101" type="title" hasCustomPrompt="1"/>
+            <p:ph idx="102" type="title" hasCustomPrompt="1"/>
           </p:nvPr>
         </p:nvSpPr>
         <p:spPr>
           <a:xfrm>
-            <a:off x="548640" y="320040"/>
-            <a:ext cx="11094415" cy="777240"/>
+            <a:off x="548640" y="274320"/>
+            <a:ext cx="8351215" cy="896112"/>
           </a:xfrm>
           <a:prstGeom prst="rect">
             <a:avLst/>
@@ -13394,21 +13492,21 @@
           <a:bodyPr wrap="square" lIns="0" tIns="0" rIns="0" bIns="0" rtlCol="0" anchor="ctr"/>
           <a:lstStyle/>
           <a:p>
-            <a:pPr indent="0" marL="0">
-              <a:buNone/>
-            </a:pPr>
-            <a:r>
-              <a:rPr lang="en-US" sz="3200" b="1" dirty="0">
-                <a:solidFill>
-                  <a:srgbClr val="0B3C49"/>
-                </a:solidFill>
-                <a:latin typeface="Cambria" pitchFamily="34" charset="0"/>
-                <a:ea typeface="Cambria" pitchFamily="34" charset="-122"/>
-                <a:cs typeface="Cambria" pitchFamily="34" charset="-120"/>
+            <a:pPr algn="l" indent="0" marL="0">
+              <a:buNone/>
+            </a:pPr>
+            <a:r>
+              <a:rPr lang="en-US" sz="2600" b="1" dirty="0">
+                <a:solidFill>
+                  <a:srgbClr val="7A003F"/>
+                </a:solidFill>
+                <a:latin typeface="Lucida Sans" pitchFamily="34" charset="0"/>
+                <a:ea typeface="Lucida Sans" pitchFamily="34" charset="-122"/>
+                <a:cs typeface="Lucida Sans" pitchFamily="34" charset="-120"/>
               </a:rPr>
               <a:t>Den mBot2 mit Open Roberta verbinden</a:t>
             </a:r>
-            <a:endParaRPr lang="en-US" sz="3200" dirty="0"/>
+            <a:endParaRPr lang="en-US" sz="2600" dirty="0"/>
           </a:p>
         </p:txBody>
       </p:sp>
@@ -13429,11 +13527,11 @@
             </a:avLst>
           </a:prstGeom>
           <a:solidFill>
-            <a:srgbClr val="E6F2F1"/>
+            <a:srgbClr val="F2F2F2"/>
           </a:solidFill>
           <a:ln w="12700">
             <a:solidFill>
-              <a:srgbClr val="E6F2F1"/>
+              <a:srgbClr val="F2F2F2"/>
             </a:solidFill>
             <a:prstDash val="solid"/>
           </a:ln>
@@ -13454,11 +13552,11 @@
             <a:avLst/>
           </a:prstGeom>
           <a:solidFill>
-            <a:srgbClr val="0B6E69"/>
+            <a:srgbClr val="7A003F"/>
           </a:solidFill>
           <a:ln w="12700">
             <a:solidFill>
-              <a:srgbClr val="0B6E69"/>
+              <a:srgbClr val="7A003F"/>
             </a:solidFill>
             <a:prstDash val="solid"/>
           </a:ln>
@@ -13493,9 +13591,9 @@
                 <a:solidFill>
                   <a:srgbClr val="FFFFFF"/>
                 </a:solidFill>
-                <a:latin typeface="Calibri" pitchFamily="34" charset="0"/>
-                <a:ea typeface="Calibri" pitchFamily="34" charset="-122"/>
-                <a:cs typeface="Calibri" pitchFamily="34" charset="-120"/>
+                <a:latin typeface="Lucida Sans" pitchFamily="34" charset="0"/>
+                <a:ea typeface="Lucida Sans" pitchFamily="34" charset="-122"/>
+                <a:cs typeface="Lucida Sans" pitchFamily="34" charset="-120"/>
               </a:rPr>
               <a:t>1</a:t>
             </a:r>
@@ -13530,11 +13628,11 @@
             <a:r>
               <a:rPr lang="en-US" sz="1500" b="1" dirty="0">
                 <a:solidFill>
-                  <a:srgbClr val="0B3C49"/>
-                </a:solidFill>
-                <a:latin typeface="Calibri" pitchFamily="34" charset="0"/>
-                <a:ea typeface="Calibri" pitchFamily="34" charset="-122"/>
-                <a:cs typeface="Calibri" pitchFamily="34" charset="-120"/>
+                  <a:srgbClr val="7A003F"/>
+                </a:solidFill>
+                <a:latin typeface="Lucida Sans" pitchFamily="34" charset="0"/>
+                <a:ea typeface="Lucida Sans" pitchFamily="34" charset="-122"/>
+                <a:cs typeface="Lucida Sans" pitchFamily="34" charset="-120"/>
               </a:rPr>
               <a:t>Einschalten, anschließen</a:t>
             </a:r>
@@ -13569,11 +13667,11 @@
             <a:r>
               <a:rPr lang="en-US" sz="1500" dirty="0">
                 <a:solidFill>
-                  <a:srgbClr val="1F2A30"/>
-                </a:solidFill>
-                <a:latin typeface="Calibri" pitchFamily="34" charset="0"/>
-                <a:ea typeface="Calibri" pitchFamily="34" charset="-122"/>
-                <a:cs typeface="Calibri" pitchFamily="34" charset="-120"/>
+                  <a:srgbClr val="1D1D1B"/>
+                </a:solidFill>
+                <a:latin typeface="Lucida Sans" pitchFamily="34" charset="0"/>
+                <a:ea typeface="Lucida Sans" pitchFamily="34" charset="-122"/>
+                <a:cs typeface="Lucida Sans" pitchFamily="34" charset="-120"/>
               </a:rPr>
               <a:t>Schalter am Shield; USB-C-Datenkabel an den Laptop</a:t>
             </a:r>
@@ -13598,11 +13696,11 @@
             </a:avLst>
           </a:prstGeom>
           <a:solidFill>
-            <a:srgbClr val="E6F2F1"/>
+            <a:srgbClr val="F2F2F2"/>
           </a:solidFill>
           <a:ln w="12700">
             <a:solidFill>
-              <a:srgbClr val="E6F2F1"/>
+              <a:srgbClr val="F2F2F2"/>
             </a:solidFill>
             <a:prstDash val="solid"/>
           </a:ln>
@@ -13623,11 +13721,11 @@
             <a:avLst/>
           </a:prstGeom>
           <a:solidFill>
-            <a:srgbClr val="0B6E69"/>
+            <a:srgbClr val="7A003F"/>
           </a:solidFill>
           <a:ln w="12700">
             <a:solidFill>
-              <a:srgbClr val="0B6E69"/>
+              <a:srgbClr val="7A003F"/>
             </a:solidFill>
             <a:prstDash val="solid"/>
           </a:ln>
@@ -13662,9 +13760,9 @@
                 <a:solidFill>
                   <a:srgbClr val="FFFFFF"/>
                 </a:solidFill>
-                <a:latin typeface="Calibri" pitchFamily="34" charset="0"/>
-                <a:ea typeface="Calibri" pitchFamily="34" charset="-122"/>
-                <a:cs typeface="Calibri" pitchFamily="34" charset="-120"/>
+                <a:latin typeface="Lucida Sans" pitchFamily="34" charset="0"/>
+                <a:ea typeface="Lucida Sans" pitchFamily="34" charset="-122"/>
+                <a:cs typeface="Lucida Sans" pitchFamily="34" charset="-120"/>
               </a:rPr>
               <a:t>2</a:t>
             </a:r>
@@ -13699,11 +13797,11 @@
             <a:r>
               <a:rPr lang="en-US" sz="1500" b="1" dirty="0">
                 <a:solidFill>
-                  <a:srgbClr val="0B3C49"/>
-                </a:solidFill>
-                <a:latin typeface="Calibri" pitchFamily="34" charset="0"/>
-                <a:ea typeface="Calibri" pitchFamily="34" charset="-122"/>
-                <a:cs typeface="Calibri" pitchFamily="34" charset="-120"/>
+                  <a:srgbClr val="7A003F"/>
+                </a:solidFill>
+                <a:latin typeface="Lucida Sans" pitchFamily="34" charset="0"/>
+                <a:ea typeface="Lucida Sans" pitchFamily="34" charset="-122"/>
+                <a:cs typeface="Lucida Sans" pitchFamily="34" charset="-120"/>
               </a:rPr>
               <a:t>Connector starten</a:t>
             </a:r>
@@ -13738,11 +13836,11 @@
             <a:r>
               <a:rPr lang="en-US" sz="1500" dirty="0">
                 <a:solidFill>
-                  <a:srgbClr val="1F2A30"/>
-                </a:solidFill>
-                <a:latin typeface="Calibri" pitchFamily="34" charset="0"/>
-                <a:ea typeface="Calibri" pitchFamily="34" charset="-122"/>
-                <a:cs typeface="Calibri" pitchFamily="34" charset="-120"/>
+                  <a:srgbClr val="1D1D1B"/>
+                </a:solidFill>
+                <a:latin typeface="Lucida Sans" pitchFamily="34" charset="0"/>
+                <a:ea typeface="Lucida Sans" pitchFamily="34" charset="-122"/>
+                <a:cs typeface="Lucida Sans" pitchFamily="34" charset="-120"/>
               </a:rPr>
               <a:t>Open Roberta Connector findet den mBot2</a:t>
             </a:r>
@@ -13767,11 +13865,11 @@
             </a:avLst>
           </a:prstGeom>
           <a:solidFill>
-            <a:srgbClr val="E6F2F1"/>
+            <a:srgbClr val="F2F2F2"/>
           </a:solidFill>
           <a:ln w="12700">
             <a:solidFill>
-              <a:srgbClr val="E6F2F1"/>
+              <a:srgbClr val="F2F2F2"/>
             </a:solidFill>
             <a:prstDash val="solid"/>
           </a:ln>
@@ -13792,11 +13890,11 @@
             <a:avLst/>
           </a:prstGeom>
           <a:solidFill>
-            <a:srgbClr val="0B6E69"/>
+            <a:srgbClr val="7A003F"/>
           </a:solidFill>
           <a:ln w="12700">
             <a:solidFill>
-              <a:srgbClr val="0B6E69"/>
+              <a:srgbClr val="7A003F"/>
             </a:solidFill>
             <a:prstDash val="solid"/>
           </a:ln>
@@ -13831,9 +13929,9 @@
                 <a:solidFill>
                   <a:srgbClr val="FFFFFF"/>
                 </a:solidFill>
-                <a:latin typeface="Calibri" pitchFamily="34" charset="0"/>
-                <a:ea typeface="Calibri" pitchFamily="34" charset="-122"/>
-                <a:cs typeface="Calibri" pitchFamily="34" charset="-120"/>
+                <a:latin typeface="Lucida Sans" pitchFamily="34" charset="0"/>
+                <a:ea typeface="Lucida Sans" pitchFamily="34" charset="-122"/>
+                <a:cs typeface="Lucida Sans" pitchFamily="34" charset="-120"/>
               </a:rPr>
               <a:t>3</a:t>
             </a:r>
@@ -13868,11 +13966,11 @@
             <a:r>
               <a:rPr lang="en-US" sz="1500" b="1" dirty="0">
                 <a:solidFill>
-                  <a:srgbClr val="0B3C49"/>
-                </a:solidFill>
-                <a:latin typeface="Calibri" pitchFamily="34" charset="0"/>
-                <a:ea typeface="Calibri" pitchFamily="34" charset="-122"/>
-                <a:cs typeface="Calibri" pitchFamily="34" charset="-120"/>
+                  <a:srgbClr val="7A003F"/>
+                </a:solidFill>
+                <a:latin typeface="Lucida Sans" pitchFamily="34" charset="0"/>
+                <a:ea typeface="Lucida Sans" pitchFamily="34" charset="-122"/>
+                <a:cs typeface="Lucida Sans" pitchFamily="34" charset="-120"/>
               </a:rPr>
               <a:t>Verbinden → Token</a:t>
             </a:r>
@@ -13907,11 +14005,11 @@
             <a:r>
               <a:rPr lang="en-US" sz="1500" dirty="0">
                 <a:solidFill>
-                  <a:srgbClr val="1F2A30"/>
-                </a:solidFill>
-                <a:latin typeface="Calibri" pitchFamily="34" charset="0"/>
-                <a:ea typeface="Calibri" pitchFamily="34" charset="-122"/>
-                <a:cs typeface="Calibri" pitchFamily="34" charset="-120"/>
+                  <a:srgbClr val="1D1D1B"/>
+                </a:solidFill>
+                <a:latin typeface="Lucida Sans" pitchFamily="34" charset="0"/>
+                <a:ea typeface="Lucida Sans" pitchFamily="34" charset="-122"/>
+                <a:cs typeface="Lucida Sans" pitchFamily="34" charset="-120"/>
               </a:rPr>
               <a:t>Der Connector zeigt einen Token (z. B. 7GH2KQ9X)</a:t>
             </a:r>
@@ -13936,11 +14034,11 @@
             </a:avLst>
           </a:prstGeom>
           <a:solidFill>
-            <a:srgbClr val="E6F2F1"/>
+            <a:srgbClr val="F2F2F2"/>
           </a:solidFill>
           <a:ln w="12700">
             <a:solidFill>
-              <a:srgbClr val="E6F2F1"/>
+              <a:srgbClr val="F2F2F2"/>
             </a:solidFill>
             <a:prstDash val="solid"/>
           </a:ln>
@@ -13961,11 +14059,11 @@
             <a:avLst/>
           </a:prstGeom>
           <a:solidFill>
-            <a:srgbClr val="0B6E69"/>
+            <a:srgbClr val="7A003F"/>
           </a:solidFill>
           <a:ln w="12700">
             <a:solidFill>
-              <a:srgbClr val="0B6E69"/>
+              <a:srgbClr val="7A003F"/>
             </a:solidFill>
             <a:prstDash val="solid"/>
           </a:ln>
@@ -14000,9 +14098,9 @@
                 <a:solidFill>
                   <a:srgbClr val="FFFFFF"/>
                 </a:solidFill>
-                <a:latin typeface="Calibri" pitchFamily="34" charset="0"/>
-                <a:ea typeface="Calibri" pitchFamily="34" charset="-122"/>
-                <a:cs typeface="Calibri" pitchFamily="34" charset="-120"/>
+                <a:latin typeface="Lucida Sans" pitchFamily="34" charset="0"/>
+                <a:ea typeface="Lucida Sans" pitchFamily="34" charset="-122"/>
+                <a:cs typeface="Lucida Sans" pitchFamily="34" charset="-120"/>
               </a:rPr>
               <a:t>4</a:t>
             </a:r>
@@ -14037,11 +14135,11 @@
             <a:r>
               <a:rPr lang="en-US" sz="1500" b="1" dirty="0">
                 <a:solidFill>
-                  <a:srgbClr val="0B3C49"/>
-                </a:solidFill>
-                <a:latin typeface="Calibri" pitchFamily="34" charset="0"/>
-                <a:ea typeface="Calibri" pitchFamily="34" charset="-122"/>
-                <a:cs typeface="Calibri" pitchFamily="34" charset="-120"/>
+                  <a:srgbClr val="7A003F"/>
+                </a:solidFill>
+                <a:latin typeface="Lucida Sans" pitchFamily="34" charset="0"/>
+                <a:ea typeface="Lucida Sans" pitchFamily="34" charset="-122"/>
+                <a:cs typeface="Lucida Sans" pitchFamily="34" charset="-120"/>
               </a:rPr>
               <a:t>Lab öffnen</a:t>
             </a:r>
@@ -14076,11 +14174,11 @@
             <a:r>
               <a:rPr lang="en-US" sz="1500" dirty="0">
                 <a:solidFill>
-                  <a:srgbClr val="1F2A30"/>
-                </a:solidFill>
-                <a:latin typeface="Calibri" pitchFamily="34" charset="0"/>
-                <a:ea typeface="Calibri" pitchFamily="34" charset="-122"/>
-                <a:cs typeface="Calibri" pitchFamily="34" charset="-120"/>
+                  <a:srgbClr val="1D1D1B"/>
+                </a:solidFill>
+                <a:latin typeface="Lucida Sans" pitchFamily="34" charset="0"/>
+                <a:ea typeface="Lucida Sans" pitchFamily="34" charset="-122"/>
+                <a:cs typeface="Lucida Sans" pitchFamily="34" charset="-120"/>
               </a:rPr>
               <a:t>lab.open-roberta.org → System „mBot 2“ wählen</a:t>
             </a:r>
@@ -14105,11 +14203,11 @@
             </a:avLst>
           </a:prstGeom>
           <a:solidFill>
-            <a:srgbClr val="E6F2F1"/>
+            <a:srgbClr val="F2F2F2"/>
           </a:solidFill>
           <a:ln w="12700">
             <a:solidFill>
-              <a:srgbClr val="E6F2F1"/>
+              <a:srgbClr val="F2F2F2"/>
             </a:solidFill>
             <a:prstDash val="solid"/>
           </a:ln>
@@ -14130,11 +14228,11 @@
             <a:avLst/>
           </a:prstGeom>
           <a:solidFill>
-            <a:srgbClr val="0B6E69"/>
+            <a:srgbClr val="7A003F"/>
           </a:solidFill>
           <a:ln w="12700">
             <a:solidFill>
-              <a:srgbClr val="0B6E69"/>
+              <a:srgbClr val="7A003F"/>
             </a:solidFill>
             <a:prstDash val="solid"/>
           </a:ln>
@@ -14169,9 +14267,9 @@
                 <a:solidFill>
                   <a:srgbClr val="FFFFFF"/>
                 </a:solidFill>
-                <a:latin typeface="Calibri" pitchFamily="34" charset="0"/>
-                <a:ea typeface="Calibri" pitchFamily="34" charset="-122"/>
-                <a:cs typeface="Calibri" pitchFamily="34" charset="-120"/>
+                <a:latin typeface="Lucida Sans" pitchFamily="34" charset="0"/>
+                <a:ea typeface="Lucida Sans" pitchFamily="34" charset="-122"/>
+                <a:cs typeface="Lucida Sans" pitchFamily="34" charset="-120"/>
               </a:rPr>
               <a:t>5</a:t>
             </a:r>
@@ -14206,11 +14304,11 @@
             <a:r>
               <a:rPr lang="en-US" sz="1500" b="1" dirty="0">
                 <a:solidFill>
-                  <a:srgbClr val="0B3C49"/>
-                </a:solidFill>
-                <a:latin typeface="Calibri" pitchFamily="34" charset="0"/>
-                <a:ea typeface="Calibri" pitchFamily="34" charset="-122"/>
-                <a:cs typeface="Calibri" pitchFamily="34" charset="-120"/>
+                  <a:srgbClr val="7A003F"/>
+                </a:solidFill>
+                <a:latin typeface="Lucida Sans" pitchFamily="34" charset="0"/>
+                <a:ea typeface="Lucida Sans" pitchFamily="34" charset="-122"/>
+                <a:cs typeface="Lucida Sans" pitchFamily="34" charset="-120"/>
               </a:rPr>
               <a:t>Roboter → Verbinden</a:t>
             </a:r>
@@ -14245,11 +14343,11 @@
             <a:r>
               <a:rPr lang="en-US" sz="1500" dirty="0">
                 <a:solidFill>
-                  <a:srgbClr val="1F2A30"/>
-                </a:solidFill>
-                <a:latin typeface="Calibri" pitchFamily="34" charset="0"/>
-                <a:ea typeface="Calibri" pitchFamily="34" charset="-122"/>
-                <a:cs typeface="Calibri" pitchFamily="34" charset="-120"/>
+                  <a:srgbClr val="1D1D1B"/>
+                </a:solidFill>
+                <a:latin typeface="Lucida Sans" pitchFamily="34" charset="0"/>
+                <a:ea typeface="Lucida Sans" pitchFamily="34" charset="-122"/>
+                <a:cs typeface="Lucida Sans" pitchFamily="34" charset="-120"/>
               </a:rPr>
               <a:t>Token eingeben, bestätigen</a:t>
             </a:r>
@@ -14274,11 +14372,11 @@
             </a:avLst>
           </a:prstGeom>
           <a:solidFill>
-            <a:srgbClr val="E6F2F1"/>
+            <a:srgbClr val="F2F2F2"/>
           </a:solidFill>
           <a:ln w="12700">
             <a:solidFill>
-              <a:srgbClr val="E6F2F1"/>
+              <a:srgbClr val="F2F2F2"/>
             </a:solidFill>
             <a:prstDash val="solid"/>
           </a:ln>
@@ -14299,11 +14397,11 @@
             <a:avLst/>
           </a:prstGeom>
           <a:solidFill>
-            <a:srgbClr val="0B6E69"/>
+            <a:srgbClr val="7A003F"/>
           </a:solidFill>
           <a:ln w="12700">
             <a:solidFill>
-              <a:srgbClr val="0B6E69"/>
+              <a:srgbClr val="7A003F"/>
             </a:solidFill>
             <a:prstDash val="solid"/>
           </a:ln>
@@ -14338,9 +14436,9 @@
                 <a:solidFill>
                   <a:srgbClr val="FFFFFF"/>
                 </a:solidFill>
-                <a:latin typeface="Calibri" pitchFamily="34" charset="0"/>
-                <a:ea typeface="Calibri" pitchFamily="34" charset="-122"/>
-                <a:cs typeface="Calibri" pitchFamily="34" charset="-120"/>
+                <a:latin typeface="Lucida Sans" pitchFamily="34" charset="0"/>
+                <a:ea typeface="Lucida Sans" pitchFamily="34" charset="-122"/>
+                <a:cs typeface="Lucida Sans" pitchFamily="34" charset="-120"/>
               </a:rPr>
               <a:t>6</a:t>
             </a:r>
@@ -14375,11 +14473,11 @@
             <a:r>
               <a:rPr lang="en-US" sz="1500" b="1" dirty="0">
                 <a:solidFill>
-                  <a:srgbClr val="0B3C49"/>
-                </a:solidFill>
-                <a:latin typeface="Calibri" pitchFamily="34" charset="0"/>
-                <a:ea typeface="Calibri" pitchFamily="34" charset="-122"/>
-                <a:cs typeface="Calibri" pitchFamily="34" charset="-120"/>
+                  <a:srgbClr val="7A003F"/>
+                </a:solidFill>
+                <a:latin typeface="Lucida Sans" pitchFamily="34" charset="0"/>
+                <a:ea typeface="Lucida Sans" pitchFamily="34" charset="-122"/>
+                <a:cs typeface="Lucida Sans" pitchFamily="34" charset="-120"/>
               </a:rPr>
               <a:t>Programm übertragen</a:t>
             </a:r>
@@ -14414,11 +14512,11 @@
             <a:r>
               <a:rPr lang="en-US" sz="1500" dirty="0">
                 <a:solidFill>
-                  <a:srgbClr val="1F2A30"/>
-                </a:solidFill>
-                <a:latin typeface="Calibri" pitchFamily="34" charset="0"/>
-                <a:ea typeface="Calibri" pitchFamily="34" charset="-122"/>
-                <a:cs typeface="Calibri" pitchFamily="34" charset="-120"/>
+                  <a:srgbClr val="1D1D1B"/>
+                </a:solidFill>
+                <a:latin typeface="Lucida Sans" pitchFamily="34" charset="0"/>
+                <a:ea typeface="Lucida Sans" pitchFamily="34" charset="-122"/>
+                <a:cs typeface="Lucida Sans" pitchFamily="34" charset="-120"/>
               </a:rPr>
               <a:t>Play-Knopf unten rechts</a:t>
             </a:r>
@@ -14443,11 +14541,11 @@
             </a:avLst>
           </a:prstGeom>
           <a:solidFill>
-            <a:srgbClr val="FCEBDD"/>
+            <a:srgbClr val="FDF0E3"/>
           </a:solidFill>
           <a:ln w="12700">
             <a:solidFill>
-              <a:srgbClr val="FCEBDD"/>
+              <a:srgbClr val="FDF0E3"/>
             </a:solidFill>
             <a:prstDash val="solid"/>
           </a:ln>
@@ -14468,11 +14566,11 @@
             <a:avLst/>
           </a:prstGeom>
           <a:solidFill>
-            <a:srgbClr val="E8772E"/>
+            <a:srgbClr val="EF7D00"/>
           </a:solidFill>
           <a:ln w="12700">
             <a:solidFill>
-              <a:srgbClr val="E8772E"/>
+              <a:srgbClr val="EF7D00"/>
             </a:solidFill>
             <a:prstDash val="solid"/>
           </a:ln>
@@ -14505,11 +14603,11 @@
             <a:r>
               <a:rPr lang="en-US" sz="2000" b="1" dirty="0">
                 <a:solidFill>
-                  <a:srgbClr val="FFFFFF"/>
-                </a:solidFill>
-                <a:latin typeface="Calibri" pitchFamily="34" charset="0"/>
-                <a:ea typeface="Calibri" pitchFamily="34" charset="-122"/>
-                <a:cs typeface="Calibri" pitchFamily="34" charset="-120"/>
+                  <a:srgbClr val="1D1D1B"/>
+                </a:solidFill>
+                <a:latin typeface="Lucida Sans" pitchFamily="34" charset="0"/>
+                <a:ea typeface="Lucida Sans" pitchFamily="34" charset="-122"/>
+                <a:cs typeface="Lucida Sans" pitchFamily="34" charset="-120"/>
               </a:rPr>
               <a:t>!</a:t>
             </a:r>
@@ -14544,11 +14642,11 @@
             <a:r>
               <a:rPr lang="en-US" sz="1500" dirty="0">
                 <a:solidFill>
-                  <a:srgbClr val="0B3C49"/>
-                </a:solidFill>
-                <a:latin typeface="Calibri" pitchFamily="34" charset="0"/>
-                <a:ea typeface="Calibri" pitchFamily="34" charset="-122"/>
-                <a:cs typeface="Calibri" pitchFamily="34" charset="-120"/>
+                  <a:srgbClr val="7A003F"/>
+                </a:solidFill>
+                <a:latin typeface="Lucida Sans" pitchFamily="34" charset="0"/>
+                <a:ea typeface="Lucida Sans" pitchFamily="34" charset="-122"/>
+                <a:cs typeface="Lucida Sans" pitchFamily="34" charset="-120"/>
               </a:rPr>
               <a:t>Für den mBot2 gibt es in Open Roberta keinen Simulator. Programme werden direkt am Gerät getestet – deshalb sagen wir vorher voraus, was passieren wird.</a:t>
             </a:r>
@@ -14586,11 +14684,11 @@
             <a:lvl1pPr>
               <a:defRPr sz="1000">
                 <a:solidFill>
-                  <a:srgbClr val="5B6B73"/>
-                </a:solidFill>
-                <a:latin typeface="Calibri"/>
-                <a:ea typeface="Calibri"/>
-                <a:cs typeface="Calibri"/>
+                  <a:srgbClr val="706F6F"/>
+                </a:solidFill>
+                <a:latin typeface="Lucida Sans"/>
+                <a:ea typeface="Lucida Sans"/>
+                <a:cs typeface="Lucida Sans"/>
               </a:defRPr>
             </a:lvl1pPr>
           </a:lstStyle>
@@ -14655,7 +14753,7 @@
     </a:clrScheme>
     <a:fontScheme name="Office">
       <a:majorFont>
-        <a:latin typeface="Cambria"/>
+        <a:latin typeface="Lucida Sans"/>
         <a:ea typeface=""/>
         <a:cs typeface=""/>
         <a:font script="Jpan" typeface="游ゴシック Light"/>
@@ -14707,7 +14805,7 @@
         <a:font script="Tfng" typeface="Ebrima"/>
       </a:majorFont>
       <a:minorFont>
-        <a:latin typeface="Calibri"/>
+        <a:latin typeface="Lucida Sans"/>
         <a:ea typeface=""/>
         <a:cs typeface=""/>
         <a:font script="Jpan" typeface="游ゴシック"/>
